--- a/hackathon-submission/Student_Setu_HSC.pptx
+++ b/hackathon-submission/Student_Setu_HSC.pptx
@@ -113,37 +113,37 @@
   <p:extLst>
     <p:ext uri="{521415D9-36F7-43E2-AB2F-B90AF26B5E84}">
       <p14:sectionLst xmlns:p14="http://schemas.microsoft.com/office/powerpoint/2010/main">
-        <p14:section name="Cover" id="{1580450a-7482-cdfe-0446-d356a4c4b765}">
+        <p14:section name="Cover" id="{2f6e8c1a-bbfa-b101-4a1f-7b6d31e7ce33}">
           <p14:sldIdLst>
             <p14:sldId id="256"/>
           </p14:sldIdLst>
         </p14:section>
-        <p14:section name="Problem &amp; solution" id="{5b4b0e30-d039-cb1e-cf9d-196b332a2f72}">
+        <p14:section name="Problem &amp; solution" id="{3c6bc832-607b-073a-a5f4-9d4cbb3e57b3}">
           <p14:sldIdLst>
             <p14:sldId id="257"/>
           </p14:sldIdLst>
         </p14:section>
-        <p14:section name="Technical approach" id="{fb4c9cc6-c01a-fa3c-0c88-61d628f05c1b}">
+        <p14:section name="Technical approach" id="{9438f138-0a30-235c-42a7-b325888594f2}">
           <p14:sldIdLst>
             <p14:sldId id="258"/>
           </p14:sldIdLst>
         </p14:section>
-        <p14:section name="Impact" id="{e73d396b-93a4-f3ef-6c90-060e28551394}">
+        <p14:section name="Impact" id="{aa91840a-4249-9539-9cab-be202e8cbe98}">
           <p14:sldIdLst>
             <p14:sldId id="259"/>
           </p14:sldIdLst>
         </p14:section>
-        <p14:section name="Feasibility &amp; risk" id="{48b713af-f2b1-db51-f6a4-70fedcc40045}">
+        <p14:section name="Feasibility &amp; risk" id="{6a396ac8-960b-936f-10ca-38b0e20a7ede}">
           <p14:sldIdLst>
             <p14:sldId id="260"/>
           </p14:sldIdLst>
         </p14:section>
-        <p14:section name="Team" id="{63d042ec-a808-5ef1-0b00-5320cf7b6981}">
+        <p14:section name="Team" id="{00374367-d867-02b7-5b8c-a8c8bed7d469}">
           <p14:sldIdLst>
             <p14:sldId id="261"/>
           </p14:sldIdLst>
         </p14:section>
-        <p14:section name="References" id="{43a7bfff-164c-87b8-2d55-1d7fe6d7732b}">
+        <p14:section name="References" id="{328728f5-77d3-9614-9cb0-346d771baa39}">
           <p14:sldIdLst>
             <p14:sldId id="262"/>
           </p14:sldIdLst>
@@ -552,7 +552,7 @@
           <a:p>
             <a:r>
               <a:rPr lang="en-US" dirty="0"/>
-              <a:t>Cover: Student Setu is an AI-powered curriculum-to-career bridge. Fill in Team Name, Team ID and State/UT exactly as registered on the portal.</a:t>
+              <a:t>Cover: Student Setu is one free ecosystem from study to job. Fill in Team Name, Team ID and State/UT exactly as registered on the portal.</a:t>
             </a:r>
             <a:endParaRPr lang="en-US" dirty="0"/>
           </a:p>
@@ -640,7 +640,7 @@
           <a:p>
             <a:r>
               <a:rPr lang="en-US" dirty="0"/>
-              <a:t>Problem: graduates are not job-ready, few have vocational training, teachers are stretched. Solution: Skill Bridge for students, Teacher Copilot for teachers, Bharat-first access for everyone.</a:t>
+              <a:t>Problem: graduates are not job-ready, few have vocational training, teachers are stretched. Solution: one journey — pathways for school students, Skill Bridge for college students, matched jobs and SIDF for graduates — plus Teacher Copilot.</a:t>
             </a:r>
             <a:endParaRPr lang="en-US" dirty="0"/>
           </a:p>
@@ -816,7 +816,7 @@
           <a:p>
             <a:r>
               <a:rPr lang="en-US" dirty="0"/>
-              <a:t>Audience: students, teachers, vocational learners. Eight stakeholder groups connect through the platform. Benefits are social, economic, educational and institutional.</a:t>
+              <a:t>Audience: school students, college students, teachers, graduates and trade learners. Eight stakeholder groups connect through the platform. Benefits are social, economic, educational and institutional.</a:t>
             </a:r>
             <a:endParaRPr lang="en-US" dirty="0"/>
           </a:p>
@@ -904,7 +904,7 @@
           <a:p>
             <a:r>
               <a:rPr lang="en-US" dirty="0"/>
-              <a:t>Feasibility is proven by the live prototype. Seven risks, each with a concrete mitigation already built or planned.</a:t>
+              <a:t>Feasibility is proven by the live prototype. Eight risks, each with a concrete mitigation already built or planned.</a:t>
             </a:r>
             <a:endParaRPr lang="en-US" dirty="0"/>
           </a:p>
@@ -2363,7 +2363,7 @@
         <p:spPr>
           <a:xfrm>
             <a:off x="6217920" y="1435608"/>
-            <a:ext cx="5577840" cy="1051560"/>
+            <a:ext cx="5577840" cy="1307592"/>
           </a:xfrm>
           <a:prstGeom prst="rect">
             <a:avLst/>
@@ -2404,7 +2404,7 @@
                 <a:ea typeface="Calibri" pitchFamily="34" charset="-122"/>
                 <a:cs typeface="Calibri" pitchFamily="34" charset="-120"/>
               </a:rPr>
-              <a:t>Personalised skilling for students, an AI copilot for teachers and vocational training in Hindi — built to work on low-bandwidth phones across Bharat.</a:t>
+              <a:t>One free ecosystem from study to job: Class 12 course pathways, skill-gap plans with verified badges, matched jobs, an AI copilot for teachers, counselling and vocational training in Hindi.</a:t>
             </a:r>
             <a:endParaRPr lang="en-US" sz="1400" dirty="0"/>
           </a:p>
@@ -2418,7 +2418,7 @@
         </p:nvSpPr>
         <p:spPr>
           <a:xfrm>
-            <a:off x="5486400" y="2578608"/>
+            <a:off x="5486400" y="2834640"/>
             <a:ext cx="548640" cy="548640"/>
           </a:xfrm>
           <a:prstGeom prst="ellipse">
@@ -2451,7 +2451,7 @@
         </p:blipFill>
         <p:spPr>
           <a:xfrm>
-            <a:off x="5618074" y="2710282"/>
+            <a:off x="5618074" y="2966314"/>
             <a:ext cx="285293" cy="285293"/>
           </a:xfrm>
           <a:prstGeom prst="rect">
@@ -2467,7 +2467,7 @@
         </p:nvSpPr>
         <p:spPr>
           <a:xfrm>
-            <a:off x="6217920" y="2560320"/>
+            <a:off x="6217920" y="2816352"/>
             <a:ext cx="5577840" cy="228600"/>
           </a:xfrm>
           <a:prstGeom prst="rect">
@@ -2506,8 +2506,8 @@
         </p:nvSpPr>
         <p:spPr>
           <a:xfrm>
-            <a:off x="6217920" y="2807208"/>
-            <a:ext cx="5577840" cy="685800"/>
+            <a:off x="6217920" y="3063240"/>
+            <a:ext cx="5577840" cy="640080"/>
           </a:xfrm>
           <a:prstGeom prst="rect">
             <a:avLst/>
@@ -2562,7 +2562,7 @@
         </p:nvSpPr>
         <p:spPr>
           <a:xfrm>
-            <a:off x="5486400" y="3584448"/>
+            <a:off x="5486400" y="3794760"/>
             <a:ext cx="548640" cy="548640"/>
           </a:xfrm>
           <a:prstGeom prst="ellipse">
@@ -2595,7 +2595,7 @@
         </p:blipFill>
         <p:spPr>
           <a:xfrm>
-            <a:off x="5618074" y="3716122"/>
+            <a:off x="5618074" y="3926434"/>
             <a:ext cx="285293" cy="285293"/>
           </a:xfrm>
           <a:prstGeom prst="rect">
@@ -2611,7 +2611,7 @@
         </p:nvSpPr>
         <p:spPr>
           <a:xfrm>
-            <a:off x="6217920" y="3566160"/>
+            <a:off x="6217920" y="3776472"/>
             <a:ext cx="3840480" cy="228600"/>
           </a:xfrm>
           <a:prstGeom prst="rect">
@@ -2650,7 +2650,7 @@
         </p:nvSpPr>
         <p:spPr>
           <a:xfrm>
-            <a:off x="6217920" y="3813048"/>
+            <a:off x="6217920" y="4023360"/>
             <a:ext cx="3840480" cy="502920"/>
           </a:xfrm>
           <a:prstGeom prst="rect">
@@ -2689,7 +2689,7 @@
         </p:nvSpPr>
         <p:spPr>
           <a:xfrm>
-            <a:off x="5486400" y="4407408"/>
+            <a:off x="5486400" y="4617720"/>
             <a:ext cx="548640" cy="548640"/>
           </a:xfrm>
           <a:prstGeom prst="ellipse">
@@ -2722,7 +2722,7 @@
         </p:blipFill>
         <p:spPr>
           <a:xfrm>
-            <a:off x="5618074" y="4539082"/>
+            <a:off x="5618074" y="4749394"/>
             <a:ext cx="285293" cy="285293"/>
           </a:xfrm>
           <a:prstGeom prst="rect">
@@ -2738,7 +2738,7 @@
         </p:nvSpPr>
         <p:spPr>
           <a:xfrm>
-            <a:off x="6217920" y="4389120"/>
+            <a:off x="6217920" y="4599432"/>
             <a:ext cx="3840480" cy="228600"/>
           </a:xfrm>
           <a:prstGeom prst="rect">
@@ -2777,7 +2777,7 @@
         </p:nvSpPr>
         <p:spPr>
           <a:xfrm>
-            <a:off x="6217920" y="4636008"/>
+            <a:off x="6217920" y="4846320"/>
             <a:ext cx="3840480" cy="502920"/>
           </a:xfrm>
           <a:prstGeom prst="rect">
@@ -2816,7 +2816,7 @@
         </p:nvSpPr>
         <p:spPr>
           <a:xfrm>
-            <a:off x="5486400" y="5230368"/>
+            <a:off x="5486400" y="5440680"/>
             <a:ext cx="548640" cy="548640"/>
           </a:xfrm>
           <a:prstGeom prst="ellipse">
@@ -2849,7 +2849,7 @@
         </p:blipFill>
         <p:spPr>
           <a:xfrm>
-            <a:off x="5618074" y="5362042"/>
+            <a:off x="5618074" y="5572354"/>
             <a:ext cx="285293" cy="285293"/>
           </a:xfrm>
           <a:prstGeom prst="rect">
@@ -2865,7 +2865,7 @@
         </p:nvSpPr>
         <p:spPr>
           <a:xfrm>
-            <a:off x="6217920" y="5212080"/>
+            <a:off x="6217920" y="5422392"/>
             <a:ext cx="3840480" cy="228600"/>
           </a:xfrm>
           <a:prstGeom prst="rect">
@@ -2904,7 +2904,7 @@
         </p:nvSpPr>
         <p:spPr>
           <a:xfrm>
-            <a:off x="6217920" y="5458968"/>
+            <a:off x="6217920" y="5669280"/>
             <a:ext cx="3840480" cy="502920"/>
           </a:xfrm>
           <a:prstGeom prst="rect">
@@ -3856,7 +3856,7 @@
                 <a:ea typeface="Calibri" pitchFamily="34" charset="-122"/>
                 <a:cs typeface="Calibri" pitchFamily="34" charset="-120"/>
               </a:rPr>
-              <a:t>PROPOSED SOLUTION — ONE PLATFORM, THREE PILLARS</a:t>
+              <a:t>PROPOSED SOLUTION — ONE JOURNEY FROM STUDY TO JOB, PLUS TEACHERS</a:t>
             </a:r>
             <a:endParaRPr lang="en-US" sz="1200" dirty="0"/>
           </a:p>
@@ -3871,7 +3871,285 @@
         <p:spPr>
           <a:xfrm>
             <a:off x="457200" y="2926080"/>
-            <a:ext cx="3657600" cy="2240280"/>
+            <a:ext cx="2697480" cy="2240280"/>
+          </a:xfrm>
+          <a:prstGeom prst="roundRect">
+            <a:avLst>
+              <a:gd name="adj" fmla="val 4898"/>
+            </a:avLst>
+          </a:prstGeom>
+          <a:solidFill>
+            <a:srgbClr val="EEF0FF"/>
+          </a:solidFill>
+          <a:ln w="12700">
+            <a:solidFill>
+              <a:srgbClr val="EEF0FF"/>
+            </a:solidFill>
+            <a:prstDash val="solid"/>
+          </a:ln>
+        </p:spPr>
+      </p:sp>
+      <p:sp>
+        <p:nvSpPr>
+          <p:cNvPr id="24" name="School circle"/>
+          <p:cNvSpPr/>
+          <p:nvPr/>
+        </p:nvSpPr>
+        <p:spPr>
+          <a:xfrm>
+            <a:off x="594360" y="3044952"/>
+            <a:ext cx="475488" cy="475488"/>
+          </a:xfrm>
+          <a:prstGeom prst="ellipse">
+            <a:avLst/>
+          </a:prstGeom>
+          <a:solidFill>
+            <a:srgbClr val="4F46E5"/>
+          </a:solidFill>
+          <a:ln w="12700">
+            <a:solidFill>
+              <a:srgbClr val="4F46E5"/>
+            </a:solidFill>
+            <a:prstDash val="solid"/>
+          </a:ln>
+        </p:spPr>
+      </p:sp>
+      <p:pic>
+        <p:nvPicPr>
+          <p:cNvPr id="25" name="School icon" descr="School icon">    </p:cNvPr>
+          <p:cNvPicPr>
+            <a:picLocks noChangeAspect="1"/>
+          </p:cNvPicPr>
+          <p:nvPr/>
+        </p:nvPicPr>
+        <p:blipFill>
+          <a:blip r:embed="rId1"/>
+          <a:stretch>
+            <a:fillRect/>
+          </a:stretch>
+        </p:blipFill>
+        <p:spPr>
+          <a:xfrm>
+            <a:off x="708477" y="3159069"/>
+            <a:ext cx="247254" cy="247254"/>
+          </a:xfrm>
+          <a:prstGeom prst="rect">
+            <a:avLst/>
+          </a:prstGeom>
+        </p:spPr>
+      </p:pic>
+      <p:sp>
+        <p:nvSpPr>
+          <p:cNvPr id="26" name="Text 23"/>
+          <p:cNvSpPr txBox="1"/>
+          <p:nvPr/>
+        </p:nvSpPr>
+        <p:spPr>
+          <a:xfrm>
+            <a:off x="1161288" y="3035808"/>
+            <a:ext cx="1920240" cy="274320"/>
+          </a:xfrm>
+          <a:prstGeom prst="rect">
+            <a:avLst/>
+          </a:prstGeom>
+          <a:noFill/>
+          <a:ln/>
+        </p:spPr>
+        <p:txBody>
+          <a:bodyPr wrap="square" lIns="0" tIns="0" rIns="0" bIns="0" rtlCol="0" anchor="t"/>
+          <a:lstStyle/>
+          <a:p>
+            <a:pPr indent="0" marL="0">
+              <a:buNone/>
+            </a:pPr>
+            <a:r>
+              <a:rPr lang="en-US" sz="1400" b="1" dirty="0">
+                <a:solidFill>
+                  <a:srgbClr val="4F46E5"/>
+                </a:solidFill>
+                <a:latin typeface="Calibri" pitchFamily="34" charset="0"/>
+                <a:ea typeface="Calibri" pitchFamily="34" charset="-122"/>
+                <a:cs typeface="Calibri" pitchFamily="34" charset="-120"/>
+              </a:rPr>
+              <a:t>After 12th Pathways</a:t>
+            </a:r>
+            <a:endParaRPr lang="en-US" sz="1400" dirty="0"/>
+          </a:p>
+        </p:txBody>
+      </p:sp>
+      <p:sp>
+        <p:nvSpPr>
+          <p:cNvPr id="27" name="Text 24"/>
+          <p:cNvSpPr txBox="1"/>
+          <p:nvPr/>
+        </p:nvSpPr>
+        <p:spPr>
+          <a:xfrm>
+            <a:off x="1161288" y="3300984"/>
+            <a:ext cx="1920240" cy="219456"/>
+          </a:xfrm>
+          <a:prstGeom prst="rect">
+            <a:avLst/>
+          </a:prstGeom>
+          <a:noFill/>
+          <a:ln/>
+        </p:spPr>
+        <p:txBody>
+          <a:bodyPr wrap="square" lIns="0" tIns="0" rIns="0" bIns="0" rtlCol="0" anchor="t"/>
+          <a:lstStyle/>
+          <a:p>
+            <a:pPr indent="0" marL="0">
+              <a:buNone/>
+            </a:pPr>
+            <a:r>
+              <a:rPr lang="en-US" sz="1050" dirty="0">
+                <a:solidFill>
+                  <a:srgbClr val="64748B"/>
+                </a:solidFill>
+                <a:latin typeface="Calibri" pitchFamily="34" charset="0"/>
+                <a:ea typeface="Calibri" pitchFamily="34" charset="-122"/>
+                <a:cs typeface="Calibri" pitchFamily="34" charset="-120"/>
+              </a:rPr>
+              <a:t>School students</a:t>
+            </a:r>
+            <a:endParaRPr lang="en-US" sz="1050" dirty="0"/>
+          </a:p>
+        </p:txBody>
+      </p:sp>
+      <p:sp>
+        <p:nvSpPr>
+          <p:cNvPr id="28" name="Text 25"/>
+          <p:cNvSpPr txBox="1"/>
+          <p:nvPr/>
+        </p:nvSpPr>
+        <p:spPr>
+          <a:xfrm>
+            <a:off x="566928" y="3639312"/>
+            <a:ext cx="2514600" cy="1188720"/>
+          </a:xfrm>
+          <a:prstGeom prst="rect">
+            <a:avLst/>
+          </a:prstGeom>
+          <a:noFill/>
+          <a:ln/>
+        </p:spPr>
+        <p:txBody>
+          <a:bodyPr wrap="square" lIns="0" tIns="0" rIns="0" bIns="0" rtlCol="0" anchor="t"/>
+          <a:lstStyle/>
+          <a:p>
+            <a:pPr marL="127000" indent="-127000">
+              <a:spcAft>
+                <a:spcPts val="300"/>
+              </a:spcAft>
+              <a:buSzPct val="100000"/>
+              <a:buChar char="•"/>
+            </a:pPr>
+            <a:r>
+              <a:rPr lang="en-US" sz="1050" dirty="0">
+                <a:solidFill>
+                  <a:srgbClr val="0F172A"/>
+                </a:solidFill>
+                <a:latin typeface="Calibri" pitchFamily="34" charset="0"/>
+                <a:ea typeface="Calibri" pitchFamily="34" charset="-122"/>
+                <a:cs typeface="Calibri" pitchFamily="34" charset="-120"/>
+              </a:rPr>
+              <a:t>Class 12 subjects → every course, public &amp; private</a:t>
+            </a:r>
+            <a:endParaRPr lang="en-US" sz="1050" dirty="0"/>
+          </a:p>
+          <a:p>
+            <a:pPr marL="127000" indent="-127000">
+              <a:spcAft>
+                <a:spcPts val="300"/>
+              </a:spcAft>
+              <a:buSzPct val="100000"/>
+              <a:buChar char="•"/>
+            </a:pPr>
+            <a:r>
+              <a:rPr lang="en-US" sz="1050" dirty="0">
+                <a:solidFill>
+                  <a:srgbClr val="0F172A"/>
+                </a:solidFill>
+                <a:latin typeface="Calibri" pitchFamily="34" charset="0"/>
+                <a:ea typeface="Calibri" pitchFamily="34" charset="-122"/>
+                <a:cs typeface="Calibri" pitchFamily="34" charset="-120"/>
+              </a:rPr>
+              <a:t>Entrance exams, roadmap, free notes &amp; videos</a:t>
+            </a:r>
+            <a:endParaRPr lang="en-US" sz="1050" dirty="0"/>
+          </a:p>
+          <a:p>
+            <a:pPr marL="127000" indent="-127000">
+              <a:spcAft>
+                <a:spcPts val="300"/>
+              </a:spcAft>
+              <a:buSzPct val="100000"/>
+              <a:buChar char="•"/>
+            </a:pPr>
+            <a:r>
+              <a:rPr lang="en-US" sz="1050" dirty="0">
+                <a:solidFill>
+                  <a:srgbClr val="0F172A"/>
+                </a:solidFill>
+                <a:latin typeface="Calibri" pitchFamily="34" charset="0"/>
+                <a:ea typeface="Calibri" pitchFamily="34" charset="-122"/>
+                <a:cs typeface="Calibri" pitchFamily="34" charset="-120"/>
+              </a:rPr>
+              <a:t>Plan B careers if NEET/JEE goes wrong + counselling</a:t>
+            </a:r>
+            <a:endParaRPr lang="en-US" sz="1050" dirty="0"/>
+          </a:p>
+        </p:txBody>
+      </p:sp>
+      <p:sp>
+        <p:nvSpPr>
+          <p:cNvPr id="29" name="Text 26"/>
+          <p:cNvSpPr txBox="1"/>
+          <p:nvPr/>
+        </p:nvSpPr>
+        <p:spPr>
+          <a:xfrm>
+            <a:off x="594360" y="4846320"/>
+            <a:ext cx="2468880" cy="237744"/>
+          </a:xfrm>
+          <a:prstGeom prst="rect">
+            <a:avLst/>
+          </a:prstGeom>
+          <a:noFill/>
+          <a:ln/>
+        </p:spPr>
+        <p:txBody>
+          <a:bodyPr wrap="square" lIns="0" tIns="0" rIns="0" bIns="0" rtlCol="0" anchor="ctr"/>
+          <a:lstStyle/>
+          <a:p>
+            <a:pPr indent="0" marL="0">
+              <a:buNone/>
+            </a:pPr>
+            <a:r>
+              <a:rPr lang="en-US" sz="1050" b="1" dirty="0">
+                <a:solidFill>
+                  <a:srgbClr val="4F46E5"/>
+                </a:solidFill>
+                <a:latin typeface="Calibri" pitchFamily="34" charset="0"/>
+                <a:ea typeface="Calibri" pitchFamily="34" charset="-122"/>
+                <a:cs typeface="Calibri" pitchFamily="34" charset="-120"/>
+              </a:rPr>
+              <a:t>Solves: career confusion</a:t>
+            </a:r>
+            <a:endParaRPr lang="en-US" sz="1050" dirty="0"/>
+          </a:p>
+        </p:txBody>
+      </p:sp>
+      <p:sp>
+        <p:nvSpPr>
+          <p:cNvPr id="30" name="pillar card"/>
+          <p:cNvSpPr/>
+          <p:nvPr/>
+        </p:nvSpPr>
+        <p:spPr>
+          <a:xfrm>
+            <a:off x="3319272" y="2926080"/>
+            <a:ext cx="2697480" cy="2240280"/>
           </a:xfrm>
           <a:prstGeom prst="roundRect">
             <a:avLst>
@@ -3891,14 +4169,14 @@
       </p:sp>
       <p:sp>
         <p:nvSpPr>
-          <p:cNvPr id="24" name="GraduationCap circle"/>
+          <p:cNvPr id="31" name="GraduationCap circle"/>
           <p:cNvSpPr/>
           <p:nvPr/>
         </p:nvSpPr>
         <p:spPr>
           <a:xfrm>
-            <a:off x="640080" y="3063240"/>
-            <a:ext cx="566928" cy="566928"/>
+            <a:off x="3456432" y="3044952"/>
+            <a:ext cx="475488" cy="475488"/>
           </a:xfrm>
           <a:prstGeom prst="ellipse">
             <a:avLst/>
@@ -3916,22 +4194,22 @@
       </p:sp>
       <p:pic>
         <p:nvPicPr>
-          <p:cNvPr id="25" name="GraduationCap icon" descr="GraduationCap icon">    </p:cNvPr>
+          <p:cNvPr id="32" name="GraduationCap icon" descr="GraduationCap icon">    </p:cNvPr>
           <p:cNvPicPr>
             <a:picLocks noChangeAspect="1"/>
           </p:cNvPicPr>
           <p:nvPr/>
         </p:nvPicPr>
         <p:blipFill>
-          <a:blip r:embed="rId1"/>
+          <a:blip r:embed="rId2"/>
           <a:stretch>
             <a:fillRect/>
           </a:stretch>
         </p:blipFill>
         <p:spPr>
           <a:xfrm>
-            <a:off x="776143" y="3199303"/>
-            <a:ext cx="294803" cy="294803"/>
+            <a:off x="3570549" y="3159069"/>
+            <a:ext cx="247254" cy="247254"/>
           </a:xfrm>
           <a:prstGeom prst="rect">
             <a:avLst/>
@@ -3940,14 +4218,14 @@
       </p:pic>
       <p:sp>
         <p:nvSpPr>
-          <p:cNvPr id="26" name="Text 23"/>
-          <p:cNvSpPr txBox="1"/>
-          <p:nvPr/>
-        </p:nvSpPr>
-        <p:spPr>
-          <a:xfrm>
-            <a:off x="1325880" y="3072384"/>
-            <a:ext cx="2651760" cy="329184"/>
+          <p:cNvPr id="33" name="Text 29"/>
+          <p:cNvSpPr txBox="1"/>
+          <p:nvPr/>
+        </p:nvSpPr>
+        <p:spPr>
+          <a:xfrm>
+            <a:off x="4023360" y="3035808"/>
+            <a:ext cx="1920240" cy="274320"/>
           </a:xfrm>
           <a:prstGeom prst="rect">
             <a:avLst/>
@@ -3963,7 +4241,7 @@
               <a:buNone/>
             </a:pPr>
             <a:r>
-              <a:rPr lang="en-US" sz="1700" b="1" dirty="0">
+              <a:rPr lang="en-US" sz="1400" b="1" dirty="0">
                 <a:solidFill>
                   <a:srgbClr val="1F2A6E"/>
                 </a:solidFill>
@@ -3973,20 +4251,20 @@
               </a:rPr>
               <a:t>Setu Skill Bridge</a:t>
             </a:r>
-            <a:endParaRPr lang="en-US" sz="1700" dirty="0"/>
-          </a:p>
-        </p:txBody>
-      </p:sp>
-      <p:sp>
-        <p:nvSpPr>
-          <p:cNvPr id="27" name="Text 24"/>
-          <p:cNvSpPr txBox="1"/>
-          <p:nvPr/>
-        </p:nvSpPr>
-        <p:spPr>
-          <a:xfrm>
-            <a:off x="1325880" y="3392424"/>
-            <a:ext cx="2651760" cy="237744"/>
+            <a:endParaRPr lang="en-US" sz="1400" dirty="0"/>
+          </a:p>
+        </p:txBody>
+      </p:sp>
+      <p:sp>
+        <p:nvSpPr>
+          <p:cNvPr id="34" name="Text 30"/>
+          <p:cNvSpPr txBox="1"/>
+          <p:nvPr/>
+        </p:nvSpPr>
+        <p:spPr>
+          <a:xfrm>
+            <a:off x="4023360" y="3300984"/>
+            <a:ext cx="1920240" cy="219456"/>
           </a:xfrm>
           <a:prstGeom prst="rect">
             <a:avLst/>
@@ -4002,7 +4280,7 @@
               <a:buNone/>
             </a:pPr>
             <a:r>
-              <a:rPr lang="en-US" sz="1100" dirty="0">
+              <a:rPr lang="en-US" sz="1050" dirty="0">
                 <a:solidFill>
                   <a:srgbClr val="64748B"/>
                 </a:solidFill>
@@ -4010,22 +4288,22 @@
                 <a:ea typeface="Calibri" pitchFamily="34" charset="-122"/>
                 <a:cs typeface="Calibri" pitchFamily="34" charset="-120"/>
               </a:rPr>
-              <a:t>For students</a:t>
-            </a:r>
-            <a:endParaRPr lang="en-US" sz="1100" dirty="0"/>
-          </a:p>
-        </p:txBody>
-      </p:sp>
-      <p:sp>
-        <p:nvSpPr>
-          <p:cNvPr id="28" name="Text 25"/>
-          <p:cNvSpPr txBox="1"/>
-          <p:nvPr/>
-        </p:nvSpPr>
-        <p:spPr>
-          <a:xfrm>
-            <a:off x="640080" y="3749040"/>
-            <a:ext cx="3337560" cy="1051560"/>
+              <a:t>College students</a:t>
+            </a:r>
+            <a:endParaRPr lang="en-US" sz="1050" dirty="0"/>
+          </a:p>
+        </p:txBody>
+      </p:sp>
+      <p:sp>
+        <p:nvSpPr>
+          <p:cNvPr id="35" name="Text 31"/>
+          <p:cNvSpPr txBox="1"/>
+          <p:nvPr/>
+        </p:nvSpPr>
+        <p:spPr>
+          <a:xfrm>
+            <a:off x="3429000" y="3639312"/>
+            <a:ext cx="2514600" cy="1188720"/>
           </a:xfrm>
           <a:prstGeom prst="rect">
             <a:avLst/>
@@ -4037,7 +4315,7 @@
           <a:bodyPr wrap="square" lIns="0" tIns="0" rIns="0" bIns="0" rtlCol="0" anchor="t"/>
           <a:lstStyle/>
           <a:p>
-            <a:pPr marL="152400" indent="-152400">
+            <a:pPr marL="127000" indent="-127000">
               <a:spcAft>
                 <a:spcPts val="300"/>
               </a:spcAft>
@@ -4045,7 +4323,7 @@
               <a:buChar char="•"/>
             </a:pPr>
             <a:r>
-              <a:rPr lang="en-US" sz="1100" dirty="0">
+              <a:rPr lang="en-US" sz="1050" dirty="0">
                 <a:solidFill>
                   <a:srgbClr val="0F172A"/>
                 </a:solidFill>
@@ -4053,12 +4331,12 @@
                 <a:ea typeface="Calibri" pitchFamily="34" charset="-122"/>
                 <a:cs typeface="Calibri" pitchFamily="34" charset="-120"/>
               </a:rPr>
-              <a:t>Gap Map: real syllabus (Course → University → Semester) vs 13 job roles × 45 skills</a:t>
-            </a:r>
-            <a:endParaRPr lang="en-US" sz="1100" dirty="0"/>
-          </a:p>
-          <a:p>
-            <a:pPr marL="152400" indent="-152400">
+              <a:t>Syllabus vs job gap map (45 skills × 13 roles)</a:t>
+            </a:r>
+            <a:endParaRPr lang="en-US" sz="1050" dirty="0"/>
+          </a:p>
+          <a:p>
+            <a:pPr marL="127000" indent="-127000">
               <a:spcAft>
                 <a:spcPts val="300"/>
               </a:spcAft>
@@ -4066,7 +4344,7 @@
               <a:buChar char="•"/>
             </a:pPr>
             <a:r>
-              <a:rPr lang="en-US" sz="1100" dirty="0">
+              <a:rPr lang="en-US" sz="1050" dirty="0">
                 <a:solidFill>
                   <a:srgbClr val="0F172A"/>
                 </a:solidFill>
@@ -4074,12 +4352,12 @@
                 <a:ea typeface="Calibri" pitchFamily="34" charset="-122"/>
                 <a:cs typeface="Calibri" pitchFamily="34" charset="-120"/>
               </a:rPr>
-              <a:t>Personalised week-by-week plan from free courses + AI coach tips</a:t>
-            </a:r>
-            <a:endParaRPr lang="en-US" sz="1100" dirty="0"/>
-          </a:p>
-          <a:p>
-            <a:pPr marL="152400" indent="-152400">
+              <a:t>Weekly plan + server-graded, signed badges</a:t>
+            </a:r>
+            <a:endParaRPr lang="en-US" sz="1050" dirty="0"/>
+          </a:p>
+          <a:p>
+            <a:pPr marL="127000" indent="-127000">
               <a:spcAft>
                 <a:spcPts val="300"/>
               </a:spcAft>
@@ -4087,7 +4365,7 @@
               <a:buChar char="•"/>
             </a:pPr>
             <a:r>
-              <a:rPr lang="en-US" sz="1100" dirty="0">
+              <a:rPr lang="en-US" sz="1050" dirty="0">
                 <a:solidFill>
                   <a:srgbClr val="0F172A"/>
                 </a:solidFill>
@@ -4095,22 +4373,22 @@
                 <a:ea typeface="Calibri" pitchFamily="34" charset="-122"/>
                 <a:cs typeface="Calibri" pitchFamily="34" charset="-120"/>
               </a:rPr>
-              <a:t>Verified Skill Badges: server-graded, signed, checkable by any employer</a:t>
-            </a:r>
-            <a:endParaRPr lang="en-US" sz="1100" dirty="0"/>
-          </a:p>
-        </p:txBody>
-      </p:sp>
-      <p:sp>
-        <p:nvSpPr>
-          <p:cNvPr id="29" name="Text 26"/>
-          <p:cNvSpPr txBox="1"/>
-          <p:nvPr/>
-        </p:nvSpPr>
-        <p:spPr>
-          <a:xfrm>
-            <a:off x="640080" y="4828032"/>
-            <a:ext cx="3337560" cy="256032"/>
+              <a:t>Skills Hub: free AI courses, Prompt Lab, leaderboard</a:t>
+            </a:r>
+            <a:endParaRPr lang="en-US" sz="1050" dirty="0"/>
+          </a:p>
+        </p:txBody>
+      </p:sp>
+      <p:sp>
+        <p:nvSpPr>
+          <p:cNvPr id="36" name="Text 32"/>
+          <p:cNvSpPr txBox="1"/>
+          <p:nvPr/>
+        </p:nvSpPr>
+        <p:spPr>
+          <a:xfrm>
+            <a:off x="3456432" y="4846320"/>
+            <a:ext cx="2468880" cy="237744"/>
           </a:xfrm>
           <a:prstGeom prst="rect">
             <a:avLst/>
@@ -4126,7 +4404,7 @@
               <a:buNone/>
             </a:pPr>
             <a:r>
-              <a:rPr lang="en-US" sz="1100" b="1" dirty="0">
+              <a:rPr lang="en-US" sz="1050" b="1" dirty="0">
                 <a:solidFill>
                   <a:srgbClr val="1F2A6E"/>
                 </a:solidFill>
@@ -4134,22 +4412,300 @@
                 <a:ea typeface="Calibri" pitchFamily="34" charset="-122"/>
                 <a:cs typeface="Calibri" pitchFamily="34" charset="-120"/>
               </a:rPr>
-              <a:t>Solves: skills gap · personalised education</a:t>
-            </a:r>
-            <a:endParaRPr lang="en-US" sz="1100" dirty="0"/>
-          </a:p>
-        </p:txBody>
-      </p:sp>
-      <p:sp>
-        <p:nvSpPr>
-          <p:cNvPr id="30" name="pillar card"/>
+              <a:t>Solves: skills gap</a:t>
+            </a:r>
+            <a:endParaRPr lang="en-US" sz="1050" dirty="0"/>
+          </a:p>
+        </p:txBody>
+      </p:sp>
+      <p:sp>
+        <p:nvSpPr>
+          <p:cNvPr id="37" name="pillar card"/>
           <p:cNvSpPr/>
           <p:nvPr/>
         </p:nvSpPr>
         <p:spPr>
           <a:xfrm>
-            <a:off x="4265676" y="2926080"/>
-            <a:ext cx="3657600" cy="2240280"/>
+            <a:off x="6181344" y="2926080"/>
+            <a:ext cx="2697480" cy="2240280"/>
+          </a:xfrm>
+          <a:prstGeom prst="roundRect">
+            <a:avLst>
+              <a:gd name="adj" fmla="val 4898"/>
+            </a:avLst>
+          </a:prstGeom>
+          <a:solidFill>
+            <a:srgbClr val="ECFDF3"/>
+          </a:solidFill>
+          <a:ln w="12700">
+            <a:solidFill>
+              <a:srgbClr val="ECFDF3"/>
+            </a:solidFill>
+            <a:prstDash val="solid"/>
+          </a:ln>
+        </p:spPr>
+      </p:sp>
+      <p:sp>
+        <p:nvSpPr>
+          <p:cNvPr id="38" name="Briefcase circle"/>
+          <p:cNvSpPr/>
+          <p:nvPr/>
+        </p:nvSpPr>
+        <p:spPr>
+          <a:xfrm>
+            <a:off x="6318504" y="3044952"/>
+            <a:ext cx="475488" cy="475488"/>
+          </a:xfrm>
+          <a:prstGeom prst="ellipse">
+            <a:avLst/>
+          </a:prstGeom>
+          <a:solidFill>
+            <a:srgbClr val="16A34A"/>
+          </a:solidFill>
+          <a:ln w="12700">
+            <a:solidFill>
+              <a:srgbClr val="16A34A"/>
+            </a:solidFill>
+            <a:prstDash val="solid"/>
+          </a:ln>
+        </p:spPr>
+      </p:sp>
+      <p:pic>
+        <p:nvPicPr>
+          <p:cNvPr id="39" name="Briefcase icon" descr="Briefcase icon">    </p:cNvPr>
+          <p:cNvPicPr>
+            <a:picLocks noChangeAspect="1"/>
+          </p:cNvPicPr>
+          <p:nvPr/>
+        </p:nvPicPr>
+        <p:blipFill>
+          <a:blip r:embed="rId3"/>
+          <a:stretch>
+            <a:fillRect/>
+          </a:stretch>
+        </p:blipFill>
+        <p:spPr>
+          <a:xfrm>
+            <a:off x="6432621" y="3159069"/>
+            <a:ext cx="247254" cy="247254"/>
+          </a:xfrm>
+          <a:prstGeom prst="rect">
+            <a:avLst/>
+          </a:prstGeom>
+        </p:spPr>
+      </p:pic>
+      <p:sp>
+        <p:nvSpPr>
+          <p:cNvPr id="40" name="Text 35"/>
+          <p:cNvSpPr txBox="1"/>
+          <p:nvPr/>
+        </p:nvSpPr>
+        <p:spPr>
+          <a:xfrm>
+            <a:off x="6885432" y="3035808"/>
+            <a:ext cx="1920240" cy="274320"/>
+          </a:xfrm>
+          <a:prstGeom prst="rect">
+            <a:avLst/>
+          </a:prstGeom>
+          <a:noFill/>
+          <a:ln/>
+        </p:spPr>
+        <p:txBody>
+          <a:bodyPr wrap="square" lIns="0" tIns="0" rIns="0" bIns="0" rtlCol="0" anchor="t"/>
+          <a:lstStyle/>
+          <a:p>
+            <a:pPr indent="0" marL="0">
+              <a:buNone/>
+            </a:pPr>
+            <a:r>
+              <a:rPr lang="en-US" sz="1400" b="1" dirty="0">
+                <a:solidFill>
+                  <a:srgbClr val="16A34A"/>
+                </a:solidFill>
+                <a:latin typeface="Calibri" pitchFamily="34" charset="0"/>
+                <a:ea typeface="Calibri" pitchFamily="34" charset="-122"/>
+                <a:cs typeface="Calibri" pitchFamily="34" charset="-120"/>
+              </a:rPr>
+              <a:t>Jobs &amp; Innovation</a:t>
+            </a:r>
+            <a:endParaRPr lang="en-US" sz="1400" dirty="0"/>
+          </a:p>
+        </p:txBody>
+      </p:sp>
+      <p:sp>
+        <p:nvSpPr>
+          <p:cNvPr id="41" name="Text 36"/>
+          <p:cNvSpPr txBox="1"/>
+          <p:nvPr/>
+        </p:nvSpPr>
+        <p:spPr>
+          <a:xfrm>
+            <a:off x="6885432" y="3300984"/>
+            <a:ext cx="1920240" cy="219456"/>
+          </a:xfrm>
+          <a:prstGeom prst="rect">
+            <a:avLst/>
+          </a:prstGeom>
+          <a:noFill/>
+          <a:ln/>
+        </p:spPr>
+        <p:txBody>
+          <a:bodyPr wrap="square" lIns="0" tIns="0" rIns="0" bIns="0" rtlCol="0" anchor="t"/>
+          <a:lstStyle/>
+          <a:p>
+            <a:pPr indent="0" marL="0">
+              <a:buNone/>
+            </a:pPr>
+            <a:r>
+              <a:rPr lang="en-US" sz="1050" dirty="0">
+                <a:solidFill>
+                  <a:srgbClr val="64748B"/>
+                </a:solidFill>
+                <a:latin typeface="Calibri" pitchFamily="34" charset="0"/>
+                <a:ea typeface="Calibri" pitchFamily="34" charset="-122"/>
+                <a:cs typeface="Calibri" pitchFamily="34" charset="-120"/>
+              </a:rPr>
+              <a:t>Graduates &amp; founders</a:t>
+            </a:r>
+            <a:endParaRPr lang="en-US" sz="1050" dirty="0"/>
+          </a:p>
+        </p:txBody>
+      </p:sp>
+      <p:sp>
+        <p:nvSpPr>
+          <p:cNvPr id="42" name="Text 37"/>
+          <p:cNvSpPr txBox="1"/>
+          <p:nvPr/>
+        </p:nvSpPr>
+        <p:spPr>
+          <a:xfrm>
+            <a:off x="6291072" y="3639312"/>
+            <a:ext cx="2514600" cy="1188720"/>
+          </a:xfrm>
+          <a:prstGeom prst="rect">
+            <a:avLst/>
+          </a:prstGeom>
+          <a:noFill/>
+          <a:ln/>
+        </p:spPr>
+        <p:txBody>
+          <a:bodyPr wrap="square" lIns="0" tIns="0" rIns="0" bIns="0" rtlCol="0" anchor="t"/>
+          <a:lstStyle/>
+          <a:p>
+            <a:pPr marL="127000" indent="-127000">
+              <a:spcAft>
+                <a:spcPts val="300"/>
+              </a:spcAft>
+              <a:buSzPct val="100000"/>
+              <a:buChar char="•"/>
+            </a:pPr>
+            <a:r>
+              <a:rPr lang="en-US" sz="1050" dirty="0">
+                <a:solidFill>
+                  <a:srgbClr val="0F172A"/>
+                </a:solidFill>
+                <a:latin typeface="Calibri" pitchFamily="34" charset="0"/>
+                <a:ea typeface="Calibri" pitchFamily="34" charset="-122"/>
+                <a:cs typeface="Calibri" pitchFamily="34" charset="-120"/>
+              </a:rPr>
+              <a:t>Update profile → jobs matched to degree &amp; skills</a:t>
+            </a:r>
+            <a:endParaRPr lang="en-US" sz="1050" dirty="0"/>
+          </a:p>
+          <a:p>
+            <a:pPr marL="127000" indent="-127000">
+              <a:spcAft>
+                <a:spcPts val="300"/>
+              </a:spcAft>
+              <a:buSzPct val="100000"/>
+              <a:buChar char="•"/>
+            </a:pPr>
+            <a:r>
+              <a:rPr lang="en-US" sz="1050" dirty="0">
+                <a:solidFill>
+                  <a:srgbClr val="0F172A"/>
+                </a:solidFill>
+                <a:latin typeface="Calibri" pitchFamily="34" charset="0"/>
+                <a:ea typeface="Calibri" pitchFamily="34" charset="-122"/>
+                <a:cs typeface="Calibri" pitchFamily="34" charset="-120"/>
+              </a:rPr>
+              <a:t>SIDF: startup events &amp; mentors in govt colleges</a:t>
+            </a:r>
+            <a:endParaRPr lang="en-US" sz="1050" dirty="0"/>
+          </a:p>
+          <a:p>
+            <a:pPr marL="127000" indent="-127000">
+              <a:spcAft>
+                <a:spcPts val="300"/>
+              </a:spcAft>
+              <a:buSzPct val="100000"/>
+              <a:buChar char="•"/>
+            </a:pPr>
+            <a:r>
+              <a:rPr lang="en-US" sz="1050" dirty="0">
+                <a:solidFill>
+                  <a:srgbClr val="0F172A"/>
+                </a:solidFill>
+                <a:latin typeface="Calibri" pitchFamily="34" charset="0"/>
+                <a:ea typeface="Calibri" pitchFamily="34" charset="-122"/>
+                <a:cs typeface="Calibri" pitchFamily="34" charset="-120"/>
+              </a:rPr>
+              <a:t>Government startup funding schemes in one place</a:t>
+            </a:r>
+            <a:endParaRPr lang="en-US" sz="1050" dirty="0"/>
+          </a:p>
+        </p:txBody>
+      </p:sp>
+      <p:sp>
+        <p:nvSpPr>
+          <p:cNvPr id="43" name="Text 38"/>
+          <p:cNvSpPr txBox="1"/>
+          <p:nvPr/>
+        </p:nvSpPr>
+        <p:spPr>
+          <a:xfrm>
+            <a:off x="6318504" y="4846320"/>
+            <a:ext cx="2468880" cy="237744"/>
+          </a:xfrm>
+          <a:prstGeom prst="rect">
+            <a:avLst/>
+          </a:prstGeom>
+          <a:noFill/>
+          <a:ln/>
+        </p:spPr>
+        <p:txBody>
+          <a:bodyPr wrap="square" lIns="0" tIns="0" rIns="0" bIns="0" rtlCol="0" anchor="ctr"/>
+          <a:lstStyle/>
+          <a:p>
+            <a:pPr indent="0" marL="0">
+              <a:buNone/>
+            </a:pPr>
+            <a:r>
+              <a:rPr lang="en-US" sz="1050" b="1" dirty="0">
+                <a:solidFill>
+                  <a:srgbClr val="16A34A"/>
+                </a:solidFill>
+                <a:latin typeface="Calibri" pitchFamily="34" charset="0"/>
+                <a:ea typeface="Calibri" pitchFamily="34" charset="-122"/>
+                <a:cs typeface="Calibri" pitchFamily="34" charset="-120"/>
+              </a:rPr>
+              <a:t>Solves: unemployment</a:t>
+            </a:r>
+            <a:endParaRPr lang="en-US" sz="1050" dirty="0"/>
+          </a:p>
+        </p:txBody>
+      </p:sp>
+      <p:sp>
+        <p:nvSpPr>
+          <p:cNvPr id="44" name="pillar card"/>
+          <p:cNvSpPr/>
+          <p:nvPr/>
+        </p:nvSpPr>
+        <p:spPr>
+          <a:xfrm>
+            <a:off x="9043416" y="2926080"/>
+            <a:ext cx="2697480" cy="2240280"/>
           </a:xfrm>
           <a:prstGeom prst="roundRect">
             <a:avLst>
@@ -4169,14 +4725,14 @@
       </p:sp>
       <p:sp>
         <p:nvSpPr>
-          <p:cNvPr id="31" name="Presentation circle"/>
+          <p:cNvPr id="45" name="Presentation circle"/>
           <p:cNvSpPr/>
           <p:nvPr/>
         </p:nvSpPr>
         <p:spPr>
           <a:xfrm>
-            <a:off x="4448556" y="3063240"/>
-            <a:ext cx="566928" cy="566928"/>
+            <a:off x="9180576" y="3044952"/>
+            <a:ext cx="475488" cy="475488"/>
           </a:xfrm>
           <a:prstGeom prst="ellipse">
             <a:avLst/>
@@ -4194,22 +4750,22 @@
       </p:sp>
       <p:pic>
         <p:nvPicPr>
-          <p:cNvPr id="32" name="Presentation icon" descr="Presentation icon">    </p:cNvPr>
+          <p:cNvPr id="46" name="Presentation icon" descr="Presentation icon">    </p:cNvPr>
           <p:cNvPicPr>
             <a:picLocks noChangeAspect="1"/>
           </p:cNvPicPr>
           <p:nvPr/>
         </p:nvPicPr>
         <p:blipFill>
-          <a:blip r:embed="rId2"/>
+          <a:blip r:embed="rId4"/>
           <a:stretch>
             <a:fillRect/>
           </a:stretch>
         </p:blipFill>
         <p:spPr>
           <a:xfrm>
-            <a:off x="4584619" y="3199303"/>
-            <a:ext cx="294803" cy="294803"/>
+            <a:off x="9294693" y="3159069"/>
+            <a:ext cx="247254" cy="247254"/>
           </a:xfrm>
           <a:prstGeom prst="rect">
             <a:avLst/>
@@ -4218,14 +4774,14 @@
       </p:pic>
       <p:sp>
         <p:nvSpPr>
-          <p:cNvPr id="33" name="Text 29"/>
-          <p:cNvSpPr txBox="1"/>
-          <p:nvPr/>
-        </p:nvSpPr>
-        <p:spPr>
-          <a:xfrm>
-            <a:off x="5134356" y="3072384"/>
-            <a:ext cx="2651760" cy="329184"/>
+          <p:cNvPr id="47" name="Text 41"/>
+          <p:cNvSpPr txBox="1"/>
+          <p:nvPr/>
+        </p:nvSpPr>
+        <p:spPr>
+          <a:xfrm>
+            <a:off x="9747504" y="3035808"/>
+            <a:ext cx="1920240" cy="274320"/>
           </a:xfrm>
           <a:prstGeom prst="rect">
             <a:avLst/>
@@ -4241,7 +4797,7 @@
               <a:buNone/>
             </a:pPr>
             <a:r>
-              <a:rPr lang="en-US" sz="1700" b="1" dirty="0">
+              <a:rPr lang="en-US" sz="1400" b="1" dirty="0">
                 <a:solidFill>
                   <a:srgbClr val="F97316"/>
                 </a:solidFill>
@@ -4251,20 +4807,20 @@
               </a:rPr>
               <a:t>Teacher Copilot</a:t>
             </a:r>
-            <a:endParaRPr lang="en-US" sz="1700" dirty="0"/>
-          </a:p>
-        </p:txBody>
-      </p:sp>
-      <p:sp>
-        <p:nvSpPr>
-          <p:cNvPr id="34" name="Text 30"/>
-          <p:cNvSpPr txBox="1"/>
-          <p:nvPr/>
-        </p:nvSpPr>
-        <p:spPr>
-          <a:xfrm>
-            <a:off x="5134356" y="3392424"/>
-            <a:ext cx="2651760" cy="237744"/>
+            <a:endParaRPr lang="en-US" sz="1400" dirty="0"/>
+          </a:p>
+        </p:txBody>
+      </p:sp>
+      <p:sp>
+        <p:nvSpPr>
+          <p:cNvPr id="48" name="Text 42"/>
+          <p:cNvSpPr txBox="1"/>
+          <p:nvPr/>
+        </p:nvSpPr>
+        <p:spPr>
+          <a:xfrm>
+            <a:off x="9747504" y="3300984"/>
+            <a:ext cx="1920240" cy="219456"/>
           </a:xfrm>
           <a:prstGeom prst="rect">
             <a:avLst/>
@@ -4280,7 +4836,7 @@
               <a:buNone/>
             </a:pPr>
             <a:r>
-              <a:rPr lang="en-US" sz="1100" dirty="0">
+              <a:rPr lang="en-US" sz="1050" dirty="0">
                 <a:solidFill>
                   <a:srgbClr val="64748B"/>
                 </a:solidFill>
@@ -4288,22 +4844,22 @@
                 <a:ea typeface="Calibri" pitchFamily="34" charset="-122"/>
                 <a:cs typeface="Calibri" pitchFamily="34" charset="-120"/>
               </a:rPr>
-              <a:t>For teachers</a:t>
-            </a:r>
-            <a:endParaRPr lang="en-US" sz="1100" dirty="0"/>
-          </a:p>
-        </p:txBody>
-      </p:sp>
-      <p:sp>
-        <p:nvSpPr>
-          <p:cNvPr id="35" name="Text 31"/>
-          <p:cNvSpPr txBox="1"/>
-          <p:nvPr/>
-        </p:nvSpPr>
-        <p:spPr>
-          <a:xfrm>
-            <a:off x="4448556" y="3749040"/>
-            <a:ext cx="3337560" cy="1051560"/>
+              <a:t>Teachers</a:t>
+            </a:r>
+            <a:endParaRPr lang="en-US" sz="1050" dirty="0"/>
+          </a:p>
+        </p:txBody>
+      </p:sp>
+      <p:sp>
+        <p:nvSpPr>
+          <p:cNvPr id="49" name="Text 43"/>
+          <p:cNvSpPr txBox="1"/>
+          <p:nvPr/>
+        </p:nvSpPr>
+        <p:spPr>
+          <a:xfrm>
+            <a:off x="9153144" y="3639312"/>
+            <a:ext cx="2514600" cy="1188720"/>
           </a:xfrm>
           <a:prstGeom prst="rect">
             <a:avLst/>
@@ -4315,7 +4871,7 @@
           <a:bodyPr wrap="square" lIns="0" tIns="0" rIns="0" bIns="0" rtlCol="0" anchor="t"/>
           <a:lstStyle/>
           <a:p>
-            <a:pPr marL="152400" indent="-152400">
+            <a:pPr marL="127000" indent="-127000">
               <a:spcAft>
                 <a:spcPts val="300"/>
               </a:spcAft>
@@ -4323,7 +4879,7 @@
               <a:buChar char="•"/>
             </a:pPr>
             <a:r>
-              <a:rPr lang="en-US" sz="1100" dirty="0">
+              <a:rPr lang="en-US" sz="1050" dirty="0">
                 <a:solidFill>
                   <a:srgbClr val="0F172A"/>
                 </a:solidFill>
@@ -4331,12 +4887,12 @@
                 <a:ea typeface="Calibri" pitchFamily="34" charset="-122"/>
                 <a:cs typeface="Calibri" pitchFamily="34" charset="-120"/>
               </a:rPr>
-              <a:t>AI lesson plans &amp; question papers from the syllabus, in English or Hindi</a:t>
-            </a:r>
-            <a:endParaRPr lang="en-US" sz="1100" dirty="0"/>
-          </a:p>
-          <a:p>
-            <a:pPr marL="152400" indent="-152400">
+              <a:t>AI lesson plans, papers &amp; quizzes (English/Hindi)</a:t>
+            </a:r>
+            <a:endParaRPr lang="en-US" sz="1050" dirty="0"/>
+          </a:p>
+          <a:p>
+            <a:pPr marL="127000" indent="-127000">
               <a:spcAft>
                 <a:spcPts val="300"/>
               </a:spcAft>
@@ -4344,7 +4900,7 @@
               <a:buChar char="•"/>
             </a:pPr>
             <a:r>
-              <a:rPr lang="en-US" sz="1100" dirty="0">
+              <a:rPr lang="en-US" sz="1050" dirty="0">
                 <a:solidFill>
                   <a:srgbClr val="0F172A"/>
                 </a:solidFill>
@@ -4352,12 +4908,12 @@
                 <a:ea typeface="Calibri" pitchFamily="34" charset="-122"/>
                 <a:cs typeface="Calibri" pitchFamily="34" charset="-120"/>
               </a:rPr>
-              <a:t>Auto-graded class quizzes — students join with a code, no login</a:t>
-            </a:r>
-            <a:endParaRPr lang="en-US" sz="1100" dirty="0"/>
-          </a:p>
-          <a:p>
-            <a:pPr marL="152400" indent="-152400">
+              <a:t>Class code join, auto-graded, no student login</a:t>
+            </a:r>
+            <a:endParaRPr lang="en-US" sz="1050" dirty="0"/>
+          </a:p>
+          <a:p>
+            <a:pPr marL="127000" indent="-127000">
               <a:spcAft>
                 <a:spcPts val="300"/>
               </a:spcAft>
@@ -4365,7 +4921,7 @@
               <a:buChar char="•"/>
             </a:pPr>
             <a:r>
-              <a:rPr lang="en-US" sz="1100" dirty="0">
+              <a:rPr lang="en-US" sz="1050" dirty="0">
                 <a:solidFill>
                   <a:srgbClr val="0F172A"/>
                 </a:solidFill>
@@ -4373,22 +4929,22 @@
                 <a:ea typeface="Calibri" pitchFamily="34" charset="-122"/>
                 <a:cs typeface="Calibri" pitchFamily="34" charset="-120"/>
               </a:rPr>
-              <a:t>Weak-topic heatmap → one-click re-teach; verified teacher accounts</a:t>
-            </a:r>
-            <a:endParaRPr lang="en-US" sz="1100" dirty="0"/>
-          </a:p>
-        </p:txBody>
-      </p:sp>
-      <p:sp>
-        <p:nvSpPr>
-          <p:cNvPr id="36" name="Text 32"/>
-          <p:cNvSpPr txBox="1"/>
-          <p:nvPr/>
-        </p:nvSpPr>
-        <p:spPr>
-          <a:xfrm>
-            <a:off x="4448556" y="4828032"/>
-            <a:ext cx="3337560" cy="256032"/>
+              <a:t>Weak-topic heatmap → one-click re-teach</a:t>
+            </a:r>
+            <a:endParaRPr lang="en-US" sz="1050" dirty="0"/>
+          </a:p>
+        </p:txBody>
+      </p:sp>
+      <p:sp>
+        <p:nvSpPr>
+          <p:cNvPr id="50" name="Text 44"/>
+          <p:cNvSpPr txBox="1"/>
+          <p:nvPr/>
+        </p:nvSpPr>
+        <p:spPr>
+          <a:xfrm>
+            <a:off x="9180576" y="4846320"/>
+            <a:ext cx="2468880" cy="237744"/>
           </a:xfrm>
           <a:prstGeom prst="rect">
             <a:avLst/>
@@ -4404,7 +4960,7 @@
               <a:buNone/>
             </a:pPr>
             <a:r>
-              <a:rPr lang="en-US" sz="1100" b="1" dirty="0">
+              <a:rPr lang="en-US" sz="1050" b="1" dirty="0">
                 <a:solidFill>
                   <a:srgbClr val="F97316"/>
                 </a:solidFill>
@@ -4412,293 +4968,15 @@
                 <a:ea typeface="Calibri" pitchFamily="34" charset="-122"/>
                 <a:cs typeface="Calibri" pitchFamily="34" charset="-120"/>
               </a:rPr>
-              <a:t>Solves: empowering teachers · quality education</a:t>
-            </a:r>
-            <a:endParaRPr lang="en-US" sz="1100" dirty="0"/>
-          </a:p>
-        </p:txBody>
-      </p:sp>
-      <p:sp>
-        <p:nvSpPr>
-          <p:cNvPr id="37" name="pillar card"/>
-          <p:cNvSpPr/>
-          <p:nvPr/>
-        </p:nvSpPr>
-        <p:spPr>
-          <a:xfrm>
-            <a:off x="8074152" y="2926080"/>
-            <a:ext cx="3657600" cy="2240280"/>
-          </a:xfrm>
-          <a:prstGeom prst="roundRect">
-            <a:avLst>
-              <a:gd name="adj" fmla="val 4898"/>
-            </a:avLst>
-          </a:prstGeom>
-          <a:solidFill>
-            <a:srgbClr val="ECFDF3"/>
-          </a:solidFill>
-          <a:ln w="12700">
-            <a:solidFill>
-              <a:srgbClr val="ECFDF3"/>
-            </a:solidFill>
-            <a:prstDash val="solid"/>
-          </a:ln>
-        </p:spPr>
-      </p:sp>
-      <p:sp>
-        <p:nvSpPr>
-          <p:cNvPr id="38" name="Languages circle"/>
-          <p:cNvSpPr/>
-          <p:nvPr/>
-        </p:nvSpPr>
-        <p:spPr>
-          <a:xfrm>
-            <a:off x="8257032" y="3063240"/>
-            <a:ext cx="566928" cy="566928"/>
-          </a:xfrm>
-          <a:prstGeom prst="ellipse">
-            <a:avLst/>
-          </a:prstGeom>
-          <a:solidFill>
-            <a:srgbClr val="16A34A"/>
-          </a:solidFill>
-          <a:ln w="12700">
-            <a:solidFill>
-              <a:srgbClr val="16A34A"/>
-            </a:solidFill>
-            <a:prstDash val="solid"/>
-          </a:ln>
-        </p:spPr>
-      </p:sp>
-      <p:pic>
-        <p:nvPicPr>
-          <p:cNvPr id="39" name="Languages icon" descr="Languages icon">    </p:cNvPr>
-          <p:cNvPicPr>
-            <a:picLocks noChangeAspect="1"/>
-          </p:cNvPicPr>
-          <p:nvPr/>
-        </p:nvPicPr>
-        <p:blipFill>
-          <a:blip r:embed="rId3"/>
-          <a:stretch>
-            <a:fillRect/>
-          </a:stretch>
-        </p:blipFill>
-        <p:spPr>
-          <a:xfrm>
-            <a:off x="8393095" y="3199303"/>
-            <a:ext cx="294803" cy="294803"/>
-          </a:xfrm>
-          <a:prstGeom prst="rect">
-            <a:avLst/>
-          </a:prstGeom>
-        </p:spPr>
-      </p:pic>
-      <p:sp>
-        <p:nvSpPr>
-          <p:cNvPr id="40" name="Text 35"/>
-          <p:cNvSpPr txBox="1"/>
-          <p:nvPr/>
-        </p:nvSpPr>
-        <p:spPr>
-          <a:xfrm>
-            <a:off x="8942832" y="3072384"/>
-            <a:ext cx="2651760" cy="329184"/>
-          </a:xfrm>
-          <a:prstGeom prst="rect">
-            <a:avLst/>
-          </a:prstGeom>
-          <a:noFill/>
-          <a:ln/>
-        </p:spPr>
-        <p:txBody>
-          <a:bodyPr wrap="square" lIns="0" tIns="0" rIns="0" bIns="0" rtlCol="0" anchor="t"/>
-          <a:lstStyle/>
-          <a:p>
-            <a:pPr indent="0" marL="0">
-              <a:buNone/>
-            </a:pPr>
-            <a:r>
-              <a:rPr lang="en-US" sz="1700" b="1" dirty="0">
-                <a:solidFill>
-                  <a:srgbClr val="16A34A"/>
-                </a:solidFill>
-                <a:latin typeface="Calibri" pitchFamily="34" charset="0"/>
-                <a:ea typeface="Calibri" pitchFamily="34" charset="-122"/>
-                <a:cs typeface="Calibri" pitchFamily="34" charset="-120"/>
-              </a:rPr>
-              <a:t>Bharat-first Access</a:t>
-            </a:r>
-            <a:endParaRPr lang="en-US" sz="1700" dirty="0"/>
-          </a:p>
-        </p:txBody>
-      </p:sp>
-      <p:sp>
-        <p:nvSpPr>
-          <p:cNvPr id="41" name="Text 36"/>
-          <p:cNvSpPr txBox="1"/>
-          <p:nvPr/>
-        </p:nvSpPr>
-        <p:spPr>
-          <a:xfrm>
-            <a:off x="8942832" y="3392424"/>
-            <a:ext cx="2651760" cy="237744"/>
-          </a:xfrm>
-          <a:prstGeom prst="rect">
-            <a:avLst/>
-          </a:prstGeom>
-          <a:noFill/>
-          <a:ln/>
-        </p:spPr>
-        <p:txBody>
-          <a:bodyPr wrap="square" lIns="0" tIns="0" rIns="0" bIns="0" rtlCol="0" anchor="t"/>
-          <a:lstStyle/>
-          <a:p>
-            <a:pPr indent="0" marL="0">
-              <a:buNone/>
-            </a:pPr>
-            <a:r>
-              <a:rPr lang="en-US" sz="1100" dirty="0">
-                <a:solidFill>
-                  <a:srgbClr val="64748B"/>
-                </a:solidFill>
-                <a:latin typeface="Calibri" pitchFamily="34" charset="0"/>
-                <a:ea typeface="Calibri" pitchFamily="34" charset="-122"/>
-                <a:cs typeface="Calibri" pitchFamily="34" charset="-120"/>
-              </a:rPr>
-              <a:t>For every learner</a:t>
-            </a:r>
-            <a:endParaRPr lang="en-US" sz="1100" dirty="0"/>
-          </a:p>
-        </p:txBody>
-      </p:sp>
-      <p:sp>
-        <p:nvSpPr>
-          <p:cNvPr id="42" name="Text 37"/>
-          <p:cNvSpPr txBox="1"/>
-          <p:nvPr/>
-        </p:nvSpPr>
-        <p:spPr>
-          <a:xfrm>
-            <a:off x="8257032" y="3749040"/>
-            <a:ext cx="3337560" cy="1051560"/>
-          </a:xfrm>
-          <a:prstGeom prst="rect">
-            <a:avLst/>
-          </a:prstGeom>
-          <a:noFill/>
-          <a:ln/>
-        </p:spPr>
-        <p:txBody>
-          <a:bodyPr wrap="square" lIns="0" tIns="0" rIns="0" bIns="0" rtlCol="0" anchor="t"/>
-          <a:lstStyle/>
-          <a:p>
-            <a:pPr marL="152400" indent="-152400">
-              <a:spcAft>
-                <a:spcPts val="300"/>
-              </a:spcAft>
-              <a:buSzPct val="100000"/>
-              <a:buChar char="•"/>
-            </a:pPr>
-            <a:r>
-              <a:rPr lang="en-US" sz="1100" dirty="0">
-                <a:solidFill>
-                  <a:srgbClr val="0F172A"/>
-                </a:solidFill>
-                <a:latin typeface="Calibri" pitchFamily="34" charset="0"/>
-                <a:ea typeface="Calibri" pitchFamily="34" charset="-122"/>
-                <a:cs typeface="Calibri" pitchFamily="34" charset="-120"/>
-              </a:rPr>
-              <a:t>7 vocational trade tracks in Hindi, linked to Skill India, Apprenticeship &amp; ITI</a:t>
-            </a:r>
-            <a:endParaRPr lang="en-US" sz="1100" dirty="0"/>
-          </a:p>
-          <a:p>
-            <a:pPr marL="152400" indent="-152400">
-              <a:spcAft>
-                <a:spcPts val="300"/>
-              </a:spcAft>
-              <a:buSzPct val="100000"/>
-              <a:buChar char="•"/>
-            </a:pPr>
-            <a:r>
-              <a:rPr lang="en-US" sz="1100" dirty="0">
-                <a:solidFill>
-                  <a:srgbClr val="0F172A"/>
-                </a:solidFill>
-                <a:latin typeface="Calibri" pitchFamily="34" charset="0"/>
-                <a:ea typeface="Calibri" pitchFamily="34" charset="-122"/>
-                <a:cs typeface="Calibri" pitchFamily="34" charset="-120"/>
-              </a:rPr>
-              <a:t>Lite mode for 2G/3G, offline installable app, listen-aloud audio</a:t>
-            </a:r>
-            <a:endParaRPr lang="en-US" sz="1100" dirty="0"/>
-          </a:p>
-          <a:p>
-            <a:pPr marL="152400" indent="-152400">
-              <a:spcAft>
-                <a:spcPts val="300"/>
-              </a:spcAft>
-              <a:buSzPct val="100000"/>
-              <a:buChar char="•"/>
-            </a:pPr>
-            <a:r>
-              <a:rPr lang="en-US" sz="1100" dirty="0">
-                <a:solidFill>
-                  <a:srgbClr val="0F172A"/>
-                </a:solidFill>
-                <a:latin typeface="Calibri" pitchFamily="34" charset="0"/>
-                <a:ea typeface="Calibri" pitchFamily="34" charset="-122"/>
-                <a:cs typeface="Calibri" pitchFamily="34" charset="-120"/>
-              </a:rPr>
-              <a:t>WhatsApp sharing, full Hindi UI; hostel &amp; tiffin finder as optional support</a:t>
-            </a:r>
-            <a:endParaRPr lang="en-US" sz="1100" dirty="0"/>
-          </a:p>
-        </p:txBody>
-      </p:sp>
-      <p:sp>
-        <p:nvSpPr>
-          <p:cNvPr id="43" name="Text 38"/>
-          <p:cNvSpPr txBox="1"/>
-          <p:nvPr/>
-        </p:nvSpPr>
-        <p:spPr>
-          <a:xfrm>
-            <a:off x="8257032" y="4828032"/>
-            <a:ext cx="3337560" cy="256032"/>
-          </a:xfrm>
-          <a:prstGeom prst="rect">
-            <a:avLst/>
-          </a:prstGeom>
-          <a:noFill/>
-          <a:ln/>
-        </p:spPr>
-        <p:txBody>
-          <a:bodyPr wrap="square" lIns="0" tIns="0" rIns="0" bIns="0" rtlCol="0" anchor="ctr"/>
-          <a:lstStyle/>
-          <a:p>
-            <a:pPr indent="0" marL="0">
-              <a:buNone/>
-            </a:pPr>
-            <a:r>
-              <a:rPr lang="en-US" sz="1100" b="1" dirty="0">
-                <a:solidFill>
-                  <a:srgbClr val="16A34A"/>
-                </a:solidFill>
-                <a:latin typeface="Calibri" pitchFamily="34" charset="0"/>
-                <a:ea typeface="Calibri" pitchFamily="34" charset="-122"/>
-                <a:cs typeface="Calibri" pitchFamily="34" charset="-120"/>
-              </a:rPr>
-              <a:t>Solves: remote learning · vocational training</a:t>
-            </a:r>
-            <a:endParaRPr lang="en-US" sz="1100" dirty="0"/>
-          </a:p>
-        </p:txBody>
-      </p:sp>
-      <p:sp>
-        <p:nvSpPr>
-          <p:cNvPr id="44" name="Text 39"/>
+              <a:t>Solves: overloaded teachers</a:t>
+            </a:r>
+            <a:endParaRPr lang="en-US" sz="1050" dirty="0"/>
+          </a:p>
+        </p:txBody>
+      </p:sp>
+      <p:sp>
+        <p:nvSpPr>
+          <p:cNvPr id="51" name="Text 45"/>
           <p:cNvSpPr txBox="1"/>
           <p:nvPr/>
         </p:nvSpPr>
@@ -4737,7 +5015,7 @@
       </p:sp>
       <p:sp>
         <p:nvSpPr>
-          <p:cNvPr id="45" name="innovation chip"/>
+          <p:cNvPr id="52" name="innovation chip"/>
           <p:cNvSpPr/>
           <p:nvPr/>
         </p:nvSpPr>
@@ -4771,7 +5049,7 @@
       </p:sp>
       <p:sp>
         <p:nvSpPr>
-          <p:cNvPr id="46" name="Route circle"/>
+          <p:cNvPr id="53" name="Route circle"/>
           <p:cNvSpPr/>
           <p:nvPr/>
         </p:nvSpPr>
@@ -4796,14 +5074,14 @@
       </p:sp>
       <p:pic>
         <p:nvPicPr>
-          <p:cNvPr id="47" name="Route icon" descr="Route icon">    </p:cNvPr>
+          <p:cNvPr id="54" name="Route icon" descr="Route icon">    </p:cNvPr>
           <p:cNvPicPr>
             <a:picLocks noChangeAspect="1"/>
           </p:cNvPicPr>
           <p:nvPr/>
         </p:nvPicPr>
         <p:blipFill>
-          <a:blip r:embed="rId4"/>
+          <a:blip r:embed="rId5"/>
           <a:stretch>
             <a:fillRect/>
           </a:stretch>
@@ -4820,7 +5098,7 @@
       </p:pic>
       <p:sp>
         <p:nvSpPr>
-          <p:cNvPr id="48" name="Text 42"/>
+          <p:cNvPr id="55" name="Text 48"/>
           <p:cNvSpPr txBox="1"/>
           <p:nvPr/>
         </p:nvSpPr>
@@ -4851,7 +5129,7 @@
                 <a:ea typeface="Calibri" pitchFamily="34" charset="-122"/>
                 <a:cs typeface="Calibri" pitchFamily="34" charset="-120"/>
               </a:rPr>
-              <a:t>Syllabus-mapped gap map, semester by semester</a:t>
+              <a:t>School → college → job in one place, with Plan B</a:t>
             </a:r>
             <a:endParaRPr lang="en-US" sz="1100" dirty="0"/>
           </a:p>
@@ -4859,7 +5137,7 @@
       </p:sp>
       <p:sp>
         <p:nvSpPr>
-          <p:cNvPr id="49" name="innovation chip"/>
+          <p:cNvPr id="56" name="innovation chip"/>
           <p:cNvSpPr/>
           <p:nvPr/>
         </p:nvSpPr>
@@ -4893,7 +5171,7 @@
       </p:sp>
       <p:sp>
         <p:nvSpPr>
-          <p:cNvPr id="50" name="ShieldCheck circle"/>
+          <p:cNvPr id="57" name="ShieldCheck circle"/>
           <p:cNvSpPr/>
           <p:nvPr/>
         </p:nvSpPr>
@@ -4918,14 +5196,14 @@
       </p:sp>
       <p:pic>
         <p:nvPicPr>
-          <p:cNvPr id="51" name="ShieldCheck icon" descr="ShieldCheck icon">    </p:cNvPr>
+          <p:cNvPr id="58" name="ShieldCheck icon" descr="ShieldCheck icon">    </p:cNvPr>
           <p:cNvPicPr>
             <a:picLocks noChangeAspect="1"/>
           </p:cNvPicPr>
           <p:nvPr/>
         </p:nvPicPr>
         <p:blipFill>
-          <a:blip r:embed="rId5"/>
+          <a:blip r:embed="rId6"/>
           <a:stretch>
             <a:fillRect/>
           </a:stretch>
@@ -4942,7 +5220,7 @@
       </p:pic>
       <p:sp>
         <p:nvSpPr>
-          <p:cNvPr id="52" name="Text 45"/>
+          <p:cNvPr id="59" name="Text 51"/>
           <p:cNvSpPr txBox="1"/>
           <p:nvPr/>
         </p:nvSpPr>
@@ -4981,7 +5259,7 @@
       </p:sp>
       <p:sp>
         <p:nvSpPr>
-          <p:cNvPr id="53" name="innovation chip"/>
+          <p:cNvPr id="60" name="innovation chip"/>
           <p:cNvSpPr/>
           <p:nvPr/>
         </p:nvSpPr>
@@ -5015,7 +5293,7 @@
       </p:sp>
       <p:sp>
         <p:nvSpPr>
-          <p:cNvPr id="54" name="RefreshCw circle"/>
+          <p:cNvPr id="61" name="RefreshCw circle"/>
           <p:cNvSpPr/>
           <p:nvPr/>
         </p:nvSpPr>
@@ -5040,14 +5318,14 @@
       </p:sp>
       <p:pic>
         <p:nvPicPr>
-          <p:cNvPr id="55" name="RefreshCw icon" descr="RefreshCw icon">    </p:cNvPr>
+          <p:cNvPr id="62" name="RefreshCw icon" descr="RefreshCw icon">    </p:cNvPr>
           <p:cNvPicPr>
             <a:picLocks noChangeAspect="1"/>
           </p:cNvPicPr>
           <p:nvPr/>
         </p:nvPicPr>
         <p:blipFill>
-          <a:blip r:embed="rId6"/>
+          <a:blip r:embed="rId7"/>
           <a:stretch>
             <a:fillRect/>
           </a:stretch>
@@ -5064,7 +5342,7 @@
       </p:pic>
       <p:sp>
         <p:nvSpPr>
-          <p:cNvPr id="56" name="Text 48"/>
+          <p:cNvPr id="63" name="Text 54"/>
           <p:cNvSpPr txBox="1"/>
           <p:nvPr/>
         </p:nvSpPr>
@@ -5103,7 +5381,7 @@
       </p:sp>
       <p:sp>
         <p:nvSpPr>
-          <p:cNvPr id="57" name="innovation chip"/>
+          <p:cNvPr id="64" name="innovation chip"/>
           <p:cNvSpPr/>
           <p:nvPr/>
         </p:nvSpPr>
@@ -5137,7 +5415,7 @@
       </p:sp>
       <p:sp>
         <p:nvSpPr>
-          <p:cNvPr id="58" name="WifiOff circle"/>
+          <p:cNvPr id="65" name="Languages circle"/>
           <p:cNvSpPr/>
           <p:nvPr/>
         </p:nvSpPr>
@@ -5162,14 +5440,14 @@
       </p:sp>
       <p:pic>
         <p:nvPicPr>
-          <p:cNvPr id="59" name="WifiOff icon" descr="WifiOff icon">    </p:cNvPr>
+          <p:cNvPr id="66" name="Languages icon" descr="Languages icon">    </p:cNvPr>
           <p:cNvPicPr>
             <a:picLocks noChangeAspect="1"/>
           </p:cNvPicPr>
           <p:nvPr/>
         </p:nvPicPr>
         <p:blipFill>
-          <a:blip r:embed="rId7"/>
+          <a:blip r:embed="rId8"/>
           <a:stretch>
             <a:fillRect/>
           </a:stretch>
@@ -5186,7 +5464,7 @@
       </p:pic>
       <p:sp>
         <p:nvSpPr>
-          <p:cNvPr id="60" name="Text 51"/>
+          <p:cNvPr id="67" name="Text 57"/>
           <p:cNvSpPr txBox="1"/>
           <p:nvPr/>
         </p:nvSpPr>
@@ -5217,7 +5495,7 @@
                 <a:ea typeface="Calibri" pitchFamily="34" charset="-122"/>
                 <a:cs typeface="Calibri" pitchFamily="34" charset="-120"/>
               </a:rPr>
-              <a:t>Works without AI &amp; offline: templates + PWA</a:t>
+              <a:t>Bharat-first: Hindi, 2G Lite mode, offline, stay &amp; food map</a:t>
             </a:r>
             <a:endParaRPr lang="en-US" sz="1100" dirty="0"/>
           </a:p>
@@ -6473,7 +6751,7 @@
                 <a:ea typeface="Calibri" pitchFamily="34" charset="-122"/>
                 <a:cs typeface="Calibri" pitchFamily="34" charset="-120"/>
               </a:rPr>
-              <a:t>Pick course · univ · sem</a:t>
+              <a:t>Class 12 subjects</a:t>
             </a:r>
             <a:endParaRPr lang="en-US" sz="1000" dirty="0"/>
           </a:p>
@@ -6537,7 +6815,7 @@
                 <a:ea typeface="Calibri" pitchFamily="34" charset="-122"/>
                 <a:cs typeface="Calibri" pitchFamily="34" charset="-120"/>
               </a:rPr>
-              <a:t>Gap map</a:t>
+              <a:t>Courses &amp; exams</a:t>
             </a:r>
             <a:endParaRPr lang="en-US" sz="1000" dirty="0"/>
           </a:p>
@@ -6601,7 +6879,7 @@
                 <a:ea typeface="Calibri" pitchFamily="34" charset="-122"/>
                 <a:cs typeface="Calibri" pitchFamily="34" charset="-120"/>
               </a:rPr>
-              <a:t>Weekly plan</a:t>
+              <a:t>Gap map + plan</a:t>
             </a:r>
             <a:endParaRPr lang="en-US" sz="1000" dirty="0"/>
           </a:p>
@@ -6665,7 +6943,7 @@
                 <a:ea typeface="Calibri" pitchFamily="34" charset="-122"/>
                 <a:cs typeface="Calibri" pitchFamily="34" charset="-120"/>
               </a:rPr>
-              <a:t>Server-graded test</a:t>
+              <a:t>Verified badge</a:t>
             </a:r>
             <a:endParaRPr lang="en-US" sz="1000" dirty="0"/>
           </a:p>
@@ -6729,7 +7007,7 @@
                 <a:ea typeface="Calibri" pitchFamily="34" charset="-122"/>
                 <a:cs typeface="Calibri" pitchFamily="34" charset="-120"/>
               </a:rPr>
-              <a:t>Signed badge</a:t>
+              <a:t>Matched jobs</a:t>
             </a:r>
             <a:endParaRPr lang="en-US" sz="1000" dirty="0"/>
           </a:p>
@@ -8409,11 +8687,11 @@
         <p:spPr>
           <a:xfrm>
             <a:off x="457200" y="1389888"/>
-            <a:ext cx="5486400" cy="841248"/>
+            <a:ext cx="5486400" cy="640080"/>
           </a:xfrm>
           <a:prstGeom prst="roundRect">
             <a:avLst>
-              <a:gd name="adj" fmla="val 13043"/>
+              <a:gd name="adj" fmla="val 17143"/>
             </a:avLst>
           </a:prstGeom>
           <a:solidFill>
@@ -8436,24 +8714,24 @@
       </p:sp>
       <p:sp>
         <p:nvSpPr>
-          <p:cNvPr id="7" name="GraduationCap circle"/>
+          <p:cNvPr id="7" name="School circle"/>
           <p:cNvSpPr/>
           <p:nvPr/>
         </p:nvSpPr>
         <p:spPr>
           <a:xfrm>
-            <a:off x="585216" y="1536192"/>
-            <a:ext cx="548640" cy="548640"/>
+            <a:off x="566928" y="1490472"/>
+            <a:ext cx="438912" cy="438912"/>
           </a:xfrm>
           <a:prstGeom prst="ellipse">
             <a:avLst/>
           </a:prstGeom>
           <a:solidFill>
-            <a:srgbClr val="1F2A6E"/>
+            <a:srgbClr val="4F46E5"/>
           </a:solidFill>
           <a:ln w="12700">
             <a:solidFill>
-              <a:srgbClr val="1F2A6E"/>
+              <a:srgbClr val="4F46E5"/>
             </a:solidFill>
             <a:prstDash val="solid"/>
           </a:ln>
@@ -8461,7 +8739,7 @@
       </p:sp>
       <p:pic>
         <p:nvPicPr>
-          <p:cNvPr id="8" name="GraduationCap icon" descr="GraduationCap icon">    </p:cNvPr>
+          <p:cNvPr id="8" name="School icon" descr="School icon">    </p:cNvPr>
           <p:cNvPicPr>
             <a:picLocks noChangeAspect="1"/>
           </p:cNvPicPr>
@@ -8475,8 +8753,8 @@
         </p:blipFill>
         <p:spPr>
           <a:xfrm>
-            <a:off x="716890" y="1667866"/>
-            <a:ext cx="285293" cy="285293"/>
+            <a:off x="672267" y="1595811"/>
+            <a:ext cx="228234" cy="228234"/>
           </a:xfrm>
           <a:prstGeom prst="rect">
             <a:avLst/>
@@ -8491,8 +8769,8 @@
         </p:nvSpPr>
         <p:spPr>
           <a:xfrm>
-            <a:off x="1280160" y="1463040"/>
-            <a:ext cx="2011680" cy="292608"/>
+            <a:off x="1143000" y="1435608"/>
+            <a:ext cx="2377440" cy="256032"/>
           </a:xfrm>
           <a:prstGeom prst="rect">
             <a:avLst/>
@@ -8508,17 +8786,17 @@
               <a:buNone/>
             </a:pPr>
             <a:r>
-              <a:rPr lang="en-US" sz="1400" b="1" dirty="0">
-                <a:solidFill>
-                  <a:srgbClr val="1F2A6E"/>
-                </a:solidFill>
-                <a:latin typeface="Calibri" pitchFamily="34" charset="0"/>
-                <a:ea typeface="Calibri" pitchFamily="34" charset="-122"/>
-                <a:cs typeface="Calibri" pitchFamily="34" charset="-120"/>
-              </a:rPr>
-              <a:t>Students</a:t>
-            </a:r>
-            <a:endParaRPr lang="en-US" sz="1400" dirty="0"/>
+              <a:rPr lang="en-US" sz="1300" b="1" dirty="0">
+                <a:solidFill>
+                  <a:srgbClr val="4F46E5"/>
+                </a:solidFill>
+                <a:latin typeface="Calibri" pitchFamily="34" charset="0"/>
+                <a:ea typeface="Calibri" pitchFamily="34" charset="-122"/>
+                <a:cs typeface="Calibri" pitchFamily="34" charset="-120"/>
+              </a:rPr>
+              <a:t>School students</a:t>
+            </a:r>
+            <a:endParaRPr lang="en-US" sz="1300" dirty="0"/>
           </a:p>
         </p:txBody>
       </p:sp>
@@ -8530,20 +8808,20 @@
         </p:nvSpPr>
         <p:spPr>
           <a:xfrm>
-            <a:off x="3611880" y="1481328"/>
-            <a:ext cx="2194560" cy="256032"/>
+            <a:off x="3611880" y="1453896"/>
+            <a:ext cx="2194560" cy="228600"/>
           </a:xfrm>
           <a:prstGeom prst="roundRect">
             <a:avLst>
-              <a:gd name="adj" fmla="val 50000"/>
+              <a:gd name="adj" fmla="val 48000"/>
             </a:avLst>
           </a:prstGeom>
           <a:solidFill>
-            <a:srgbClr val="1F2A6E"/>
+            <a:srgbClr val="4F46E5"/>
           </a:solidFill>
           <a:ln w="12700">
             <a:solidFill>
-              <a:srgbClr val="1F2A6E"/>
+              <a:srgbClr val="4F46E5"/>
             </a:solidFill>
             <a:prstDash val="solid"/>
           </a:ln>
@@ -8557,8 +8835,8 @@
         </p:nvSpPr>
         <p:spPr>
           <a:xfrm>
-            <a:off x="3611880" y="1481328"/>
-            <a:ext cx="2194560" cy="256032"/>
+            <a:off x="3611880" y="1453896"/>
+            <a:ext cx="2194560" cy="228600"/>
           </a:xfrm>
           <a:prstGeom prst="rect">
             <a:avLst/>
@@ -8582,7 +8860,7 @@
                 <a:ea typeface="Calibri" pitchFamily="34" charset="-122"/>
                 <a:cs typeface="Calibri" pitchFamily="34" charset="-120"/>
               </a:rPr>
-              <a:t>4.33 Cr in higher education</a:t>
+              <a:t>Class 9–12</a:t>
             </a:r>
             <a:endParaRPr lang="en-US" sz="1000" dirty="0"/>
           </a:p>
@@ -8596,24 +8874,24 @@
         </p:nvSpPr>
         <p:spPr>
           <a:xfrm>
-            <a:off x="1280160" y="1773936"/>
-            <a:ext cx="4526280" cy="420624"/>
-          </a:xfrm>
-          <a:prstGeom prst="rect">
-            <a:avLst/>
-          </a:prstGeom>
-          <a:noFill/>
-          <a:ln/>
-        </p:spPr>
-        <p:txBody>
-          <a:bodyPr wrap="square" lIns="0" tIns="0" rIns="0" bIns="0" rtlCol="0" anchor="t"/>
+            <a:off x="1143000" y="1691640"/>
+            <a:ext cx="4709160" cy="310896"/>
+          </a:xfrm>
+          <a:prstGeom prst="rect">
+            <a:avLst/>
+          </a:prstGeom>
+          <a:noFill/>
+          <a:ln/>
+        </p:spPr>
+        <p:txBody>
+          <a:bodyPr wrap="square" lIns="0" tIns="0" rIns="0" bIns="0" rtlCol="0" anchor="ctr"/>
           <a:lstStyle/>
           <a:p>
             <a:pPr indent="0" marL="0">
               <a:buNone/>
             </a:pPr>
             <a:r>
-              <a:rPr lang="en-US" sz="1050" dirty="0">
+              <a:rPr lang="en-US" sz="1000" dirty="0">
                 <a:solidFill>
                   <a:srgbClr val="0F172A"/>
                 </a:solidFill>
@@ -8621,9 +8899,9 @@
                 <a:ea typeface="Calibri" pitchFamily="34" charset="-122"/>
                 <a:cs typeface="Calibri" pitchFamily="34" charset="-120"/>
               </a:rPr>
-              <a:t>Know the exact job-skill gap from Semester 1 · free personalised plan · skill proof employers can verify</a:t>
-            </a:r>
-            <a:endParaRPr lang="en-US" sz="1050" dirty="0"/>
+              <a:t>Every course &amp; exam for their subjects · roadmap &amp; free notes · Plan B careers</a:t>
+            </a:r>
+            <a:endParaRPr lang="en-US" sz="1000" dirty="0"/>
           </a:p>
         </p:txBody>
       </p:sp>
@@ -8635,12 +8913,12 @@
         </p:nvSpPr>
         <p:spPr>
           <a:xfrm>
-            <a:off x="457200" y="2350008"/>
-            <a:ext cx="5486400" cy="841248"/>
+            <a:off x="457200" y="2103120"/>
+            <a:ext cx="5486400" cy="640080"/>
           </a:xfrm>
           <a:prstGeom prst="roundRect">
             <a:avLst>
-              <a:gd name="adj" fmla="val 13043"/>
+              <a:gd name="adj" fmla="val 17143"/>
             </a:avLst>
           </a:prstGeom>
           <a:solidFill>
@@ -8663,24 +8941,24 @@
       </p:sp>
       <p:sp>
         <p:nvSpPr>
-          <p:cNvPr id="14" name="Presentation circle"/>
+          <p:cNvPr id="14" name="GraduationCap circle"/>
           <p:cNvSpPr/>
           <p:nvPr/>
         </p:nvSpPr>
         <p:spPr>
           <a:xfrm>
-            <a:off x="585216" y="2496312"/>
-            <a:ext cx="548640" cy="548640"/>
+            <a:off x="566928" y="2203704"/>
+            <a:ext cx="438912" cy="438912"/>
           </a:xfrm>
           <a:prstGeom prst="ellipse">
             <a:avLst/>
           </a:prstGeom>
           <a:solidFill>
-            <a:srgbClr val="F97316"/>
+            <a:srgbClr val="1F2A6E"/>
           </a:solidFill>
           <a:ln w="12700">
             <a:solidFill>
-              <a:srgbClr val="F97316"/>
+              <a:srgbClr val="1F2A6E"/>
             </a:solidFill>
             <a:prstDash val="solid"/>
           </a:ln>
@@ -8688,7 +8966,7 @@
       </p:sp>
       <p:pic>
         <p:nvPicPr>
-          <p:cNvPr id="15" name="Presentation icon" descr="Presentation icon">    </p:cNvPr>
+          <p:cNvPr id="15" name="GraduationCap icon" descr="GraduationCap icon">    </p:cNvPr>
           <p:cNvPicPr>
             <a:picLocks noChangeAspect="1"/>
           </p:cNvPicPr>
@@ -8702,8 +8980,8 @@
         </p:blipFill>
         <p:spPr>
           <a:xfrm>
-            <a:off x="716890" y="2627986"/>
-            <a:ext cx="285293" cy="285293"/>
+            <a:off x="672267" y="2309043"/>
+            <a:ext cx="228234" cy="228234"/>
           </a:xfrm>
           <a:prstGeom prst="rect">
             <a:avLst/>
@@ -8718,8 +8996,8 @@
         </p:nvSpPr>
         <p:spPr>
           <a:xfrm>
-            <a:off x="1280160" y="2423160"/>
-            <a:ext cx="2011680" cy="292608"/>
+            <a:off x="1143000" y="2148840"/>
+            <a:ext cx="2377440" cy="256032"/>
           </a:xfrm>
           <a:prstGeom prst="rect">
             <a:avLst/>
@@ -8735,17 +9013,17 @@
               <a:buNone/>
             </a:pPr>
             <a:r>
-              <a:rPr lang="en-US" sz="1400" b="1" dirty="0">
-                <a:solidFill>
-                  <a:srgbClr val="F97316"/>
-                </a:solidFill>
-                <a:latin typeface="Calibri" pitchFamily="34" charset="0"/>
-                <a:ea typeface="Calibri" pitchFamily="34" charset="-122"/>
-                <a:cs typeface="Calibri" pitchFamily="34" charset="-120"/>
-              </a:rPr>
-              <a:t>Teachers</a:t>
-            </a:r>
-            <a:endParaRPr lang="en-US" sz="1400" dirty="0"/>
+              <a:rPr lang="en-US" sz="1300" b="1" dirty="0">
+                <a:solidFill>
+                  <a:srgbClr val="1F2A6E"/>
+                </a:solidFill>
+                <a:latin typeface="Calibri" pitchFamily="34" charset="0"/>
+                <a:ea typeface="Calibri" pitchFamily="34" charset="-122"/>
+                <a:cs typeface="Calibri" pitchFamily="34" charset="-120"/>
+              </a:rPr>
+              <a:t>College students</a:t>
+            </a:r>
+            <a:endParaRPr lang="en-US" sz="1300" dirty="0"/>
           </a:p>
         </p:txBody>
       </p:sp>
@@ -8757,20 +9035,20 @@
         </p:nvSpPr>
         <p:spPr>
           <a:xfrm>
-            <a:off x="3611880" y="2441448"/>
-            <a:ext cx="2194560" cy="256032"/>
+            <a:off x="3611880" y="2167128"/>
+            <a:ext cx="2194560" cy="228600"/>
           </a:xfrm>
           <a:prstGeom prst="roundRect">
             <a:avLst>
-              <a:gd name="adj" fmla="val 50000"/>
+              <a:gd name="adj" fmla="val 48000"/>
             </a:avLst>
           </a:prstGeom>
           <a:solidFill>
-            <a:srgbClr val="F97316"/>
+            <a:srgbClr val="1F2A6E"/>
           </a:solidFill>
           <a:ln w="12700">
             <a:solidFill>
-              <a:srgbClr val="F97316"/>
+              <a:srgbClr val="1F2A6E"/>
             </a:solidFill>
             <a:prstDash val="solid"/>
           </a:ln>
@@ -8784,8 +9062,8 @@
         </p:nvSpPr>
         <p:spPr>
           <a:xfrm>
-            <a:off x="3611880" y="2441448"/>
-            <a:ext cx="2194560" cy="256032"/>
+            <a:off x="3611880" y="2167128"/>
+            <a:ext cx="2194560" cy="228600"/>
           </a:xfrm>
           <a:prstGeom prst="rect">
             <a:avLst/>
@@ -8809,7 +9087,7 @@
                 <a:ea typeface="Calibri" pitchFamily="34" charset="-122"/>
                 <a:cs typeface="Calibri" pitchFamily="34" charset="-120"/>
               </a:rPr>
-              <a:t>15.98 L faculty</a:t>
+              <a:t>4.33 Cr in higher education</a:t>
             </a:r>
             <a:endParaRPr lang="en-US" sz="1000" dirty="0"/>
           </a:p>
@@ -8823,24 +9101,24 @@
         </p:nvSpPr>
         <p:spPr>
           <a:xfrm>
-            <a:off x="1280160" y="2734056"/>
-            <a:ext cx="4526280" cy="420624"/>
-          </a:xfrm>
-          <a:prstGeom prst="rect">
-            <a:avLst/>
-          </a:prstGeom>
-          <a:noFill/>
-          <a:ln/>
-        </p:spPr>
-        <p:txBody>
-          <a:bodyPr wrap="square" lIns="0" tIns="0" rIns="0" bIns="0" rtlCol="0" anchor="t"/>
+            <a:off x="1143000" y="2404872"/>
+            <a:ext cx="4709160" cy="310896"/>
+          </a:xfrm>
+          <a:prstGeom prst="rect">
+            <a:avLst/>
+          </a:prstGeom>
+          <a:noFill/>
+          <a:ln/>
+        </p:spPr>
+        <p:txBody>
+          <a:bodyPr wrap="square" lIns="0" tIns="0" rIns="0" bIns="0" rtlCol="0" anchor="ctr"/>
           <a:lstStyle/>
           <a:p>
             <a:pPr indent="0" marL="0">
               <a:buNone/>
             </a:pPr>
             <a:r>
-              <a:rPr lang="en-US" sz="1050" dirty="0">
+              <a:rPr lang="en-US" sz="1000" dirty="0">
                 <a:solidFill>
                   <a:srgbClr val="0F172A"/>
                 </a:solidFill>
@@ -8848,9 +9126,9 @@
                 <a:ea typeface="Calibri" pitchFamily="34" charset="-122"/>
                 <a:cs typeface="Calibri" pitchFamily="34" charset="-120"/>
               </a:rPr>
-              <a:t>Lesson plans, papers &amp; quizzes in minutes · see what the class didn’t understand · re-teach with data</a:t>
-            </a:r>
-            <a:endParaRPr lang="en-US" sz="1050" dirty="0"/>
+              <a:t>Exact job-skill gap from Semester 1 · free personal plan · skill proof employers can verify</a:t>
+            </a:r>
+            <a:endParaRPr lang="en-US" sz="1000" dirty="0"/>
           </a:p>
         </p:txBody>
       </p:sp>
@@ -8862,12 +9140,12 @@
         </p:nvSpPr>
         <p:spPr>
           <a:xfrm>
-            <a:off x="457200" y="3310128"/>
-            <a:ext cx="5486400" cy="841248"/>
+            <a:off x="457200" y="2816352"/>
+            <a:ext cx="5486400" cy="640080"/>
           </a:xfrm>
           <a:prstGeom prst="roundRect">
             <a:avLst>
-              <a:gd name="adj" fmla="val 13043"/>
+              <a:gd name="adj" fmla="val 17143"/>
             </a:avLst>
           </a:prstGeom>
           <a:solidFill>
@@ -8890,14 +9168,241 @@
       </p:sp>
       <p:sp>
         <p:nvSpPr>
-          <p:cNvPr id="21" name="Wrench circle"/>
+          <p:cNvPr id="21" name="Presentation circle"/>
           <p:cNvSpPr/>
           <p:nvPr/>
         </p:nvSpPr>
         <p:spPr>
           <a:xfrm>
-            <a:off x="585216" y="3456432"/>
-            <a:ext cx="548640" cy="548640"/>
+            <a:off x="566928" y="2916936"/>
+            <a:ext cx="438912" cy="438912"/>
+          </a:xfrm>
+          <a:prstGeom prst="ellipse">
+            <a:avLst/>
+          </a:prstGeom>
+          <a:solidFill>
+            <a:srgbClr val="F97316"/>
+          </a:solidFill>
+          <a:ln w="12700">
+            <a:solidFill>
+              <a:srgbClr val="F97316"/>
+            </a:solidFill>
+            <a:prstDash val="solid"/>
+          </a:ln>
+        </p:spPr>
+      </p:sp>
+      <p:pic>
+        <p:nvPicPr>
+          <p:cNvPr id="22" name="Presentation icon" descr="Presentation icon">    </p:cNvPr>
+          <p:cNvPicPr>
+            <a:picLocks noChangeAspect="1"/>
+          </p:cNvPicPr>
+          <p:nvPr/>
+        </p:nvPicPr>
+        <p:blipFill>
+          <a:blip r:embed="rId3"/>
+          <a:stretch>
+            <a:fillRect/>
+          </a:stretch>
+        </p:blipFill>
+        <p:spPr>
+          <a:xfrm>
+            <a:off x="672267" y="3022275"/>
+            <a:ext cx="228234" cy="228234"/>
+          </a:xfrm>
+          <a:prstGeom prst="rect">
+            <a:avLst/>
+          </a:prstGeom>
+        </p:spPr>
+      </p:pic>
+      <p:sp>
+        <p:nvSpPr>
+          <p:cNvPr id="23" name="Text 18"/>
+          <p:cNvSpPr txBox="1"/>
+          <p:nvPr/>
+        </p:nvSpPr>
+        <p:spPr>
+          <a:xfrm>
+            <a:off x="1143000" y="2862072"/>
+            <a:ext cx="2377440" cy="256032"/>
+          </a:xfrm>
+          <a:prstGeom prst="rect">
+            <a:avLst/>
+          </a:prstGeom>
+          <a:noFill/>
+          <a:ln/>
+        </p:spPr>
+        <p:txBody>
+          <a:bodyPr wrap="square" lIns="0" tIns="0" rIns="0" bIns="0" rtlCol="0" anchor="ctr"/>
+          <a:lstStyle/>
+          <a:p>
+            <a:pPr indent="0" marL="0">
+              <a:buNone/>
+            </a:pPr>
+            <a:r>
+              <a:rPr lang="en-US" sz="1300" b="1" dirty="0">
+                <a:solidFill>
+                  <a:srgbClr val="F97316"/>
+                </a:solidFill>
+                <a:latin typeface="Calibri" pitchFamily="34" charset="0"/>
+                <a:ea typeface="Calibri" pitchFamily="34" charset="-122"/>
+                <a:cs typeface="Calibri" pitchFamily="34" charset="-120"/>
+              </a:rPr>
+              <a:t>Teachers</a:t>
+            </a:r>
+            <a:endParaRPr lang="en-US" sz="1300" dirty="0"/>
+          </a:p>
+        </p:txBody>
+      </p:sp>
+      <p:sp>
+        <p:nvSpPr>
+          <p:cNvPr id="24" name="reach tag"/>
+          <p:cNvSpPr/>
+          <p:nvPr/>
+        </p:nvSpPr>
+        <p:spPr>
+          <a:xfrm>
+            <a:off x="3611880" y="2880360"/>
+            <a:ext cx="2194560" cy="228600"/>
+          </a:xfrm>
+          <a:prstGeom prst="roundRect">
+            <a:avLst>
+              <a:gd name="adj" fmla="val 48000"/>
+            </a:avLst>
+          </a:prstGeom>
+          <a:solidFill>
+            <a:srgbClr val="F97316"/>
+          </a:solidFill>
+          <a:ln w="12700">
+            <a:solidFill>
+              <a:srgbClr val="F97316"/>
+            </a:solidFill>
+            <a:prstDash val="solid"/>
+          </a:ln>
+        </p:spPr>
+      </p:sp>
+      <p:sp>
+        <p:nvSpPr>
+          <p:cNvPr id="25" name="Text 20"/>
+          <p:cNvSpPr txBox="1"/>
+          <p:nvPr/>
+        </p:nvSpPr>
+        <p:spPr>
+          <a:xfrm>
+            <a:off x="3611880" y="2880360"/>
+            <a:ext cx="2194560" cy="228600"/>
+          </a:xfrm>
+          <a:prstGeom prst="rect">
+            <a:avLst/>
+          </a:prstGeom>
+          <a:noFill/>
+          <a:ln/>
+        </p:spPr>
+        <p:txBody>
+          <a:bodyPr wrap="square" lIns="0" tIns="0" rIns="0" bIns="0" rtlCol="0" anchor="ctr"/>
+          <a:lstStyle/>
+          <a:p>
+            <a:pPr algn="ctr" indent="0" marL="0">
+              <a:buNone/>
+            </a:pPr>
+            <a:r>
+              <a:rPr lang="en-US" sz="1000" b="1" dirty="0">
+                <a:solidFill>
+                  <a:srgbClr val="FFFFFF"/>
+                </a:solidFill>
+                <a:latin typeface="Calibri" pitchFamily="34" charset="0"/>
+                <a:ea typeface="Calibri" pitchFamily="34" charset="-122"/>
+                <a:cs typeface="Calibri" pitchFamily="34" charset="-120"/>
+              </a:rPr>
+              <a:t>15.98 L faculty</a:t>
+            </a:r>
+            <a:endParaRPr lang="en-US" sz="1000" dirty="0"/>
+          </a:p>
+        </p:txBody>
+      </p:sp>
+      <p:sp>
+        <p:nvSpPr>
+          <p:cNvPr id="26" name="Text 21"/>
+          <p:cNvSpPr txBox="1"/>
+          <p:nvPr/>
+        </p:nvSpPr>
+        <p:spPr>
+          <a:xfrm>
+            <a:off x="1143000" y="3118104"/>
+            <a:ext cx="4709160" cy="310896"/>
+          </a:xfrm>
+          <a:prstGeom prst="rect">
+            <a:avLst/>
+          </a:prstGeom>
+          <a:noFill/>
+          <a:ln/>
+        </p:spPr>
+        <p:txBody>
+          <a:bodyPr wrap="square" lIns="0" tIns="0" rIns="0" bIns="0" rtlCol="0" anchor="ctr"/>
+          <a:lstStyle/>
+          <a:p>
+            <a:pPr indent="0" marL="0">
+              <a:buNone/>
+            </a:pPr>
+            <a:r>
+              <a:rPr lang="en-US" sz="1000" dirty="0">
+                <a:solidFill>
+                  <a:srgbClr val="0F172A"/>
+                </a:solidFill>
+                <a:latin typeface="Calibri" pitchFamily="34" charset="0"/>
+                <a:ea typeface="Calibri" pitchFamily="34" charset="-122"/>
+                <a:cs typeface="Calibri" pitchFamily="34" charset="-120"/>
+              </a:rPr>
+              <a:t>Lesson plans &amp; quizzes in minutes · see what the class missed · re-teach with data</a:t>
+            </a:r>
+            <a:endParaRPr lang="en-US" sz="1000" dirty="0"/>
+          </a:p>
+        </p:txBody>
+      </p:sp>
+      <p:sp>
+        <p:nvSpPr>
+          <p:cNvPr id="27" name="audience card"/>
+          <p:cNvSpPr/>
+          <p:nvPr/>
+        </p:nvSpPr>
+        <p:spPr>
+          <a:xfrm>
+            <a:off x="457200" y="3529584"/>
+            <a:ext cx="5486400" cy="640080"/>
+          </a:xfrm>
+          <a:prstGeom prst="roundRect">
+            <a:avLst>
+              <a:gd name="adj" fmla="val 17143"/>
+            </a:avLst>
+          </a:prstGeom>
+          <a:solidFill>
+            <a:srgbClr val="FFFFFF"/>
+          </a:solidFill>
+          <a:ln w="9525">
+            <a:solidFill>
+              <a:srgbClr val="E2E8F0"/>
+            </a:solidFill>
+            <a:prstDash val="solid"/>
+          </a:ln>
+          <a:effectLst>
+            <a:outerShdw sx="100000" sy="100000" kx="0" ky="0" algn="bl" rotWithShape="0" blurRad="127000" dist="25400" dir="5400000">
+              <a:srgbClr val="1F2A6E">
+                <a:alpha val="14000"/>
+              </a:srgbClr>
+            </a:outerShdw>
+          </a:effectLst>
+        </p:spPr>
+      </p:sp>
+      <p:sp>
+        <p:nvSpPr>
+          <p:cNvPr id="28" name="Briefcase circle"/>
+          <p:cNvSpPr/>
+          <p:nvPr/>
+        </p:nvSpPr>
+        <p:spPr>
+          <a:xfrm>
+            <a:off x="566928" y="3630168"/>
+            <a:ext cx="438912" cy="438912"/>
           </a:xfrm>
           <a:prstGeom prst="ellipse">
             <a:avLst/>
@@ -8915,22 +9420,22 @@
       </p:sp>
       <p:pic>
         <p:nvPicPr>
-          <p:cNvPr id="22" name="Wrench icon" descr="Wrench icon">    </p:cNvPr>
+          <p:cNvPr id="29" name="Briefcase icon" descr="Briefcase icon">    </p:cNvPr>
           <p:cNvPicPr>
             <a:picLocks noChangeAspect="1"/>
           </p:cNvPicPr>
           <p:nvPr/>
         </p:nvPicPr>
         <p:blipFill>
-          <a:blip r:embed="rId3"/>
+          <a:blip r:embed="rId4"/>
           <a:stretch>
             <a:fillRect/>
           </a:stretch>
         </p:blipFill>
         <p:spPr>
           <a:xfrm>
-            <a:off x="716890" y="3588106"/>
-            <a:ext cx="285293" cy="285293"/>
+            <a:off x="672267" y="3735507"/>
+            <a:ext cx="228234" cy="228234"/>
           </a:xfrm>
           <a:prstGeom prst="rect">
             <a:avLst/>
@@ -8939,14 +9444,14 @@
       </p:pic>
       <p:sp>
         <p:nvSpPr>
-          <p:cNvPr id="23" name="Text 18"/>
-          <p:cNvSpPr txBox="1"/>
-          <p:nvPr/>
-        </p:nvSpPr>
-        <p:spPr>
-          <a:xfrm>
-            <a:off x="1280160" y="3383280"/>
-            <a:ext cx="2011680" cy="292608"/>
+          <p:cNvPr id="30" name="Text 24"/>
+          <p:cNvSpPr txBox="1"/>
+          <p:nvPr/>
+        </p:nvSpPr>
+        <p:spPr>
+          <a:xfrm>
+            <a:off x="1143000" y="3575304"/>
+            <a:ext cx="2377440" cy="256032"/>
           </a:xfrm>
           <a:prstGeom prst="rect">
             <a:avLst/>
@@ -8962,7 +9467,7 @@
               <a:buNone/>
             </a:pPr>
             <a:r>
-              <a:rPr lang="en-US" sz="1400" b="1" dirty="0">
+              <a:rPr lang="en-US" sz="1300" b="1" dirty="0">
                 <a:solidFill>
                   <a:srgbClr val="16A34A"/>
                 </a:solidFill>
@@ -8970,26 +9475,26 @@
                 <a:ea typeface="Calibri" pitchFamily="34" charset="-122"/>
                 <a:cs typeface="Calibri" pitchFamily="34" charset="-120"/>
               </a:rPr>
-              <a:t>Vocational learners</a:t>
-            </a:r>
-            <a:endParaRPr lang="en-US" sz="1400" dirty="0"/>
-          </a:p>
-        </p:txBody>
-      </p:sp>
-      <p:sp>
-        <p:nvSpPr>
-          <p:cNvPr id="24" name="reach tag"/>
+              <a:t>Graduates &amp; trade learners</a:t>
+            </a:r>
+            <a:endParaRPr lang="en-US" sz="1300" dirty="0"/>
+          </a:p>
+        </p:txBody>
+      </p:sp>
+      <p:sp>
+        <p:nvSpPr>
+          <p:cNvPr id="31" name="reach tag"/>
           <p:cNvSpPr/>
           <p:nvPr/>
         </p:nvSpPr>
         <p:spPr>
           <a:xfrm>
-            <a:off x="3611880" y="3401568"/>
-            <a:ext cx="2194560" cy="256032"/>
+            <a:off x="3611880" y="3593592"/>
+            <a:ext cx="2194560" cy="228600"/>
           </a:xfrm>
           <a:prstGeom prst="roundRect">
             <a:avLst>
-              <a:gd name="adj" fmla="val 50000"/>
+              <a:gd name="adj" fmla="val 48000"/>
             </a:avLst>
           </a:prstGeom>
           <a:solidFill>
@@ -9005,14 +9510,14 @@
       </p:sp>
       <p:sp>
         <p:nvSpPr>
-          <p:cNvPr id="25" name="Text 20"/>
-          <p:cNvSpPr txBox="1"/>
-          <p:nvPr/>
-        </p:nvSpPr>
-        <p:spPr>
-          <a:xfrm>
-            <a:off x="3611880" y="3401568"/>
-            <a:ext cx="2194560" cy="256032"/>
+          <p:cNvPr id="32" name="Text 26"/>
+          <p:cNvSpPr txBox="1"/>
+          <p:nvPr/>
+        </p:nvSpPr>
+        <p:spPr>
+          <a:xfrm>
+            <a:off x="3611880" y="3593592"/>
+            <a:ext cx="2194560" cy="228600"/>
           </a:xfrm>
           <a:prstGeom prst="rect">
             <a:avLst/>
@@ -9044,30 +9549,30 @@
       </p:sp>
       <p:sp>
         <p:nvSpPr>
-          <p:cNvPr id="26" name="Text 21"/>
-          <p:cNvSpPr txBox="1"/>
-          <p:nvPr/>
-        </p:nvSpPr>
-        <p:spPr>
-          <a:xfrm>
-            <a:off x="1280160" y="3694176"/>
-            <a:ext cx="4526280" cy="420624"/>
-          </a:xfrm>
-          <a:prstGeom prst="rect">
-            <a:avLst/>
-          </a:prstGeom>
-          <a:noFill/>
-          <a:ln/>
-        </p:spPr>
-        <p:txBody>
-          <a:bodyPr wrap="square" lIns="0" tIns="0" rIns="0" bIns="0" rtlCol="0" anchor="t"/>
+          <p:cNvPr id="33" name="Text 27"/>
+          <p:cNvSpPr txBox="1"/>
+          <p:nvPr/>
+        </p:nvSpPr>
+        <p:spPr>
+          <a:xfrm>
+            <a:off x="1143000" y="3831336"/>
+            <a:ext cx="4709160" cy="310896"/>
+          </a:xfrm>
+          <a:prstGeom prst="rect">
+            <a:avLst/>
+          </a:prstGeom>
+          <a:noFill/>
+          <a:ln/>
+        </p:spPr>
+        <p:txBody>
+          <a:bodyPr wrap="square" lIns="0" tIns="0" rIns="0" bIns="0" rtlCol="0" anchor="ctr"/>
           <a:lstStyle/>
           <a:p>
             <a:pPr indent="0" marL="0">
               <a:buNone/>
             </a:pPr>
             <a:r>
-              <a:rPr lang="en-US" sz="1050" dirty="0">
+              <a:rPr lang="en-US" sz="1000" dirty="0">
                 <a:solidFill>
                   <a:srgbClr val="0F172A"/>
                 </a:solidFill>
@@ -9075,15 +9580,15 @@
                 <a:ea typeface="Calibri" pitchFamily="34" charset="-122"/>
                 <a:cs typeface="Calibri" pitchFamily="34" charset="-120"/>
               </a:rPr>
-              <a:t>Trade skills in Hindi on a basic phone · tests &amp; badges · links to Skill India, Apprenticeship India &amp; ITI</a:t>
-            </a:r>
-            <a:endParaRPr lang="en-US" sz="1050" dirty="0"/>
-          </a:p>
-        </p:txBody>
-      </p:sp>
-      <p:sp>
-        <p:nvSpPr>
-          <p:cNvPr id="27" name="Text 22"/>
+              <a:t>Jobs matched to verified skills · Hindi trade courses · SIDF startup support &amp; funding</a:t>
+            </a:r>
+            <a:endParaRPr lang="en-US" sz="1000" dirty="0"/>
+          </a:p>
+        </p:txBody>
+      </p:sp>
+      <p:sp>
+        <p:nvSpPr>
+          <p:cNvPr id="34" name="Text 28"/>
           <p:cNvSpPr txBox="1"/>
           <p:nvPr/>
         </p:nvSpPr>
@@ -9122,7 +9627,7 @@
       </p:sp>
       <p:sp>
         <p:nvSpPr>
-          <p:cNvPr id="28" name="stakeholder link"/>
+          <p:cNvPr id="35" name="stakeholder link"/>
           <p:cNvSpPr/>
           <p:nvPr/>
         </p:nvSpPr>
@@ -9145,7 +9650,7 @@
       </p:sp>
       <p:sp>
         <p:nvSpPr>
-          <p:cNvPr id="29" name="stakeholder link"/>
+          <p:cNvPr id="36" name="stakeholder link"/>
           <p:cNvSpPr/>
           <p:nvPr/>
         </p:nvSpPr>
@@ -9168,7 +9673,7 @@
       </p:sp>
       <p:sp>
         <p:nvSpPr>
-          <p:cNvPr id="30" name="stakeholder link"/>
+          <p:cNvPr id="37" name="stakeholder link"/>
           <p:cNvSpPr/>
           <p:nvPr/>
         </p:nvSpPr>
@@ -9191,7 +9696,7 @@
       </p:sp>
       <p:sp>
         <p:nvSpPr>
-          <p:cNvPr id="31" name="stakeholder link"/>
+          <p:cNvPr id="38" name="stakeholder link"/>
           <p:cNvSpPr/>
           <p:nvPr/>
         </p:nvSpPr>
@@ -9214,7 +9719,7 @@
       </p:sp>
       <p:sp>
         <p:nvSpPr>
-          <p:cNvPr id="32" name="stakeholder link"/>
+          <p:cNvPr id="39" name="stakeholder link"/>
           <p:cNvSpPr/>
           <p:nvPr/>
         </p:nvSpPr>
@@ -9237,7 +9742,7 @@
       </p:sp>
       <p:sp>
         <p:nvSpPr>
-          <p:cNvPr id="33" name="stakeholder link"/>
+          <p:cNvPr id="40" name="stakeholder link"/>
           <p:cNvSpPr/>
           <p:nvPr/>
         </p:nvSpPr>
@@ -9260,7 +9765,7 @@
       </p:sp>
       <p:sp>
         <p:nvSpPr>
-          <p:cNvPr id="34" name="stakeholder link"/>
+          <p:cNvPr id="41" name="stakeholder link"/>
           <p:cNvSpPr/>
           <p:nvPr/>
         </p:nvSpPr>
@@ -9283,7 +9788,7 @@
       </p:sp>
       <p:sp>
         <p:nvSpPr>
-          <p:cNvPr id="35" name="stakeholder link"/>
+          <p:cNvPr id="42" name="stakeholder link"/>
           <p:cNvSpPr/>
           <p:nvPr/>
         </p:nvSpPr>
@@ -9306,7 +9811,7 @@
       </p:sp>
       <p:sp>
         <p:nvSpPr>
-          <p:cNvPr id="36" name="hub"/>
+          <p:cNvPr id="43" name="hub"/>
           <p:cNvSpPr/>
           <p:nvPr/>
         </p:nvSpPr>
@@ -9338,7 +9843,7 @@
       </p:sp>
       <p:sp>
         <p:nvSpPr>
-          <p:cNvPr id="37" name="Text 32"/>
+          <p:cNvPr id="44" name="Text 38"/>
           <p:cNvSpPr txBox="1"/>
           <p:nvPr/>
         </p:nvSpPr>
@@ -9394,7 +9899,7 @@
       </p:sp>
       <p:sp>
         <p:nvSpPr>
-          <p:cNvPr id="38" name="stakeholder"/>
+          <p:cNvPr id="45" name="stakeholder"/>
           <p:cNvSpPr/>
           <p:nvPr/>
         </p:nvSpPr>
@@ -9428,7 +9933,7 @@
       </p:sp>
       <p:sp>
         <p:nvSpPr>
-          <p:cNvPr id="39" name="Text 34"/>
+          <p:cNvPr id="46" name="Text 40"/>
           <p:cNvSpPr txBox="1"/>
           <p:nvPr/>
         </p:nvSpPr>
@@ -9467,7 +9972,7 @@
       </p:sp>
       <p:sp>
         <p:nvSpPr>
-          <p:cNvPr id="40" name="stakeholder"/>
+          <p:cNvPr id="47" name="stakeholder"/>
           <p:cNvSpPr/>
           <p:nvPr/>
         </p:nvSpPr>
@@ -9501,7 +10006,7 @@
       </p:sp>
       <p:sp>
         <p:nvSpPr>
-          <p:cNvPr id="41" name="Text 36"/>
+          <p:cNvPr id="48" name="Text 42"/>
           <p:cNvSpPr txBox="1"/>
           <p:nvPr/>
         </p:nvSpPr>
@@ -9540,7 +10045,7 @@
       </p:sp>
       <p:sp>
         <p:nvSpPr>
-          <p:cNvPr id="42" name="stakeholder"/>
+          <p:cNvPr id="49" name="stakeholder"/>
           <p:cNvSpPr/>
           <p:nvPr/>
         </p:nvSpPr>
@@ -9574,7 +10079,7 @@
       </p:sp>
       <p:sp>
         <p:nvSpPr>
-          <p:cNvPr id="43" name="Text 38"/>
+          <p:cNvPr id="50" name="Text 44"/>
           <p:cNvSpPr txBox="1"/>
           <p:nvPr/>
         </p:nvSpPr>
@@ -9613,7 +10118,7 @@
       </p:sp>
       <p:sp>
         <p:nvSpPr>
-          <p:cNvPr id="44" name="stakeholder"/>
+          <p:cNvPr id="51" name="stakeholder"/>
           <p:cNvSpPr/>
           <p:nvPr/>
         </p:nvSpPr>
@@ -9647,7 +10152,7 @@
       </p:sp>
       <p:sp>
         <p:nvSpPr>
-          <p:cNvPr id="45" name="Text 40"/>
+          <p:cNvPr id="52" name="Text 46"/>
           <p:cNvSpPr txBox="1"/>
           <p:nvPr/>
         </p:nvSpPr>
@@ -9686,7 +10191,7 @@
       </p:sp>
       <p:sp>
         <p:nvSpPr>
-          <p:cNvPr id="46" name="stakeholder"/>
+          <p:cNvPr id="53" name="stakeholder"/>
           <p:cNvSpPr/>
           <p:nvPr/>
         </p:nvSpPr>
@@ -9720,7 +10225,7 @@
       </p:sp>
       <p:sp>
         <p:nvSpPr>
-          <p:cNvPr id="47" name="Text 42"/>
+          <p:cNvPr id="54" name="Text 48"/>
           <p:cNvSpPr txBox="1"/>
           <p:nvPr/>
         </p:nvSpPr>
@@ -9751,7 +10256,7 @@
                 <a:ea typeface="Calibri" pitchFamily="34" charset="-122"/>
                 <a:cs typeface="Calibri" pitchFamily="34" charset="-120"/>
               </a:rPr>
-              <a:t>Govt: Skill India, NSDC, AICTE</a:t>
+              <a:t>Govt: Skill India, AICTE, Startup India</a:t>
             </a:r>
             <a:endParaRPr lang="en-US" sz="1050" dirty="0"/>
           </a:p>
@@ -9759,7 +10264,7 @@
       </p:sp>
       <p:sp>
         <p:nvSpPr>
-          <p:cNvPr id="48" name="stakeholder"/>
+          <p:cNvPr id="55" name="stakeholder"/>
           <p:cNvSpPr/>
           <p:nvPr/>
         </p:nvSpPr>
@@ -9793,7 +10298,7 @@
       </p:sp>
       <p:sp>
         <p:nvSpPr>
-          <p:cNvPr id="49" name="Text 44"/>
+          <p:cNvPr id="56" name="Text 50"/>
           <p:cNvSpPr txBox="1"/>
           <p:nvPr/>
         </p:nvSpPr>
@@ -9832,7 +10337,7 @@
       </p:sp>
       <p:sp>
         <p:nvSpPr>
-          <p:cNvPr id="50" name="stakeholder"/>
+          <p:cNvPr id="57" name="stakeholder"/>
           <p:cNvSpPr/>
           <p:nvPr/>
         </p:nvSpPr>
@@ -9866,7 +10371,7 @@
       </p:sp>
       <p:sp>
         <p:nvSpPr>
-          <p:cNvPr id="51" name="Text 46"/>
+          <p:cNvPr id="58" name="Text 52"/>
           <p:cNvSpPr txBox="1"/>
           <p:nvPr/>
         </p:nvSpPr>
@@ -9897,7 +10402,7 @@
                 <a:ea typeface="Calibri" pitchFamily="34" charset="-122"/>
                 <a:cs typeface="Calibri" pitchFamily="34" charset="-120"/>
               </a:rPr>
-              <a:t>Mentors, alumni &amp; peer tutors</a:t>
+              <a:t>Mentors &amp; counsellors</a:t>
             </a:r>
             <a:endParaRPr lang="en-US" sz="1050" dirty="0"/>
           </a:p>
@@ -9905,7 +10410,7 @@
       </p:sp>
       <p:sp>
         <p:nvSpPr>
-          <p:cNvPr id="52" name="stakeholder"/>
+          <p:cNvPr id="59" name="stakeholder"/>
           <p:cNvSpPr/>
           <p:nvPr/>
         </p:nvSpPr>
@@ -9939,7 +10444,7 @@
       </p:sp>
       <p:sp>
         <p:nvSpPr>
-          <p:cNvPr id="53" name="Text 48"/>
+          <p:cNvPr id="60" name="Text 54"/>
           <p:cNvSpPr txBox="1"/>
           <p:nvPr/>
         </p:nvSpPr>
@@ -9978,7 +10483,7 @@
       </p:sp>
       <p:sp>
         <p:nvSpPr>
-          <p:cNvPr id="54" name="Text 49"/>
+          <p:cNvPr id="61" name="Text 55"/>
           <p:cNvSpPr txBox="1"/>
           <p:nvPr/>
         </p:nvSpPr>
@@ -10017,7 +10522,7 @@
       </p:sp>
       <p:sp>
         <p:nvSpPr>
-          <p:cNvPr id="55" name="benefit card"/>
+          <p:cNvPr id="62" name="benefit card"/>
           <p:cNvSpPr/>
           <p:nvPr/>
         </p:nvSpPr>
@@ -10044,7 +10549,7 @@
       </p:sp>
       <p:sp>
         <p:nvSpPr>
-          <p:cNvPr id="56" name="HeartHandshake circle"/>
+          <p:cNvPr id="63" name="HeartHandshake circle"/>
           <p:cNvSpPr/>
           <p:nvPr/>
         </p:nvSpPr>
@@ -10069,14 +10574,14 @@
       </p:sp>
       <p:pic>
         <p:nvPicPr>
-          <p:cNvPr id="57" name="HeartHandshake icon" descr="HeartHandshake icon">    </p:cNvPr>
+          <p:cNvPr id="64" name="HeartHandshake icon" descr="HeartHandshake icon">    </p:cNvPr>
           <p:cNvPicPr>
             <a:picLocks noChangeAspect="1"/>
           </p:cNvPicPr>
           <p:nvPr/>
         </p:nvPicPr>
         <p:blipFill>
-          <a:blip r:embed="rId4"/>
+          <a:blip r:embed="rId5"/>
           <a:stretch>
             <a:fillRect/>
           </a:stretch>
@@ -10093,7 +10598,7 @@
       </p:pic>
       <p:sp>
         <p:nvSpPr>
-          <p:cNvPr id="58" name="Text 52"/>
+          <p:cNvPr id="65" name="Text 58"/>
           <p:cNvSpPr txBox="1"/>
           <p:nvPr/>
         </p:nvSpPr>
@@ -10132,7 +10637,7 @@
       </p:sp>
       <p:sp>
         <p:nvSpPr>
-          <p:cNvPr id="59" name="Text 53"/>
+          <p:cNvPr id="66" name="Text 59"/>
           <p:cNvSpPr txBox="1"/>
           <p:nvPr/>
         </p:nvSpPr>
@@ -10163,7 +10668,7 @@
                 <a:ea typeface="Calibri" pitchFamily="34" charset="-122"/>
                 <a:cs typeface="Calibri" pitchFamily="34" charset="-120"/>
               </a:rPr>
-              <a:t>Equal access for rural, Hindi-medium &amp; first-generation learners; safe stay &amp; food info for migrant students</a:t>
+              <a:t>Equal access for rural &amp; Hindi-medium learners; Plan B careers &amp; free counselling ease exam stress</a:t>
             </a:r>
             <a:endParaRPr lang="en-US" sz="1150" dirty="0"/>
           </a:p>
@@ -10171,7 +10676,7 @@
       </p:sp>
       <p:sp>
         <p:nvSpPr>
-          <p:cNvPr id="60" name="benefit card"/>
+          <p:cNvPr id="67" name="benefit card"/>
           <p:cNvSpPr/>
           <p:nvPr/>
         </p:nvSpPr>
@@ -10198,7 +10703,7 @@
       </p:sp>
       <p:sp>
         <p:nvSpPr>
-          <p:cNvPr id="61" name="IndianRupee circle"/>
+          <p:cNvPr id="68" name="IndianRupee circle"/>
           <p:cNvSpPr/>
           <p:nvPr/>
         </p:nvSpPr>
@@ -10223,14 +10728,14 @@
       </p:sp>
       <p:pic>
         <p:nvPicPr>
-          <p:cNvPr id="62" name="IndianRupee icon" descr="IndianRupee icon">    </p:cNvPr>
+          <p:cNvPr id="69" name="IndianRupee icon" descr="IndianRupee icon">    </p:cNvPr>
           <p:cNvPicPr>
             <a:picLocks noChangeAspect="1"/>
           </p:cNvPicPr>
           <p:nvPr/>
         </p:nvPicPr>
         <p:blipFill>
-          <a:blip r:embed="rId5"/>
+          <a:blip r:embed="rId6"/>
           <a:stretch>
             <a:fillRect/>
           </a:stretch>
@@ -10247,7 +10752,7 @@
       </p:pic>
       <p:sp>
         <p:nvSpPr>
-          <p:cNvPr id="63" name="Text 56"/>
+          <p:cNvPr id="70" name="Text 62"/>
           <p:cNvSpPr txBox="1"/>
           <p:nvPr/>
         </p:nvSpPr>
@@ -10286,7 +10791,7 @@
       </p:sp>
       <p:sp>
         <p:nvSpPr>
-          <p:cNvPr id="64" name="Text 57"/>
+          <p:cNvPr id="71" name="Text 63"/>
           <p:cNvSpPr txBox="1"/>
           <p:nvPr/>
         </p:nvSpPr>
@@ -10325,7 +10830,7 @@
       </p:sp>
       <p:sp>
         <p:nvSpPr>
-          <p:cNvPr id="65" name="benefit card"/>
+          <p:cNvPr id="72" name="benefit card"/>
           <p:cNvSpPr/>
           <p:nvPr/>
         </p:nvSpPr>
@@ -10352,7 +10857,7 @@
       </p:sp>
       <p:sp>
         <p:nvSpPr>
-          <p:cNvPr id="66" name="BookOpen circle"/>
+          <p:cNvPr id="73" name="BookOpen circle"/>
           <p:cNvSpPr/>
           <p:nvPr/>
         </p:nvSpPr>
@@ -10377,14 +10882,14 @@
       </p:sp>
       <p:pic>
         <p:nvPicPr>
-          <p:cNvPr id="67" name="BookOpen icon" descr="BookOpen icon">    </p:cNvPr>
+          <p:cNvPr id="74" name="BookOpen icon" descr="BookOpen icon">    </p:cNvPr>
           <p:cNvPicPr>
             <a:picLocks noChangeAspect="1"/>
           </p:cNvPicPr>
           <p:nvPr/>
         </p:nvPicPr>
         <p:blipFill>
-          <a:blip r:embed="rId6"/>
+          <a:blip r:embed="rId7"/>
           <a:stretch>
             <a:fillRect/>
           </a:stretch>
@@ -10401,7 +10906,7 @@
       </p:pic>
       <p:sp>
         <p:nvSpPr>
-          <p:cNvPr id="68" name="Text 60"/>
+          <p:cNvPr id="75" name="Text 66"/>
           <p:cNvSpPr txBox="1"/>
           <p:nvPr/>
         </p:nvSpPr>
@@ -10440,7 +10945,7 @@
       </p:sp>
       <p:sp>
         <p:nvSpPr>
-          <p:cNvPr id="69" name="Text 61"/>
+          <p:cNvPr id="76" name="Text 67"/>
           <p:cNvSpPr txBox="1"/>
           <p:nvPr/>
         </p:nvSpPr>
@@ -10479,7 +10984,7 @@
       </p:sp>
       <p:sp>
         <p:nvSpPr>
-          <p:cNvPr id="70" name="benefit card"/>
+          <p:cNvPr id="77" name="benefit card"/>
           <p:cNvSpPr/>
           <p:nvPr/>
         </p:nvSpPr>
@@ -10506,7 +11011,7 @@
       </p:sp>
       <p:sp>
         <p:nvSpPr>
-          <p:cNvPr id="71" name="Building2 circle"/>
+          <p:cNvPr id="78" name="Building2 circle"/>
           <p:cNvSpPr/>
           <p:nvPr/>
         </p:nvSpPr>
@@ -10531,14 +11036,14 @@
       </p:sp>
       <p:pic>
         <p:nvPicPr>
-          <p:cNvPr id="72" name="Building2 icon" descr="Building2 icon">    </p:cNvPr>
+          <p:cNvPr id="79" name="Building2 icon" descr="Building2 icon">    </p:cNvPr>
           <p:cNvPicPr>
             <a:picLocks noChangeAspect="1"/>
           </p:cNvPicPr>
           <p:nvPr/>
         </p:nvPicPr>
         <p:blipFill>
-          <a:blip r:embed="rId7"/>
+          <a:blip r:embed="rId8"/>
           <a:stretch>
             <a:fillRect/>
           </a:stretch>
@@ -10555,7 +11060,7 @@
       </p:pic>
       <p:sp>
         <p:nvSpPr>
-          <p:cNvPr id="73" name="Text 64"/>
+          <p:cNvPr id="80" name="Text 70"/>
           <p:cNvSpPr txBox="1"/>
           <p:nvPr/>
         </p:nvSpPr>
@@ -10594,7 +11099,7 @@
       </p:sp>
       <p:sp>
         <p:nvSpPr>
-          <p:cNvPr id="74" name="Text 65"/>
+          <p:cNvPr id="81" name="Text 71"/>
           <p:cNvSpPr txBox="1"/>
           <p:nvPr/>
         </p:nvSpPr>
@@ -10864,11 +11369,11 @@
         <p:spPr>
           <a:xfrm>
             <a:off x="457200" y="1389888"/>
-            <a:ext cx="2697480" cy="1143000"/>
+            <a:ext cx="2697480" cy="1024128"/>
           </a:xfrm>
           <a:prstGeom prst="roundRect">
             <a:avLst>
-              <a:gd name="adj" fmla="val 9600"/>
+              <a:gd name="adj" fmla="val 10714"/>
             </a:avLst>
           </a:prstGeom>
           <a:solidFill>
@@ -11002,8 +11507,8 @@
         </p:nvSpPr>
         <p:spPr>
           <a:xfrm>
-            <a:off x="594360" y="2011680"/>
-            <a:ext cx="2468880" cy="475488"/>
+            <a:off x="594360" y="1956816"/>
+            <a:ext cx="2468880" cy="420624"/>
           </a:xfrm>
           <a:prstGeom prst="rect">
             <a:avLst/>
@@ -11027,7 +11532,7 @@
                 <a:ea typeface="Calibri" pitchFamily="34" charset="-122"/>
                 <a:cs typeface="Calibri" pitchFamily="34" charset="-120"/>
               </a:rPr>
-              <a:t>Live app + 4 serverless functions; every flow tested end-to-end</a:t>
+              <a:t>Live app: 30+ pages, 4 serverless functions; key flows tested end-to-end</a:t>
             </a:r>
             <a:endParaRPr lang="en-US" sz="1050" dirty="0"/>
           </a:p>
@@ -11042,11 +11547,11 @@
         <p:spPr>
           <a:xfrm>
             <a:off x="3319272" y="1389888"/>
-            <a:ext cx="2697480" cy="1143000"/>
+            <a:ext cx="2697480" cy="1024128"/>
           </a:xfrm>
           <a:prstGeom prst="roundRect">
             <a:avLst>
-              <a:gd name="adj" fmla="val 9600"/>
+              <a:gd name="adj" fmla="val 10714"/>
             </a:avLst>
           </a:prstGeom>
           <a:solidFill>
@@ -11180,8 +11685,8 @@
         </p:nvSpPr>
         <p:spPr>
           <a:xfrm>
-            <a:off x="3456432" y="2011680"/>
-            <a:ext cx="2468880" cy="475488"/>
+            <a:off x="3456432" y="1956816"/>
+            <a:ext cx="2468880" cy="420624"/>
           </a:xfrm>
           <a:prstGeom prst="rect">
             <a:avLst/>
@@ -11220,11 +11725,11 @@
         <p:spPr>
           <a:xfrm>
             <a:off x="6181344" y="1389888"/>
-            <a:ext cx="2697480" cy="1143000"/>
+            <a:ext cx="2697480" cy="1024128"/>
           </a:xfrm>
           <a:prstGeom prst="roundRect">
             <a:avLst>
-              <a:gd name="adj" fmla="val 9600"/>
+              <a:gd name="adj" fmla="val 10714"/>
             </a:avLst>
           </a:prstGeom>
           <a:solidFill>
@@ -11358,8 +11863,8 @@
         </p:nvSpPr>
         <p:spPr>
           <a:xfrm>
-            <a:off x="6318504" y="2011680"/>
-            <a:ext cx="2468880" cy="475488"/>
+            <a:off x="6318504" y="1956816"/>
+            <a:ext cx="2468880" cy="420624"/>
           </a:xfrm>
           <a:prstGeom prst="rect">
             <a:avLst/>
@@ -11398,11 +11903,11 @@
         <p:spPr>
           <a:xfrm>
             <a:off x="9043416" y="1389888"/>
-            <a:ext cx="2697480" cy="1143000"/>
+            <a:ext cx="2697480" cy="1024128"/>
           </a:xfrm>
           <a:prstGeom prst="roundRect">
             <a:avLst>
-              <a:gd name="adj" fmla="val 9600"/>
+              <a:gd name="adj" fmla="val 10714"/>
             </a:avLst>
           </a:prstGeom>
           <a:solidFill>
@@ -11536,8 +12041,8 @@
         </p:nvSpPr>
         <p:spPr>
           <a:xfrm>
-            <a:off x="9180576" y="2011680"/>
-            <a:ext cx="2468880" cy="475488"/>
+            <a:off x="9180576" y="1956816"/>
+            <a:ext cx="2468880" cy="420624"/>
           </a:xfrm>
           <a:prstGeom prst="rect">
             <a:avLst/>
@@ -11575,7 +12080,7 @@
         </p:nvSpPr>
         <p:spPr>
           <a:xfrm>
-            <a:off x="457200" y="2697480"/>
+            <a:off x="457200" y="2560320"/>
             <a:ext cx="8229600" cy="256032"/>
           </a:xfrm>
           <a:prstGeom prst="rect">
@@ -11621,7 +12126,7 @@
           </p:nvPr>
         </p:nvGraphicFramePr>
         <p:xfrm>
-          <a:off x="457200" y="2990088"/>
+          <a:off x="457200" y="2834640"/>
           <a:ext cx="11274552" cy="914400"/>
         </p:xfrm>
         <a:graphic>
@@ -11839,7 +12344,7 @@
                   </a:tcPr>
                 </a:tc>
               </a:tr>
-              <a:tr h="411480">
+              <a:tr h="393192">
                 <a:tc>
                   <a:txBody>
                     <a:bodyPr/>
@@ -12045,7 +12550,7 @@
                   </a:tcPr>
                 </a:tc>
               </a:tr>
-              <a:tr h="411480">
+              <a:tr h="393192">
                 <a:tc>
                   <a:txBody>
                     <a:bodyPr/>
@@ -12063,7 +12568,7 @@
                           <a:ea typeface="Calibri" pitchFamily="34" charset="-122"/>
                           <a:cs typeface="Calibri" pitchFamily="34" charset="-120"/>
                         </a:rPr>
-                        <a:t>Poor internet &amp; low-end phones</a:t>
+                        <a:t>Student exam stress &amp; mental health</a:t>
                       </a:r>
                       <a:endParaRPr lang="en-US" sz="1050" dirty="0">
                         <a:latin typeface="Calibri" charset="0"/>
@@ -12199,7 +12704,7 @@
                           <a:ea typeface="Calibri" pitchFamily="34" charset="-122"/>
                           <a:cs typeface="Calibri" pitchFamily="34" charset="-120"/>
                         </a:rPr>
-                        <a:t>Lite mode (no images or animations) · offline installable PWA · lazy-loaded pages · audio</a:t>
+                        <a:t>Plan B careers · human counsellors, not AI advice · Tele-MANAS 14416 helpline shown up front</a:t>
                       </a:r>
                       <a:endParaRPr lang="en-US" sz="1050" dirty="0">
                         <a:latin typeface="Calibri" charset="0"/>
@@ -12251,7 +12756,213 @@
                   </a:tcPr>
                 </a:tc>
               </a:tr>
-              <a:tr h="411480">
+              <a:tr h="393192">
+                <a:tc>
+                  <a:txBody>
+                    <a:bodyPr/>
+                    <a:lstStyle/>
+                    <a:p>
+                      <a:pPr indent="0" marL="0">
+                        <a:buNone/>
+                      </a:pPr>
+                      <a:r>
+                        <a:rPr lang="en-US" sz="1050" b="1" dirty="0">
+                          <a:solidFill>
+                            <a:srgbClr val="0F172A"/>
+                          </a:solidFill>
+                          <a:latin typeface="Calibri" pitchFamily="34" charset="0"/>
+                          <a:ea typeface="Calibri" pitchFamily="34" charset="-122"/>
+                          <a:cs typeface="Calibri" pitchFamily="34" charset="-120"/>
+                        </a:rPr>
+                        <a:t>Poor internet &amp; low-end phones</a:t>
+                      </a:r>
+                      <a:endParaRPr lang="en-US" sz="1050" dirty="0">
+                        <a:latin typeface="Calibri" charset="0"/>
+                        <a:ea typeface="Calibri" charset="0"/>
+                        <a:cs typeface="Calibri" charset="0"/>
+                      </a:endParaRPr>
+                    </a:p>
+                  </a:txBody>
+                  <a:tcPr marL="91440" marR="91440" marT="0" marB="0" anchor="ctr">
+                    <a:lnL w="9525" cap="flat" cmpd="sng" algn="ctr">
+                      <a:solidFill>
+                        <a:srgbClr val="E2E8F0"/>
+                      </a:solidFill>
+                      <a:prstDash val="solid"/>
+                      <a:round/>
+                      <a:headEnd type="none" w="med" len="med"/>
+                      <a:tailEnd type="none" w="med" len="med"/>
+                    </a:lnL>
+                    <a:lnR w="9525" cap="flat" cmpd="sng" algn="ctr">
+                      <a:solidFill>
+                        <a:srgbClr val="E2E8F0"/>
+                      </a:solidFill>
+                      <a:prstDash val="solid"/>
+                      <a:round/>
+                      <a:headEnd type="none" w="med" len="med"/>
+                      <a:tailEnd type="none" w="med" len="med"/>
+                    </a:lnR>
+                    <a:lnT w="9525" cap="flat" cmpd="sng" algn="ctr">
+                      <a:solidFill>
+                        <a:srgbClr val="E2E8F0"/>
+                      </a:solidFill>
+                      <a:prstDash val="solid"/>
+                      <a:round/>
+                      <a:headEnd type="none" w="med" len="med"/>
+                      <a:tailEnd type="none" w="med" len="med"/>
+                    </a:lnT>
+                    <a:lnB w="9525" cap="flat" cmpd="sng" algn="ctr">
+                      <a:solidFill>
+                        <a:srgbClr val="E2E8F0"/>
+                      </a:solidFill>
+                      <a:prstDash val="solid"/>
+                      <a:round/>
+                      <a:headEnd type="none" w="med" len="med"/>
+                      <a:tailEnd type="none" w="med" len="med"/>
+                    </a:lnB>
+                    <a:solidFill>
+                      <a:srgbClr val="FFFFFF"/>
+                    </a:solidFill>
+                  </a:tcPr>
+                </a:tc>
+                <a:tc>
+                  <a:txBody>
+                    <a:bodyPr/>
+                    <a:lstStyle/>
+                    <a:p>
+                      <a:pPr algn="ctr" indent="0" marL="0">
+                        <a:buNone/>
+                      </a:pPr>
+                      <a:r>
+                        <a:rPr lang="en-US" sz="1050" b="1" dirty="0">
+                          <a:solidFill>
+                            <a:srgbClr val="E11D48"/>
+                          </a:solidFill>
+                          <a:latin typeface="Calibri" pitchFamily="34" charset="0"/>
+                          <a:ea typeface="Calibri" pitchFamily="34" charset="-122"/>
+                          <a:cs typeface="Calibri" pitchFamily="34" charset="-120"/>
+                        </a:rPr>
+                        <a:t>High</a:t>
+                      </a:r>
+                      <a:endParaRPr lang="en-US" sz="1050" dirty="0">
+                        <a:latin typeface="Calibri" charset="0"/>
+                        <a:ea typeface="Calibri" charset="0"/>
+                        <a:cs typeface="Calibri" charset="0"/>
+                      </a:endParaRPr>
+                    </a:p>
+                  </a:txBody>
+                  <a:tcPr marL="91440" marR="91440" marT="0" marB="0" anchor="ctr">
+                    <a:lnL w="9525" cap="flat" cmpd="sng" algn="ctr">
+                      <a:solidFill>
+                        <a:srgbClr val="E2E8F0"/>
+                      </a:solidFill>
+                      <a:prstDash val="solid"/>
+                      <a:round/>
+                      <a:headEnd type="none" w="med" len="med"/>
+                      <a:tailEnd type="none" w="med" len="med"/>
+                    </a:lnL>
+                    <a:lnR w="9525" cap="flat" cmpd="sng" algn="ctr">
+                      <a:solidFill>
+                        <a:srgbClr val="E2E8F0"/>
+                      </a:solidFill>
+                      <a:prstDash val="solid"/>
+                      <a:round/>
+                      <a:headEnd type="none" w="med" len="med"/>
+                      <a:tailEnd type="none" w="med" len="med"/>
+                    </a:lnR>
+                    <a:lnT w="9525" cap="flat" cmpd="sng" algn="ctr">
+                      <a:solidFill>
+                        <a:srgbClr val="E2E8F0"/>
+                      </a:solidFill>
+                      <a:prstDash val="solid"/>
+                      <a:round/>
+                      <a:headEnd type="none" w="med" len="med"/>
+                      <a:tailEnd type="none" w="med" len="med"/>
+                    </a:lnT>
+                    <a:lnB w="9525" cap="flat" cmpd="sng" algn="ctr">
+                      <a:solidFill>
+                        <a:srgbClr val="E2E8F0"/>
+                      </a:solidFill>
+                      <a:prstDash val="solid"/>
+                      <a:round/>
+                      <a:headEnd type="none" w="med" len="med"/>
+                      <a:tailEnd type="none" w="med" len="med"/>
+                    </a:lnB>
+                    <a:solidFill>
+                      <a:srgbClr val="FFF1F3"/>
+                    </a:solidFill>
+                  </a:tcPr>
+                </a:tc>
+                <a:tc>
+                  <a:txBody>
+                    <a:bodyPr/>
+                    <a:lstStyle/>
+                    <a:p>
+                      <a:pPr indent="0" marL="0">
+                        <a:buNone/>
+                      </a:pPr>
+                      <a:r>
+                        <a:rPr lang="en-US" sz="1050" dirty="0">
+                          <a:solidFill>
+                            <a:srgbClr val="334155"/>
+                          </a:solidFill>
+                          <a:latin typeface="Calibri" pitchFamily="34" charset="0"/>
+                          <a:ea typeface="Calibri" pitchFamily="34" charset="-122"/>
+                          <a:cs typeface="Calibri" pitchFamily="34" charset="-120"/>
+                        </a:rPr>
+                        <a:t>Lite mode (no images or animations) · offline installable PWA · lazy-loaded pages · audio</a:t>
+                      </a:r>
+                      <a:endParaRPr lang="en-US" sz="1050" dirty="0">
+                        <a:latin typeface="Calibri" charset="0"/>
+                        <a:ea typeface="Calibri" charset="0"/>
+                        <a:cs typeface="Calibri" charset="0"/>
+                      </a:endParaRPr>
+                    </a:p>
+                  </a:txBody>
+                  <a:tcPr marL="91440" marR="91440" marT="0" marB="0" anchor="ctr">
+                    <a:lnL w="9525" cap="flat" cmpd="sng" algn="ctr">
+                      <a:solidFill>
+                        <a:srgbClr val="E2E8F0"/>
+                      </a:solidFill>
+                      <a:prstDash val="solid"/>
+                      <a:round/>
+                      <a:headEnd type="none" w="med" len="med"/>
+                      <a:tailEnd type="none" w="med" len="med"/>
+                    </a:lnL>
+                    <a:lnR w="9525" cap="flat" cmpd="sng" algn="ctr">
+                      <a:solidFill>
+                        <a:srgbClr val="E2E8F0"/>
+                      </a:solidFill>
+                      <a:prstDash val="solid"/>
+                      <a:round/>
+                      <a:headEnd type="none" w="med" len="med"/>
+                      <a:tailEnd type="none" w="med" len="med"/>
+                    </a:lnR>
+                    <a:lnT w="9525" cap="flat" cmpd="sng" algn="ctr">
+                      <a:solidFill>
+                        <a:srgbClr val="E2E8F0"/>
+                      </a:solidFill>
+                      <a:prstDash val="solid"/>
+                      <a:round/>
+                      <a:headEnd type="none" w="med" len="med"/>
+                      <a:tailEnd type="none" w="med" len="med"/>
+                    </a:lnT>
+                    <a:lnB w="9525" cap="flat" cmpd="sng" algn="ctr">
+                      <a:solidFill>
+                        <a:srgbClr val="E2E8F0"/>
+                      </a:solidFill>
+                      <a:prstDash val="solid"/>
+                      <a:round/>
+                      <a:headEnd type="none" w="med" len="med"/>
+                      <a:tailEnd type="none" w="med" len="med"/>
+                    </a:lnB>
+                    <a:solidFill>
+                      <a:srgbClr val="FFFFFF"/>
+                    </a:solidFill>
+                  </a:tcPr>
+                </a:tc>
+              </a:tr>
+              <a:tr h="393192">
                 <a:tc>
                   <a:txBody>
                     <a:bodyPr/>
@@ -12270,6 +12981,212 @@
                           <a:cs typeface="Calibri" pitchFamily="34" charset="-120"/>
                         </a:rPr>
                         <a:t>Fake teacher accounts</a:t>
+                      </a:r>
+                      <a:endParaRPr lang="en-US" sz="1050" dirty="0">
+                        <a:latin typeface="Calibri" charset="0"/>
+                        <a:ea typeface="Calibri" charset="0"/>
+                        <a:cs typeface="Calibri" charset="0"/>
+                      </a:endParaRPr>
+                    </a:p>
+                  </a:txBody>
+                  <a:tcPr marL="91440" marR="91440" marT="0" marB="0" anchor="ctr">
+                    <a:lnL w="9525" cap="flat" cmpd="sng" algn="ctr">
+                      <a:solidFill>
+                        <a:srgbClr val="E2E8F0"/>
+                      </a:solidFill>
+                      <a:prstDash val="solid"/>
+                      <a:round/>
+                      <a:headEnd type="none" w="med" len="med"/>
+                      <a:tailEnd type="none" w="med" len="med"/>
+                    </a:lnL>
+                    <a:lnR w="9525" cap="flat" cmpd="sng" algn="ctr">
+                      <a:solidFill>
+                        <a:srgbClr val="E2E8F0"/>
+                      </a:solidFill>
+                      <a:prstDash val="solid"/>
+                      <a:round/>
+                      <a:headEnd type="none" w="med" len="med"/>
+                      <a:tailEnd type="none" w="med" len="med"/>
+                    </a:lnR>
+                    <a:lnT w="9525" cap="flat" cmpd="sng" algn="ctr">
+                      <a:solidFill>
+                        <a:srgbClr val="E2E8F0"/>
+                      </a:solidFill>
+                      <a:prstDash val="solid"/>
+                      <a:round/>
+                      <a:headEnd type="none" w="med" len="med"/>
+                      <a:tailEnd type="none" w="med" len="med"/>
+                    </a:lnT>
+                    <a:lnB w="9525" cap="flat" cmpd="sng" algn="ctr">
+                      <a:solidFill>
+                        <a:srgbClr val="E2E8F0"/>
+                      </a:solidFill>
+                      <a:prstDash val="solid"/>
+                      <a:round/>
+                      <a:headEnd type="none" w="med" len="med"/>
+                      <a:tailEnd type="none" w="med" len="med"/>
+                    </a:lnB>
+                    <a:solidFill>
+                      <a:srgbClr val="F8FAFC"/>
+                    </a:solidFill>
+                  </a:tcPr>
+                </a:tc>
+                <a:tc>
+                  <a:txBody>
+                    <a:bodyPr/>
+                    <a:lstStyle/>
+                    <a:p>
+                      <a:pPr algn="ctr" indent="0" marL="0">
+                        <a:buNone/>
+                      </a:pPr>
+                      <a:r>
+                        <a:rPr lang="en-US" sz="1050" b="1" dirty="0">
+                          <a:solidFill>
+                            <a:srgbClr val="D97706"/>
+                          </a:solidFill>
+                          <a:latin typeface="Calibri" pitchFamily="34" charset="0"/>
+                          <a:ea typeface="Calibri" pitchFamily="34" charset="-122"/>
+                          <a:cs typeface="Calibri" pitchFamily="34" charset="-120"/>
+                        </a:rPr>
+                        <a:t>Medium</a:t>
+                      </a:r>
+                      <a:endParaRPr lang="en-US" sz="1050" dirty="0">
+                        <a:latin typeface="Calibri" charset="0"/>
+                        <a:ea typeface="Calibri" charset="0"/>
+                        <a:cs typeface="Calibri" charset="0"/>
+                      </a:endParaRPr>
+                    </a:p>
+                  </a:txBody>
+                  <a:tcPr marL="91440" marR="91440" marT="0" marB="0" anchor="ctr">
+                    <a:lnL w="9525" cap="flat" cmpd="sng" algn="ctr">
+                      <a:solidFill>
+                        <a:srgbClr val="E2E8F0"/>
+                      </a:solidFill>
+                      <a:prstDash val="solid"/>
+                      <a:round/>
+                      <a:headEnd type="none" w="med" len="med"/>
+                      <a:tailEnd type="none" w="med" len="med"/>
+                    </a:lnL>
+                    <a:lnR w="9525" cap="flat" cmpd="sng" algn="ctr">
+                      <a:solidFill>
+                        <a:srgbClr val="E2E8F0"/>
+                      </a:solidFill>
+                      <a:prstDash val="solid"/>
+                      <a:round/>
+                      <a:headEnd type="none" w="med" len="med"/>
+                      <a:tailEnd type="none" w="med" len="med"/>
+                    </a:lnR>
+                    <a:lnT w="9525" cap="flat" cmpd="sng" algn="ctr">
+                      <a:solidFill>
+                        <a:srgbClr val="E2E8F0"/>
+                      </a:solidFill>
+                      <a:prstDash val="solid"/>
+                      <a:round/>
+                      <a:headEnd type="none" w="med" len="med"/>
+                      <a:tailEnd type="none" w="med" len="med"/>
+                    </a:lnT>
+                    <a:lnB w="9525" cap="flat" cmpd="sng" algn="ctr">
+                      <a:solidFill>
+                        <a:srgbClr val="E2E8F0"/>
+                      </a:solidFill>
+                      <a:prstDash val="solid"/>
+                      <a:round/>
+                      <a:headEnd type="none" w="med" len="med"/>
+                      <a:tailEnd type="none" w="med" len="med"/>
+                    </a:lnB>
+                    <a:solidFill>
+                      <a:srgbClr val="FFF7E6"/>
+                    </a:solidFill>
+                  </a:tcPr>
+                </a:tc>
+                <a:tc>
+                  <a:txBody>
+                    <a:bodyPr/>
+                    <a:lstStyle/>
+                    <a:p>
+                      <a:pPr indent="0" marL="0">
+                        <a:buNone/>
+                      </a:pPr>
+                      <a:r>
+                        <a:rPr lang="en-US" sz="1050" dirty="0">
+                          <a:solidFill>
+                            <a:srgbClr val="334155"/>
+                          </a:solidFill>
+                          <a:latin typeface="Calibri" pitchFamily="34" charset="0"/>
+                          <a:ea typeface="Calibri" pitchFamily="34" charset="-122"/>
+                          <a:cs typeface="Calibri" pitchFamily="34" charset="-120"/>
+                        </a:rPr>
+                        <a:t>Admin verifies college + employee ID · only verified teachers can run classes</a:t>
+                      </a:r>
+                      <a:endParaRPr lang="en-US" sz="1050" dirty="0">
+                        <a:latin typeface="Calibri" charset="0"/>
+                        <a:ea typeface="Calibri" charset="0"/>
+                        <a:cs typeface="Calibri" charset="0"/>
+                      </a:endParaRPr>
+                    </a:p>
+                  </a:txBody>
+                  <a:tcPr marL="91440" marR="91440" marT="0" marB="0" anchor="ctr">
+                    <a:lnL w="9525" cap="flat" cmpd="sng" algn="ctr">
+                      <a:solidFill>
+                        <a:srgbClr val="E2E8F0"/>
+                      </a:solidFill>
+                      <a:prstDash val="solid"/>
+                      <a:round/>
+                      <a:headEnd type="none" w="med" len="med"/>
+                      <a:tailEnd type="none" w="med" len="med"/>
+                    </a:lnL>
+                    <a:lnR w="9525" cap="flat" cmpd="sng" algn="ctr">
+                      <a:solidFill>
+                        <a:srgbClr val="E2E8F0"/>
+                      </a:solidFill>
+                      <a:prstDash val="solid"/>
+                      <a:round/>
+                      <a:headEnd type="none" w="med" len="med"/>
+                      <a:tailEnd type="none" w="med" len="med"/>
+                    </a:lnR>
+                    <a:lnT w="9525" cap="flat" cmpd="sng" algn="ctr">
+                      <a:solidFill>
+                        <a:srgbClr val="E2E8F0"/>
+                      </a:solidFill>
+                      <a:prstDash val="solid"/>
+                      <a:round/>
+                      <a:headEnd type="none" w="med" len="med"/>
+                      <a:tailEnd type="none" w="med" len="med"/>
+                    </a:lnT>
+                    <a:lnB w="9525" cap="flat" cmpd="sng" algn="ctr">
+                      <a:solidFill>
+                        <a:srgbClr val="E2E8F0"/>
+                      </a:solidFill>
+                      <a:prstDash val="solid"/>
+                      <a:round/>
+                      <a:headEnd type="none" w="med" len="med"/>
+                      <a:tailEnd type="none" w="med" len="med"/>
+                    </a:lnB>
+                    <a:solidFill>
+                      <a:srgbClr val="F8FAFC"/>
+                    </a:solidFill>
+                  </a:tcPr>
+                </a:tc>
+              </a:tr>
+              <a:tr h="393192">
+                <a:tc>
+                  <a:txBody>
+                    <a:bodyPr/>
+                    <a:lstStyle/>
+                    <a:p>
+                      <a:pPr indent="0" marL="0">
+                        <a:buNone/>
+                      </a:pPr>
+                      <a:r>
+                        <a:rPr lang="en-US" sz="1050" b="1" dirty="0">
+                          <a:solidFill>
+                            <a:srgbClr val="0F172A"/>
+                          </a:solidFill>
+                          <a:latin typeface="Calibri" pitchFamily="34" charset="0"/>
+                          <a:ea typeface="Calibri" pitchFamily="34" charset="-122"/>
+                          <a:cs typeface="Calibri" pitchFamily="34" charset="-120"/>
+                        </a:rPr>
+                        <a:t>Badge cheating or forgery</a:t>
                       </a:r>
                       <a:endParaRPr lang="en-US" sz="1050" dirty="0">
                         <a:latin typeface="Calibri" charset="0"/>
@@ -12405,7 +13322,7 @@
                           <a:ea typeface="Calibri" pitchFamily="34" charset="-122"/>
                           <a:cs typeface="Calibri" pitchFamily="34" charset="-120"/>
                         </a:rPr>
-                        <a:t>Admin verifies college + employee ID · only verified teachers can run classes</a:t>
+                        <a:t>Answers never sent to the browser · server grading · HMAC-SHA256 signature · public verify link</a:t>
                       </a:r>
                       <a:endParaRPr lang="en-US" sz="1050" dirty="0">
                         <a:latin typeface="Calibri" charset="0"/>
@@ -12457,7 +13374,7 @@
                   </a:tcPr>
                 </a:tc>
               </a:tr>
-              <a:tr h="411480">
+              <a:tr h="393192">
                 <a:tc>
                   <a:txBody>
                     <a:bodyPr/>
@@ -12475,7 +13392,7 @@
                           <a:ea typeface="Calibri" pitchFamily="34" charset="-122"/>
                           <a:cs typeface="Calibri" pitchFamily="34" charset="-120"/>
                         </a:rPr>
-                        <a:t>Badge cheating or forgery</a:t>
+                        <a:t>Low teacher adoption</a:t>
                       </a:r>
                       <a:endParaRPr lang="en-US" sz="1050" dirty="0">
                         <a:latin typeface="Calibri" charset="0"/>
@@ -12611,7 +13528,7 @@
                           <a:ea typeface="Calibri" pitchFamily="34" charset="-122"/>
                           <a:cs typeface="Calibri" pitchFamily="34" charset="-120"/>
                         </a:rPr>
-                        <a:t>Answers never sent to the browser · server grading · HMAC-SHA256 signature · public verify link</a:t>
+                        <a:t>3 free tries without login · Hindi · WhatsApp sharing · saves prep time from day one</a:t>
                       </a:r>
                       <a:endParaRPr lang="en-US" sz="1050" dirty="0">
                         <a:latin typeface="Calibri" charset="0"/>
@@ -12663,7 +13580,7 @@
                   </a:tcPr>
                 </a:tc>
               </a:tr>
-              <a:tr h="411480">
+              <a:tr h="393192">
                 <a:tc>
                   <a:txBody>
                     <a:bodyPr/>
@@ -12681,7 +13598,7 @@
                           <a:ea typeface="Calibri" pitchFamily="34" charset="-122"/>
                           <a:cs typeface="Calibri" pitchFamily="34" charset="-120"/>
                         </a:rPr>
-                        <a:t>Low teacher adoption</a:t>
+                        <a:t>Keeping syllabus data current at scale</a:t>
                       </a:r>
                       <a:endParaRPr lang="en-US" sz="1050" dirty="0">
                         <a:latin typeface="Calibri" charset="0"/>
@@ -12817,7 +13734,7 @@
                           <a:ea typeface="Calibri" pitchFamily="34" charset="-122"/>
                           <a:cs typeface="Calibri" pitchFamily="34" charset="-120"/>
                         </a:rPr>
-                        <a:t>3 free tries without login · Hindi · WhatsApp sharing · saves prep time from day one</a:t>
+                        <a:t>One structured file per university · next: university &amp; teacher uploads, college partnerships</a:t>
                       </a:r>
                       <a:endParaRPr lang="en-US" sz="1050" dirty="0">
                         <a:latin typeface="Calibri" charset="0"/>
@@ -12869,213 +13786,7 @@
                   </a:tcPr>
                 </a:tc>
               </a:tr>
-              <a:tr h="411480">
-                <a:tc>
-                  <a:txBody>
-                    <a:bodyPr/>
-                    <a:lstStyle/>
-                    <a:p>
-                      <a:pPr indent="0" marL="0">
-                        <a:buNone/>
-                      </a:pPr>
-                      <a:r>
-                        <a:rPr lang="en-US" sz="1050" b="1" dirty="0">
-                          <a:solidFill>
-                            <a:srgbClr val="0F172A"/>
-                          </a:solidFill>
-                          <a:latin typeface="Calibri" pitchFamily="34" charset="0"/>
-                          <a:ea typeface="Calibri" pitchFamily="34" charset="-122"/>
-                          <a:cs typeface="Calibri" pitchFamily="34" charset="-120"/>
-                        </a:rPr>
-                        <a:t>Keeping syllabus data current at scale</a:t>
-                      </a:r>
-                      <a:endParaRPr lang="en-US" sz="1050" dirty="0">
-                        <a:latin typeface="Calibri" charset="0"/>
-                        <a:ea typeface="Calibri" charset="0"/>
-                        <a:cs typeface="Calibri" charset="0"/>
-                      </a:endParaRPr>
-                    </a:p>
-                  </a:txBody>
-                  <a:tcPr marL="91440" marR="91440" marT="0" marB="0" anchor="ctr">
-                    <a:lnL w="9525" cap="flat" cmpd="sng" algn="ctr">
-                      <a:solidFill>
-                        <a:srgbClr val="E2E8F0"/>
-                      </a:solidFill>
-                      <a:prstDash val="solid"/>
-                      <a:round/>
-                      <a:headEnd type="none" w="med" len="med"/>
-                      <a:tailEnd type="none" w="med" len="med"/>
-                    </a:lnL>
-                    <a:lnR w="9525" cap="flat" cmpd="sng" algn="ctr">
-                      <a:solidFill>
-                        <a:srgbClr val="E2E8F0"/>
-                      </a:solidFill>
-                      <a:prstDash val="solid"/>
-                      <a:round/>
-                      <a:headEnd type="none" w="med" len="med"/>
-                      <a:tailEnd type="none" w="med" len="med"/>
-                    </a:lnR>
-                    <a:lnT w="9525" cap="flat" cmpd="sng" algn="ctr">
-                      <a:solidFill>
-                        <a:srgbClr val="E2E8F0"/>
-                      </a:solidFill>
-                      <a:prstDash val="solid"/>
-                      <a:round/>
-                      <a:headEnd type="none" w="med" len="med"/>
-                      <a:tailEnd type="none" w="med" len="med"/>
-                    </a:lnT>
-                    <a:lnB w="9525" cap="flat" cmpd="sng" algn="ctr">
-                      <a:solidFill>
-                        <a:srgbClr val="E2E8F0"/>
-                      </a:solidFill>
-                      <a:prstDash val="solid"/>
-                      <a:round/>
-                      <a:headEnd type="none" w="med" len="med"/>
-                      <a:tailEnd type="none" w="med" len="med"/>
-                    </a:lnB>
-                    <a:solidFill>
-                      <a:srgbClr val="F8FAFC"/>
-                    </a:solidFill>
-                  </a:tcPr>
-                </a:tc>
-                <a:tc>
-                  <a:txBody>
-                    <a:bodyPr/>
-                    <a:lstStyle/>
-                    <a:p>
-                      <a:pPr algn="ctr" indent="0" marL="0">
-                        <a:buNone/>
-                      </a:pPr>
-                      <a:r>
-                        <a:rPr lang="en-US" sz="1050" b="1" dirty="0">
-                          <a:solidFill>
-                            <a:srgbClr val="D97706"/>
-                          </a:solidFill>
-                          <a:latin typeface="Calibri" pitchFamily="34" charset="0"/>
-                          <a:ea typeface="Calibri" pitchFamily="34" charset="-122"/>
-                          <a:cs typeface="Calibri" pitchFamily="34" charset="-120"/>
-                        </a:rPr>
-                        <a:t>Medium</a:t>
-                      </a:r>
-                      <a:endParaRPr lang="en-US" sz="1050" dirty="0">
-                        <a:latin typeface="Calibri" charset="0"/>
-                        <a:ea typeface="Calibri" charset="0"/>
-                        <a:cs typeface="Calibri" charset="0"/>
-                      </a:endParaRPr>
-                    </a:p>
-                  </a:txBody>
-                  <a:tcPr marL="91440" marR="91440" marT="0" marB="0" anchor="ctr">
-                    <a:lnL w="9525" cap="flat" cmpd="sng" algn="ctr">
-                      <a:solidFill>
-                        <a:srgbClr val="E2E8F0"/>
-                      </a:solidFill>
-                      <a:prstDash val="solid"/>
-                      <a:round/>
-                      <a:headEnd type="none" w="med" len="med"/>
-                      <a:tailEnd type="none" w="med" len="med"/>
-                    </a:lnL>
-                    <a:lnR w="9525" cap="flat" cmpd="sng" algn="ctr">
-                      <a:solidFill>
-                        <a:srgbClr val="E2E8F0"/>
-                      </a:solidFill>
-                      <a:prstDash val="solid"/>
-                      <a:round/>
-                      <a:headEnd type="none" w="med" len="med"/>
-                      <a:tailEnd type="none" w="med" len="med"/>
-                    </a:lnR>
-                    <a:lnT w="9525" cap="flat" cmpd="sng" algn="ctr">
-                      <a:solidFill>
-                        <a:srgbClr val="E2E8F0"/>
-                      </a:solidFill>
-                      <a:prstDash val="solid"/>
-                      <a:round/>
-                      <a:headEnd type="none" w="med" len="med"/>
-                      <a:tailEnd type="none" w="med" len="med"/>
-                    </a:lnT>
-                    <a:lnB w="9525" cap="flat" cmpd="sng" algn="ctr">
-                      <a:solidFill>
-                        <a:srgbClr val="E2E8F0"/>
-                      </a:solidFill>
-                      <a:prstDash val="solid"/>
-                      <a:round/>
-                      <a:headEnd type="none" w="med" len="med"/>
-                      <a:tailEnd type="none" w="med" len="med"/>
-                    </a:lnB>
-                    <a:solidFill>
-                      <a:srgbClr val="FFF7E6"/>
-                    </a:solidFill>
-                  </a:tcPr>
-                </a:tc>
-                <a:tc>
-                  <a:txBody>
-                    <a:bodyPr/>
-                    <a:lstStyle/>
-                    <a:p>
-                      <a:pPr indent="0" marL="0">
-                        <a:buNone/>
-                      </a:pPr>
-                      <a:r>
-                        <a:rPr lang="en-US" sz="1050" dirty="0">
-                          <a:solidFill>
-                            <a:srgbClr val="334155"/>
-                          </a:solidFill>
-                          <a:latin typeface="Calibri" pitchFamily="34" charset="0"/>
-                          <a:ea typeface="Calibri" pitchFamily="34" charset="-122"/>
-                          <a:cs typeface="Calibri" pitchFamily="34" charset="-120"/>
-                        </a:rPr>
-                        <a:t>One structured file per university · next: university &amp; teacher uploads, college partnerships</a:t>
-                      </a:r>
-                      <a:endParaRPr lang="en-US" sz="1050" dirty="0">
-                        <a:latin typeface="Calibri" charset="0"/>
-                        <a:ea typeface="Calibri" charset="0"/>
-                        <a:cs typeface="Calibri" charset="0"/>
-                      </a:endParaRPr>
-                    </a:p>
-                  </a:txBody>
-                  <a:tcPr marL="91440" marR="91440" marT="0" marB="0" anchor="ctr">
-                    <a:lnL w="9525" cap="flat" cmpd="sng" algn="ctr">
-                      <a:solidFill>
-                        <a:srgbClr val="E2E8F0"/>
-                      </a:solidFill>
-                      <a:prstDash val="solid"/>
-                      <a:round/>
-                      <a:headEnd type="none" w="med" len="med"/>
-                      <a:tailEnd type="none" w="med" len="med"/>
-                    </a:lnL>
-                    <a:lnR w="9525" cap="flat" cmpd="sng" algn="ctr">
-                      <a:solidFill>
-                        <a:srgbClr val="E2E8F0"/>
-                      </a:solidFill>
-                      <a:prstDash val="solid"/>
-                      <a:round/>
-                      <a:headEnd type="none" w="med" len="med"/>
-                      <a:tailEnd type="none" w="med" len="med"/>
-                    </a:lnR>
-                    <a:lnT w="9525" cap="flat" cmpd="sng" algn="ctr">
-                      <a:solidFill>
-                        <a:srgbClr val="E2E8F0"/>
-                      </a:solidFill>
-                      <a:prstDash val="solid"/>
-                      <a:round/>
-                      <a:headEnd type="none" w="med" len="med"/>
-                      <a:tailEnd type="none" w="med" len="med"/>
-                    </a:lnT>
-                    <a:lnB w="9525" cap="flat" cmpd="sng" algn="ctr">
-                      <a:solidFill>
-                        <a:srgbClr val="E2E8F0"/>
-                      </a:solidFill>
-                      <a:prstDash val="solid"/>
-                      <a:round/>
-                      <a:headEnd type="none" w="med" len="med"/>
-                      <a:tailEnd type="none" w="med" len="med"/>
-                    </a:lnB>
-                    <a:solidFill>
-                      <a:srgbClr val="F8FAFC"/>
-                    </a:solidFill>
-                  </a:tcPr>
-                </a:tc>
-              </a:tr>
-              <a:tr h="411480">
+              <a:tr h="393192">
                 <a:tc>
                   <a:txBody>
                     <a:bodyPr/>
@@ -13140,7 +13851,7 @@
                       <a:tailEnd type="none" w="med" len="med"/>
                     </a:lnB>
                     <a:solidFill>
-                      <a:srgbClr val="FFFFFF"/>
+                      <a:srgbClr val="F8FAFC"/>
                     </a:solidFill>
                   </a:tcPr>
                 </a:tc>
@@ -13276,7 +13987,7 @@
                       <a:tailEnd type="none" w="med" len="med"/>
                     </a:lnB>
                     <a:solidFill>
-                      <a:srgbClr val="FFFFFF"/>
+                      <a:srgbClr val="F8FAFC"/>
                     </a:solidFill>
                   </a:tcPr>
                 </a:tc>
@@ -14560,7 +15271,7 @@
       </p:sp>
       <p:sp>
         <p:nvSpPr>
-          <p:cNvPr id="37" name="WifiOff circle"/>
+          <p:cNvPr id="37" name="LifeBuoy circle"/>
           <p:cNvSpPr/>
           <p:nvPr/>
         </p:nvSpPr>
@@ -14585,7 +15296,7 @@
       </p:sp>
       <p:pic>
         <p:nvPicPr>
-          <p:cNvPr id="38" name="WifiOff icon" descr="WifiOff icon">    </p:cNvPr>
+          <p:cNvPr id="38" name="LifeBuoy icon" descr="LifeBuoy icon">    </p:cNvPr>
           <p:cNvPicPr>
             <a:picLocks noChangeAspect="1"/>
           </p:cNvPicPr>
@@ -14640,7 +15351,7 @@
                 <a:ea typeface="Calibri" pitchFamily="34" charset="-122"/>
                 <a:cs typeface="Calibri" pitchFamily="34" charset="-120"/>
               </a:rPr>
-              <a:t>Learners on 2G/3G connections</a:t>
+              <a:t>Students under exam pressure</a:t>
             </a:r>
             <a:endParaRPr lang="en-US" sz="1050" dirty="0"/>
           </a:p>
@@ -14657,7 +15368,7 @@
                 <a:ea typeface="Calibri" pitchFamily="34" charset="-122"/>
                 <a:cs typeface="Calibri" pitchFamily="34" charset="-120"/>
               </a:rPr>
-              <a:t>→ Lite mode + offline installable app</a:t>
+              <a:t>→ Plan B careers + counsellors + Tele-MANAS helpline</a:t>
             </a:r>
             <a:endParaRPr lang="en-US" sz="1050" dirty="0"/>
           </a:p>
@@ -14745,7 +15456,7 @@
                 <a:ea typeface="Calibri" pitchFamily="34" charset="-122"/>
                 <a:cs typeface="Calibri" pitchFamily="34" charset="-120"/>
               </a:rPr>
-              <a:t>Mapping syllabus to real job skills</a:t>
+              <a:t>Mapping subjects &amp; syllabus to careers</a:t>
             </a:r>
             <a:endParaRPr lang="en-US" sz="1050" dirty="0"/>
           </a:p>
@@ -14762,7 +15473,7 @@
                 <a:ea typeface="Calibri" pitchFamily="34" charset="-122"/>
                 <a:cs typeface="Calibri" pitchFamily="34" charset="-120"/>
               </a:rPr>
-              <a:t>→ 45-skill × 13-role dataset, semester-wise</a:t>
+              <a:t>→ 24 courses, 22 exam routes, 45 skills × 13 roles</a:t>
             </a:r>
             <a:endParaRPr lang="en-US" sz="1050" dirty="0"/>
           </a:p>
@@ -15735,7 +16446,7 @@
                 <a:ea typeface="Calibri" pitchFamily="34" charset="-122"/>
                 <a:cs typeface="Calibri" pitchFamily="34" charset="-120"/>
               </a:rPr>
-              <a:t>Bharat add-ons</a:t>
+              <a:t>Study-to-job</a:t>
             </a:r>
             <a:endParaRPr lang="en-US" sz="1200" dirty="0"/>
           </a:p>
@@ -15774,7 +16485,7 @@
                 <a:ea typeface="Calibri" pitchFamily="34" charset="-122"/>
                 <a:cs typeface="Calibri" pitchFamily="34" charset="-120"/>
               </a:rPr>
-              <a:t>Hindi, Lite mode, offline app, vocational</a:t>
+              <a:t>Pathways, counseling, matched jobs, SIDF funding</a:t>
             </a:r>
             <a:endParaRPr lang="en-US" sz="1150" dirty="0"/>
           </a:p>
@@ -15943,7 +16654,7 @@
                 <a:ea typeface="Calibri" pitchFamily="34" charset="-122"/>
                 <a:cs typeface="Calibri" pitchFamily="34" charset="-120"/>
               </a:rPr>
-              <a:t>Teacher verification, live on Netlify</a:t>
+              <a:t>Teacher verification, Hindi, offline — live</a:t>
             </a:r>
             <a:endParaRPr lang="en-US" sz="1150" dirty="0"/>
           </a:p>
@@ -16264,7 +16975,7 @@
         </p:nvSpPr>
         <p:spPr>
           <a:xfrm>
-            <a:off x="685800" y="2011680"/>
+            <a:off x="685800" y="1938528"/>
             <a:ext cx="3246120" cy="274320"/>
           </a:xfrm>
           <a:prstGeom prst="rect">
@@ -16305,7 +17016,7 @@
         </p:nvSpPr>
         <p:spPr>
           <a:xfrm>
-            <a:off x="685800" y="2286000"/>
+            <a:off x="685800" y="2212848"/>
             <a:ext cx="3246120" cy="274320"/>
           </a:xfrm>
           <a:prstGeom prst="rect">
@@ -16351,7 +17062,7 @@
         </p:nvSpPr>
         <p:spPr>
           <a:xfrm>
-            <a:off x="685800" y="2688336"/>
+            <a:off x="685800" y="2615184"/>
             <a:ext cx="3246120" cy="274320"/>
           </a:xfrm>
           <a:prstGeom prst="rect">
@@ -16392,7 +17103,7 @@
         </p:nvSpPr>
         <p:spPr>
           <a:xfrm>
-            <a:off x="685800" y="2962656"/>
+            <a:off x="685800" y="2889504"/>
             <a:ext cx="3246120" cy="274320"/>
           </a:xfrm>
           <a:prstGeom prst="rect">
@@ -16438,7 +17149,7 @@
         </p:nvSpPr>
         <p:spPr>
           <a:xfrm>
-            <a:off x="685800" y="3364992"/>
+            <a:off x="685800" y="3291840"/>
             <a:ext cx="3246120" cy="274320"/>
           </a:xfrm>
           <a:prstGeom prst="rect">
@@ -16479,7 +17190,7 @@
         </p:nvSpPr>
         <p:spPr>
           <a:xfrm>
-            <a:off x="685800" y="3639312"/>
+            <a:off x="685800" y="3566160"/>
             <a:ext cx="3246120" cy="274320"/>
           </a:xfrm>
           <a:prstGeom prst="rect">
@@ -16525,7 +17236,7 @@
         </p:nvSpPr>
         <p:spPr>
           <a:xfrm>
-            <a:off x="685800" y="4041648"/>
+            <a:off x="685800" y="3968496"/>
             <a:ext cx="3246120" cy="274320"/>
           </a:xfrm>
           <a:prstGeom prst="rect">
@@ -16566,7 +17277,7 @@
         </p:nvSpPr>
         <p:spPr>
           <a:xfrm>
-            <a:off x="685800" y="4315968"/>
+            <a:off x="685800" y="4242816"/>
             <a:ext cx="3246120" cy="274320"/>
           </a:xfrm>
           <a:prstGeom prst="rect">
@@ -16734,7 +17445,7 @@
         </p:nvSpPr>
         <p:spPr>
           <a:xfrm>
-            <a:off x="4494276" y="2011680"/>
+            <a:off x="4494276" y="1938528"/>
             <a:ext cx="3246120" cy="274320"/>
           </a:xfrm>
           <a:prstGeom prst="rect">
@@ -16759,7 +17470,7 @@
                 <a:ea typeface="Calibri" pitchFamily="34" charset="-122"/>
                 <a:cs typeface="Calibri" pitchFamily="34" charset="-120"/>
               </a:rPr>
-              <a:t>Skill India Digital Hub</a:t>
+              <a:t>NTA: JEE Main, NEET UG, CUET UG</a:t>
             </a:r>
             <a:endParaRPr lang="en-US" sz="1150" dirty="0"/>
           </a:p>
@@ -16775,7 +17486,7 @@
         </p:nvSpPr>
         <p:spPr>
           <a:xfrm>
-            <a:off x="4494276" y="2286000"/>
+            <a:off x="4494276" y="2212848"/>
             <a:ext cx="3246120" cy="274320"/>
           </a:xfrm>
           <a:prstGeom prst="rect">
@@ -16807,7 +17518,7 @@
                   </a:extLst>
                 </a:hlinkClick>
               </a:rPr>
-              <a:t>skillindiadigital.gov.in</a:t>
+              <a:t>nta.ac.in</a:t>
             </a:r>
             <a:endParaRPr lang="en-US" sz="1050" dirty="0"/>
           </a:p>
@@ -16821,7 +17532,7 @@
         </p:nvSpPr>
         <p:spPr>
           <a:xfrm>
-            <a:off x="4494276" y="2688336"/>
+            <a:off x="4494276" y="2487168"/>
             <a:ext cx="3246120" cy="274320"/>
           </a:xfrm>
           <a:prstGeom prst="rect">
@@ -16846,7 +17557,7 @@
                 <a:ea typeface="Calibri" pitchFamily="34" charset="-122"/>
                 <a:cs typeface="Calibri" pitchFamily="34" charset="-120"/>
               </a:rPr>
-              <a:t>Apprenticeship India</a:t>
+              <a:t>JoSAA &amp; MCC counselling</a:t>
             </a:r>
             <a:endParaRPr lang="en-US" sz="1150" dirty="0"/>
           </a:p>
@@ -16862,7 +17573,7 @@
         </p:nvSpPr>
         <p:spPr>
           <a:xfrm>
-            <a:off x="4494276" y="2962656"/>
+            <a:off x="4494276" y="2761488"/>
             <a:ext cx="3246120" cy="274320"/>
           </a:xfrm>
           <a:prstGeom prst="rect">
@@ -16894,7 +17605,7 @@
                   </a:extLst>
                 </a:hlinkClick>
               </a:rPr>
-              <a:t>apprenticeshipindia.gov.in</a:t>
+              <a:t>josaa.nic.in · mcc.nic.in</a:t>
             </a:r>
             <a:endParaRPr lang="en-US" sz="1050" dirty="0"/>
           </a:p>
@@ -16908,7 +17619,7 @@
         </p:nvSpPr>
         <p:spPr>
           <a:xfrm>
-            <a:off x="4494276" y="3364992"/>
+            <a:off x="4494276" y="3035808"/>
             <a:ext cx="3246120" cy="274320"/>
           </a:xfrm>
           <a:prstGeom prst="rect">
@@ -16933,7 +17644,7 @@
                 <a:ea typeface="Calibri" pitchFamily="34" charset="-122"/>
                 <a:cs typeface="Calibri" pitchFamily="34" charset="-120"/>
               </a:rPr>
-              <a:t>SWAYAM &amp; NPTEL free courses</a:t>
+              <a:t>Tele-MANAS mental-health helpline</a:t>
             </a:r>
             <a:endParaRPr lang="en-US" sz="1150" dirty="0"/>
           </a:p>
@@ -16949,7 +17660,7 @@
         </p:nvSpPr>
         <p:spPr>
           <a:xfrm>
-            <a:off x="4494276" y="3639312"/>
+            <a:off x="4494276" y="3310128"/>
             <a:ext cx="3246120" cy="274320"/>
           </a:xfrm>
           <a:prstGeom prst="rect">
@@ -16981,7 +17692,7 @@
                   </a:extLst>
                 </a:hlinkClick>
               </a:rPr>
-              <a:t>swayam.gov.in · nptel.ac.in</a:t>
+              <a:t>telemanas.mohfw.gov.in</a:t>
             </a:r>
             <a:endParaRPr lang="en-US" sz="1050" dirty="0"/>
           </a:p>
@@ -16995,7 +17706,7 @@
         </p:nvSpPr>
         <p:spPr>
           <a:xfrm>
-            <a:off x="4494276" y="4041648"/>
+            <a:off x="4494276" y="3584448"/>
             <a:ext cx="3246120" cy="274320"/>
           </a:xfrm>
           <a:prstGeom prst="rect">
@@ -17020,7 +17731,7 @@
                 <a:ea typeface="Calibri" pitchFamily="34" charset="-122"/>
                 <a:cs typeface="Calibri" pitchFamily="34" charset="-120"/>
               </a:rPr>
-              <a:t>National Scholarship Portal</a:t>
+              <a:t>Startup India Seed Fund Scheme</a:t>
             </a:r>
             <a:endParaRPr lang="en-US" sz="1150" dirty="0"/>
           </a:p>
@@ -17036,7 +17747,7 @@
         </p:nvSpPr>
         <p:spPr>
           <a:xfrm>
-            <a:off x="4494276" y="4315968"/>
+            <a:off x="4494276" y="3858768"/>
             <a:ext cx="3246120" cy="274320"/>
           </a:xfrm>
           <a:prstGeom prst="rect">
@@ -17068,7 +17779,7 @@
                   </a:extLst>
                 </a:hlinkClick>
               </a:rPr>
-              <a:t>scholarships.gov.in</a:t>
+              <a:t>seedfund.startupindia.gov.in</a:t>
             </a:r>
             <a:endParaRPr lang="en-US" sz="1050" dirty="0"/>
           </a:p>
@@ -17076,7 +17787,94 @@
       </p:sp>
       <p:sp>
         <p:nvSpPr>
-          <p:cNvPr id="29" name="reference card"/>
+          <p:cNvPr id="29" name="Text 25"/>
+          <p:cNvSpPr txBox="1"/>
+          <p:nvPr/>
+        </p:nvSpPr>
+        <p:spPr>
+          <a:xfrm>
+            <a:off x="4494276" y="4133088"/>
+            <a:ext cx="3246120" cy="274320"/>
+          </a:xfrm>
+          <a:prstGeom prst="rect">
+            <a:avLst/>
+          </a:prstGeom>
+          <a:noFill/>
+          <a:ln/>
+        </p:spPr>
+        <p:txBody>
+          <a:bodyPr wrap="square" lIns="0" tIns="0" rIns="0" bIns="0" rtlCol="0" anchor="t"/>
+          <a:lstStyle/>
+          <a:p>
+            <a:pPr indent="0" marL="0">
+              <a:buNone/>
+            </a:pPr>
+            <a:r>
+              <a:rPr lang="en-US" sz="1150" b="1" dirty="0">
+                <a:solidFill>
+                  <a:srgbClr val="0F172A"/>
+                </a:solidFill>
+                <a:latin typeface="Calibri" pitchFamily="34" charset="0"/>
+                <a:ea typeface="Calibri" pitchFamily="34" charset="-122"/>
+                <a:cs typeface="Calibri" pitchFamily="34" charset="-120"/>
+              </a:rPr>
+              <a:t>Skill India Digital Hub</a:t>
+            </a:r>
+            <a:endParaRPr lang="en-US" sz="1150" dirty="0"/>
+          </a:p>
+        </p:txBody>
+      </p:sp>
+      <p:sp>
+        <p:nvSpPr>
+          <p:cNvPr id="30" name="Text 26">
+            <a:hlinkClick r:id="rId11" tooltip=""/>
+          </p:cNvPr>
+          <p:cNvSpPr txBox="1"/>
+          <p:nvPr/>
+        </p:nvSpPr>
+        <p:spPr>
+          <a:xfrm>
+            <a:off x="4494276" y="4407408"/>
+            <a:ext cx="3246120" cy="274320"/>
+          </a:xfrm>
+          <a:prstGeom prst="rect">
+            <a:avLst/>
+          </a:prstGeom>
+          <a:noFill/>
+          <a:ln/>
+        </p:spPr>
+        <p:txBody>
+          <a:bodyPr wrap="square" lIns="0" tIns="0" rIns="0" bIns="0" rtlCol="0" anchor="t"/>
+          <a:lstStyle/>
+          <a:p>
+            <a:pPr indent="0" marL="0">
+              <a:buNone/>
+            </a:pPr>
+            <a:r>
+              <a:rPr lang="en-US" sz="1050" u="sng" dirty="0">
+                <a:solidFill>
+                  <a:srgbClr val="4F46E5"/>
+                </a:solidFill>
+                <a:latin typeface="Calibri" pitchFamily="34" charset="0"/>
+                <a:ea typeface="Calibri" pitchFamily="34" charset="-122"/>
+                <a:cs typeface="Calibri" pitchFamily="34" charset="-120"/>
+                <a:hlinkClick r:id="rId11" invalidUrl="" action="" tgtFrame="" tooltip="" history="1" highlightClick="0" endSnd="0">
+                  <a:extLst>
+                    <a:ext uri="{A12FA001-AC4F-418D-AE19-62706E023703}">
+                      <ahyp:hlinkClr xmlns:ahyp="http://schemas.microsoft.com/office/drawing/2018/hyperlinkcolor" val="tx"/>
+                    </a:ext>
+                  </a:extLst>
+                </a:hlinkClick>
+              </a:rPr>
+              <a:t>skillindiadigital.gov.in</a:t>
+            </a:r>
+            <a:endParaRPr lang="en-US" sz="1050" dirty="0"/>
+          </a:p>
+        </p:txBody>
+      </p:sp>
+      <p:sp>
+        <p:nvSpPr>
+          <p:cNvPr id="31" name="reference card"/>
           <p:cNvSpPr/>
           <p:nvPr/>
         </p:nvSpPr>
@@ -17110,7 +17908,7 @@
       </p:sp>
       <p:sp>
         <p:nvSpPr>
-          <p:cNvPr id="30" name="Code circle"/>
+          <p:cNvPr id="32" name="Code circle"/>
           <p:cNvSpPr/>
           <p:nvPr/>
         </p:nvSpPr>
@@ -17135,14 +17933,14 @@
       </p:sp>
       <p:pic>
         <p:nvPicPr>
-          <p:cNvPr id="31" name="Code icon" descr="Code icon">    </p:cNvPr>
+          <p:cNvPr id="33" name="Code icon" descr="Code icon">    </p:cNvPr>
           <p:cNvPicPr>
             <a:picLocks noChangeAspect="1"/>
           </p:cNvPicPr>
           <p:nvPr/>
         </p:nvPicPr>
         <p:blipFill>
-          <a:blip r:embed="rId11"/>
+          <a:blip r:embed="rId12"/>
           <a:stretch>
             <a:fillRect/>
           </a:stretch>
@@ -17159,7 +17957,7 @@
       </p:pic>
       <p:sp>
         <p:nvSpPr>
-          <p:cNvPr id="32" name="Text 27"/>
+          <p:cNvPr id="34" name="Text 29"/>
           <p:cNvSpPr txBox="1"/>
           <p:nvPr/>
         </p:nvSpPr>
@@ -17198,13 +17996,13 @@
       </p:sp>
       <p:sp>
         <p:nvSpPr>
-          <p:cNvPr id="33" name="Text 28"/>
-          <p:cNvSpPr txBox="1"/>
-          <p:nvPr/>
-        </p:nvSpPr>
-        <p:spPr>
-          <a:xfrm>
-            <a:off x="8302752" y="2011680"/>
+          <p:cNvPr id="35" name="Text 30"/>
+          <p:cNvSpPr txBox="1"/>
+          <p:nvPr/>
+        </p:nvSpPr>
+        <p:spPr>
+          <a:xfrm>
+            <a:off x="8302752" y="1938528"/>
             <a:ext cx="3246120" cy="274320"/>
           </a:xfrm>
           <a:prstGeom prst="rect">
@@ -17230,93 +18028,6 @@
                 <a:cs typeface="Calibri" pitchFamily="34" charset="-120"/>
               </a:rPr>
               <a:t>Google Gemini API</a:t>
-            </a:r>
-            <a:endParaRPr lang="en-US" sz="1150" dirty="0"/>
-          </a:p>
-        </p:txBody>
-      </p:sp>
-      <p:sp>
-        <p:nvSpPr>
-          <p:cNvPr id="34" name="Text 29">
-            <a:hlinkClick r:id="rId12" tooltip=""/>
-          </p:cNvPr>
-          <p:cNvSpPr txBox="1"/>
-          <p:nvPr/>
-        </p:nvSpPr>
-        <p:spPr>
-          <a:xfrm>
-            <a:off x="8302752" y="2286000"/>
-            <a:ext cx="3246120" cy="274320"/>
-          </a:xfrm>
-          <a:prstGeom prst="rect">
-            <a:avLst/>
-          </a:prstGeom>
-          <a:noFill/>
-          <a:ln/>
-        </p:spPr>
-        <p:txBody>
-          <a:bodyPr wrap="square" lIns="0" tIns="0" rIns="0" bIns="0" rtlCol="0" anchor="t"/>
-          <a:lstStyle/>
-          <a:p>
-            <a:pPr indent="0" marL="0">
-              <a:buNone/>
-            </a:pPr>
-            <a:r>
-              <a:rPr lang="en-US" sz="1050" u="sng" dirty="0">
-                <a:solidFill>
-                  <a:srgbClr val="4F46E5"/>
-                </a:solidFill>
-                <a:latin typeface="Calibri" pitchFamily="34" charset="0"/>
-                <a:ea typeface="Calibri" pitchFamily="34" charset="-122"/>
-                <a:cs typeface="Calibri" pitchFamily="34" charset="-120"/>
-                <a:hlinkClick r:id="rId12" invalidUrl="" action="" tgtFrame="" tooltip="" history="1" highlightClick="0" endSnd="0">
-                  <a:extLst>
-                    <a:ext uri="{A12FA001-AC4F-418D-AE19-62706E023703}">
-                      <ahyp:hlinkClr xmlns:ahyp="http://schemas.microsoft.com/office/drawing/2018/hyperlinkcolor" val="tx"/>
-                    </a:ext>
-                  </a:extLst>
-                </a:hlinkClick>
-              </a:rPr>
-              <a:t>ai.google.dev</a:t>
-            </a:r>
-            <a:endParaRPr lang="en-US" sz="1050" dirty="0"/>
-          </a:p>
-        </p:txBody>
-      </p:sp>
-      <p:sp>
-        <p:nvSpPr>
-          <p:cNvPr id="35" name="Text 30"/>
-          <p:cNvSpPr txBox="1"/>
-          <p:nvPr/>
-        </p:nvSpPr>
-        <p:spPr>
-          <a:xfrm>
-            <a:off x="8302752" y="2688336"/>
-            <a:ext cx="3246120" cy="274320"/>
-          </a:xfrm>
-          <a:prstGeom prst="rect">
-            <a:avLst/>
-          </a:prstGeom>
-          <a:noFill/>
-          <a:ln/>
-        </p:spPr>
-        <p:txBody>
-          <a:bodyPr wrap="square" lIns="0" tIns="0" rIns="0" bIns="0" rtlCol="0" anchor="t"/>
-          <a:lstStyle/>
-          <a:p>
-            <a:pPr indent="0" marL="0">
-              <a:buNone/>
-            </a:pPr>
-            <a:r>
-              <a:rPr lang="en-US" sz="1150" b="1" dirty="0">
-                <a:solidFill>
-                  <a:srgbClr val="0F172A"/>
-                </a:solidFill>
-                <a:latin typeface="Calibri" pitchFamily="34" charset="0"/>
-                <a:ea typeface="Calibri" pitchFamily="34" charset="-122"/>
-                <a:cs typeface="Calibri" pitchFamily="34" charset="-120"/>
-              </a:rPr>
-              <a:t>Netlify Functions &amp; Blobs</a:t>
             </a:r>
             <a:endParaRPr lang="en-US" sz="1150" dirty="0"/>
           </a:p>
@@ -17332,7 +18043,7 @@
         </p:nvSpPr>
         <p:spPr>
           <a:xfrm>
-            <a:off x="8302752" y="2962656"/>
+            <a:off x="8302752" y="2212848"/>
             <a:ext cx="3246120" cy="274320"/>
           </a:xfrm>
           <a:prstGeom prst="rect">
@@ -17364,7 +18075,7 @@
                   </a:extLst>
                 </a:hlinkClick>
               </a:rPr>
-              <a:t>docs.netlify.com</a:t>
+              <a:t>ai.google.dev</a:t>
             </a:r>
             <a:endParaRPr lang="en-US" sz="1050" dirty="0"/>
           </a:p>
@@ -17378,7 +18089,7 @@
         </p:nvSpPr>
         <p:spPr>
           <a:xfrm>
-            <a:off x="8302752" y="3364992"/>
+            <a:off x="8302752" y="2615184"/>
             <a:ext cx="3246120" cy="274320"/>
           </a:xfrm>
           <a:prstGeom prst="rect">
@@ -17403,7 +18114,7 @@
                 <a:ea typeface="Calibri" pitchFamily="34" charset="-122"/>
                 <a:cs typeface="Calibri" pitchFamily="34" charset="-120"/>
               </a:rPr>
-              <a:t>React · Vite · Tailwind CSS</a:t>
+              <a:t>Netlify Functions &amp; Blobs</a:t>
             </a:r>
             <a:endParaRPr lang="en-US" sz="1150" dirty="0"/>
           </a:p>
@@ -17419,7 +18130,7 @@
         </p:nvSpPr>
         <p:spPr>
           <a:xfrm>
-            <a:off x="8302752" y="3639312"/>
+            <a:off x="8302752" y="2889504"/>
             <a:ext cx="3246120" cy="274320"/>
           </a:xfrm>
           <a:prstGeom prst="rect">
@@ -17451,7 +18162,7 @@
                   </a:extLst>
                 </a:hlinkClick>
               </a:rPr>
-              <a:t>react.dev · vite.dev · tailwindcss.com</a:t>
+              <a:t>docs.netlify.com</a:t>
             </a:r>
             <a:endParaRPr lang="en-US" sz="1050" dirty="0"/>
           </a:p>
@@ -17465,7 +18176,7 @@
         </p:nvSpPr>
         <p:spPr>
           <a:xfrm>
-            <a:off x="8302752" y="4041648"/>
+            <a:off x="8302752" y="3291840"/>
             <a:ext cx="3246120" cy="274320"/>
           </a:xfrm>
           <a:prstGeom prst="rect">
@@ -17490,7 +18201,7 @@
                 <a:ea typeface="Calibri" pitchFamily="34" charset="-122"/>
                 <a:cs typeface="Calibri" pitchFamily="34" charset="-120"/>
               </a:rPr>
-              <a:t>Web Speech API &amp; PWAs (MDN)</a:t>
+              <a:t>React · Vite · Tailwind CSS</a:t>
             </a:r>
             <a:endParaRPr lang="en-US" sz="1150" dirty="0"/>
           </a:p>
@@ -17506,7 +18217,7 @@
         </p:nvSpPr>
         <p:spPr>
           <a:xfrm>
-            <a:off x="8302752" y="4315968"/>
+            <a:off x="8302752" y="3566160"/>
             <a:ext cx="3246120" cy="274320"/>
           </a:xfrm>
           <a:prstGeom prst="rect">
@@ -17538,6 +18249,93 @@
                   </a:extLst>
                 </a:hlinkClick>
               </a:rPr>
+              <a:t>react.dev · vite.dev · tailwindcss.com</a:t>
+            </a:r>
+            <a:endParaRPr lang="en-US" sz="1050" dirty="0"/>
+          </a:p>
+        </p:txBody>
+      </p:sp>
+      <p:sp>
+        <p:nvSpPr>
+          <p:cNvPr id="41" name="Text 36"/>
+          <p:cNvSpPr txBox="1"/>
+          <p:nvPr/>
+        </p:nvSpPr>
+        <p:spPr>
+          <a:xfrm>
+            <a:off x="8302752" y="3968496"/>
+            <a:ext cx="3246120" cy="274320"/>
+          </a:xfrm>
+          <a:prstGeom prst="rect">
+            <a:avLst/>
+          </a:prstGeom>
+          <a:noFill/>
+          <a:ln/>
+        </p:spPr>
+        <p:txBody>
+          <a:bodyPr wrap="square" lIns="0" tIns="0" rIns="0" bIns="0" rtlCol="0" anchor="t"/>
+          <a:lstStyle/>
+          <a:p>
+            <a:pPr indent="0" marL="0">
+              <a:buNone/>
+            </a:pPr>
+            <a:r>
+              <a:rPr lang="en-US" sz="1150" b="1" dirty="0">
+                <a:solidFill>
+                  <a:srgbClr val="0F172A"/>
+                </a:solidFill>
+                <a:latin typeface="Calibri" pitchFamily="34" charset="0"/>
+                <a:ea typeface="Calibri" pitchFamily="34" charset="-122"/>
+                <a:cs typeface="Calibri" pitchFamily="34" charset="-120"/>
+              </a:rPr>
+              <a:t>Web Speech API &amp; PWAs (MDN)</a:t>
+            </a:r>
+            <a:endParaRPr lang="en-US" sz="1150" dirty="0"/>
+          </a:p>
+        </p:txBody>
+      </p:sp>
+      <p:sp>
+        <p:nvSpPr>
+          <p:cNvPr id="42" name="Text 37">
+            <a:hlinkClick r:id="rId16" tooltip=""/>
+          </p:cNvPr>
+          <p:cNvSpPr txBox="1"/>
+          <p:nvPr/>
+        </p:nvSpPr>
+        <p:spPr>
+          <a:xfrm>
+            <a:off x="8302752" y="4242816"/>
+            <a:ext cx="3246120" cy="274320"/>
+          </a:xfrm>
+          <a:prstGeom prst="rect">
+            <a:avLst/>
+          </a:prstGeom>
+          <a:noFill/>
+          <a:ln/>
+        </p:spPr>
+        <p:txBody>
+          <a:bodyPr wrap="square" lIns="0" tIns="0" rIns="0" bIns="0" rtlCol="0" anchor="t"/>
+          <a:lstStyle/>
+          <a:p>
+            <a:pPr indent="0" marL="0">
+              <a:buNone/>
+            </a:pPr>
+            <a:r>
+              <a:rPr lang="en-US" sz="1050" u="sng" dirty="0">
+                <a:solidFill>
+                  <a:srgbClr val="4F46E5"/>
+                </a:solidFill>
+                <a:latin typeface="Calibri" pitchFamily="34" charset="0"/>
+                <a:ea typeface="Calibri" pitchFamily="34" charset="-122"/>
+                <a:cs typeface="Calibri" pitchFamily="34" charset="-120"/>
+                <a:hlinkClick r:id="rId16" invalidUrl="" action="" tgtFrame="" tooltip="" history="1" highlightClick="0" endSnd="0">
+                  <a:extLst>
+                    <a:ext uri="{A12FA001-AC4F-418D-AE19-62706E023703}">
+                      <ahyp:hlinkClr xmlns:ahyp="http://schemas.microsoft.com/office/drawing/2018/hyperlinkcolor" val="tx"/>
+                    </a:ext>
+                  </a:extLst>
+                </a:hlinkClick>
+              </a:rPr>
               <a:t>developer.mozilla.org</a:t>
             </a:r>
             <a:endParaRPr lang="en-US" sz="1050" dirty="0"/>
@@ -17546,7 +18344,7 @@
       </p:sp>
       <p:sp>
         <p:nvSpPr>
-          <p:cNvPr id="41" name="project strip"/>
+          <p:cNvPr id="43" name="project strip"/>
           <p:cNvSpPr/>
           <p:nvPr/>
         </p:nvSpPr>
@@ -17580,7 +18378,7 @@
       </p:sp>
       <p:sp>
         <p:nvSpPr>
-          <p:cNvPr id="42" name="Text 37"/>
+          <p:cNvPr id="44" name="Text 39"/>
           <p:cNvSpPr txBox="1"/>
           <p:nvPr/>
         </p:nvSpPr>
@@ -17619,14 +18417,14 @@
       </p:sp>
       <p:pic>
         <p:nvPicPr>
-          <p:cNvPr id="43" name="Globe icon" descr="Globe icon">    </p:cNvPr>
+          <p:cNvPr id="45" name="Globe icon" descr="Globe icon">    </p:cNvPr>
           <p:cNvPicPr>
             <a:picLocks noChangeAspect="1"/>
           </p:cNvPicPr>
           <p:nvPr/>
         </p:nvPicPr>
         <p:blipFill>
-          <a:blip r:embed="rId16"/>
+          <a:blip r:embed="rId17"/>
           <a:stretch>
             <a:fillRect/>
           </a:stretch>
@@ -17643,7 +18441,7 @@
       </p:pic>
       <p:sp>
         <p:nvSpPr>
-          <p:cNvPr id="44" name="Text 38"/>
+          <p:cNvPr id="46" name="Text 40"/>
           <p:cNvSpPr txBox="1"/>
           <p:nvPr/>
         </p:nvSpPr>
@@ -17687,7 +18485,7 @@
                 <a:latin typeface="Calibri" pitchFamily="34" charset="0"/>
                 <a:ea typeface="Calibri" pitchFamily="34" charset="-122"/>
                 <a:cs typeface="Calibri" pitchFamily="34" charset="-120"/>
-                <a:hlinkClick r:id="rId17" invalidUrl="" action="" tgtFrame="" tooltip="" history="1" highlightClick="0" endSnd="0">
+                <a:hlinkClick r:id="rId18" invalidUrl="" action="" tgtFrame="" tooltip="" history="1" highlightClick="0" endSnd="0">
                   <a:extLst>
                     <a:ext uri="{A12FA001-AC4F-418D-AE19-62706E023703}">
                       <ahyp:hlinkClr xmlns:ahyp="http://schemas.microsoft.com/office/drawing/2018/hyperlinkcolor" val="tx"/>
@@ -17703,14 +18501,14 @@
       </p:sp>
       <p:pic>
         <p:nvPicPr>
-          <p:cNvPr id="45" name="Github icon" descr="Github icon">    </p:cNvPr>
+          <p:cNvPr id="47" name="Github icon" descr="Github icon">    </p:cNvPr>
           <p:cNvPicPr>
             <a:picLocks noChangeAspect="1"/>
           </p:cNvPicPr>
           <p:nvPr/>
         </p:nvPicPr>
         <p:blipFill>
-          <a:blip r:embed="rId18"/>
+          <a:blip r:embed="rId19"/>
           <a:stretch>
             <a:fillRect/>
           </a:stretch>
@@ -17727,7 +18525,7 @@
       </p:pic>
       <p:sp>
         <p:nvSpPr>
-          <p:cNvPr id="46" name="Text 39"/>
+          <p:cNvPr id="48" name="Text 41"/>
           <p:cNvSpPr txBox="1"/>
           <p:nvPr/>
         </p:nvSpPr>
@@ -17771,7 +18569,7 @@
                 <a:latin typeface="Calibri" pitchFamily="34" charset="0"/>
                 <a:ea typeface="Calibri" pitchFamily="34" charset="-122"/>
                 <a:cs typeface="Calibri" pitchFamily="34" charset="-120"/>
-                <a:hlinkClick r:id="rId19" invalidUrl="" action="" tgtFrame="" tooltip="" history="1" highlightClick="0" endSnd="0">
+                <a:hlinkClick r:id="rId20" invalidUrl="" action="" tgtFrame="" tooltip="" history="1" highlightClick="0" endSnd="0">
                   <a:extLst>
                     <a:ext uri="{A12FA001-AC4F-418D-AE19-62706E023703}">
                       <ahyp:hlinkClr xmlns:ahyp="http://schemas.microsoft.com/office/drawing/2018/hyperlinkcolor" val="tx"/>
@@ -17787,84 +18585,7 @@
       </p:sp>
       <p:pic>
         <p:nvPicPr>
-          <p:cNvPr id="47" name="CirclePlay icon" descr="CirclePlay icon">    </p:cNvPr>
-          <p:cNvPicPr>
-            <a:picLocks noChangeAspect="1"/>
-          </p:cNvPicPr>
-          <p:nvPr/>
-        </p:nvPicPr>
-        <p:blipFill>
-          <a:blip r:embed="rId20"/>
-          <a:stretch>
-            <a:fillRect/>
-          </a:stretch>
-        </p:blipFill>
-        <p:spPr>
-          <a:xfrm>
-            <a:off x="749808" y="6025896"/>
-            <a:ext cx="182880" cy="182880"/>
-          </a:xfrm>
-          <a:prstGeom prst="rect">
-            <a:avLst/>
-          </a:prstGeom>
-        </p:spPr>
-      </p:pic>
-      <p:sp>
-        <p:nvSpPr>
-          <p:cNvPr id="48" name="Text 40"/>
-          <p:cNvSpPr txBox="1"/>
-          <p:nvPr/>
-        </p:nvSpPr>
-        <p:spPr>
-          <a:xfrm>
-            <a:off x="1024128" y="5998464"/>
-            <a:ext cx="6858000" cy="246888"/>
-          </a:xfrm>
-          <a:prstGeom prst="rect">
-            <a:avLst/>
-          </a:prstGeom>
-          <a:noFill/>
-          <a:ln/>
-        </p:spPr>
-        <p:txBody>
-          <a:bodyPr wrap="square" lIns="0" tIns="0" rIns="0" bIns="0" rtlCol="0" anchor="ctr"/>
-          <a:lstStyle/>
-          <a:p>
-            <a:pPr indent="0" marL="0">
-              <a:buNone/>
-            </a:pPr>
-            <a:r>
-              <a:rPr lang="en-US" sz="1150" b="1" dirty="0">
-                <a:solidFill>
-                  <a:srgbClr val="FDBA74"/>
-                </a:solidFill>
-                <a:latin typeface="Calibri" pitchFamily="34" charset="0"/>
-                <a:ea typeface="Calibri" pitchFamily="34" charset="-122"/>
-                <a:cs typeface="Calibri" pitchFamily="34" charset="-120"/>
-              </a:rPr>
-              <a:t>Demo video:  </a:t>
-            </a:r>
-            <a:pPr indent="0" marL="0">
-              <a:buNone/>
-            </a:pPr>
-            <a:r>
-              <a:rPr lang="en-US" sz="1150" dirty="0">
-                <a:solidFill>
-                  <a:srgbClr val="FFFFFF"/>
-                </a:solidFill>
-                <a:latin typeface="Calibri" pitchFamily="34" charset="0"/>
-                <a:ea typeface="Calibri" pitchFamily="34" charset="-122"/>
-                <a:cs typeface="Calibri" pitchFamily="34" charset="-120"/>
-              </a:rPr>
-              <a:t>‹Add demo video link›</a:t>
-            </a:r>
-            <a:endParaRPr lang="en-US" sz="1150" dirty="0"/>
-          </a:p>
-        </p:txBody>
-      </p:sp>
-      <p:pic>
-        <p:nvPicPr>
-          <p:cNvPr id="49" name="qr Live demo" descr="QR code: Live demo">    </p:cNvPr>
+          <p:cNvPr id="49" name="CirclePlay icon" descr="CirclePlay icon">    </p:cNvPr>
           <p:cNvPicPr>
             <a:picLocks noChangeAspect="1"/>
           </p:cNvPicPr>
@@ -17878,8 +18599,8 @@
         </p:blipFill>
         <p:spPr>
           <a:xfrm>
-            <a:off x="8778240" y="5029200"/>
-            <a:ext cx="914400" cy="914400"/>
+            <a:off x="749808" y="6025896"/>
+            <a:ext cx="182880" cy="182880"/>
           </a:xfrm>
           <a:prstGeom prst="rect">
             <a:avLst/>
@@ -17888,30 +18609,44 @@
       </p:pic>
       <p:sp>
         <p:nvSpPr>
-          <p:cNvPr id="50" name="Text 41"/>
-          <p:cNvSpPr txBox="1"/>
-          <p:nvPr/>
-        </p:nvSpPr>
-        <p:spPr>
-          <a:xfrm>
-            <a:off x="8595360" y="5971032"/>
-            <a:ext cx="1280160" cy="228600"/>
-          </a:xfrm>
-          <a:prstGeom prst="rect">
-            <a:avLst/>
-          </a:prstGeom>
-          <a:noFill/>
-          <a:ln/>
-        </p:spPr>
-        <p:txBody>
-          <a:bodyPr wrap="square" lIns="0" tIns="0" rIns="0" bIns="0" rtlCol="0" anchor="t"/>
-          <a:lstStyle/>
-          <a:p>
-            <a:pPr algn="ctr" indent="0" marL="0">
-              <a:buNone/>
-            </a:pPr>
-            <a:r>
-              <a:rPr lang="en-US" sz="1050" b="1" dirty="0">
+          <p:cNvPr id="50" name="Text 42"/>
+          <p:cNvSpPr txBox="1"/>
+          <p:nvPr/>
+        </p:nvSpPr>
+        <p:spPr>
+          <a:xfrm>
+            <a:off x="1024128" y="5998464"/>
+            <a:ext cx="6858000" cy="246888"/>
+          </a:xfrm>
+          <a:prstGeom prst="rect">
+            <a:avLst/>
+          </a:prstGeom>
+          <a:noFill/>
+          <a:ln/>
+        </p:spPr>
+        <p:txBody>
+          <a:bodyPr wrap="square" lIns="0" tIns="0" rIns="0" bIns="0" rtlCol="0" anchor="ctr"/>
+          <a:lstStyle/>
+          <a:p>
+            <a:pPr indent="0" marL="0">
+              <a:buNone/>
+            </a:pPr>
+            <a:r>
+              <a:rPr lang="en-US" sz="1150" b="1" dirty="0">
+                <a:solidFill>
+                  <a:srgbClr val="FDBA74"/>
+                </a:solidFill>
+                <a:latin typeface="Calibri" pitchFamily="34" charset="0"/>
+                <a:ea typeface="Calibri" pitchFamily="34" charset="-122"/>
+                <a:cs typeface="Calibri" pitchFamily="34" charset="-120"/>
+              </a:rPr>
+              <a:t>Demo video:  </a:t>
+            </a:r>
+            <a:pPr indent="0" marL="0">
+              <a:buNone/>
+            </a:pPr>
+            <a:r>
+              <a:rPr lang="en-US" sz="1150" dirty="0">
                 <a:solidFill>
                   <a:srgbClr val="FFFFFF"/>
                 </a:solidFill>
@@ -17919,15 +18654,15 @@
                 <a:ea typeface="Calibri" pitchFamily="34" charset="-122"/>
                 <a:cs typeface="Calibri" pitchFamily="34" charset="-120"/>
               </a:rPr>
-              <a:t>Live demo</a:t>
-            </a:r>
-            <a:endParaRPr lang="en-US" sz="1050" dirty="0"/>
+              <a:t>‹Add demo video link›</a:t>
+            </a:r>
+            <a:endParaRPr lang="en-US" sz="1150" dirty="0"/>
           </a:p>
         </p:txBody>
       </p:sp>
       <p:pic>
         <p:nvPicPr>
-          <p:cNvPr id="51" name="qr GitHub" descr="QR code: GitHub">    </p:cNvPr>
+          <p:cNvPr id="51" name="qr Live demo" descr="QR code: Live demo">    </p:cNvPr>
           <p:cNvPicPr>
             <a:picLocks noChangeAspect="1"/>
           </p:cNvPicPr>
@@ -17941,6 +18676,69 @@
         </p:blipFill>
         <p:spPr>
           <a:xfrm>
+            <a:off x="8778240" y="5029200"/>
+            <a:ext cx="914400" cy="914400"/>
+          </a:xfrm>
+          <a:prstGeom prst="rect">
+            <a:avLst/>
+          </a:prstGeom>
+        </p:spPr>
+      </p:pic>
+      <p:sp>
+        <p:nvSpPr>
+          <p:cNvPr id="52" name="Text 43"/>
+          <p:cNvSpPr txBox="1"/>
+          <p:nvPr/>
+        </p:nvSpPr>
+        <p:spPr>
+          <a:xfrm>
+            <a:off x="8595360" y="5971032"/>
+            <a:ext cx="1280160" cy="228600"/>
+          </a:xfrm>
+          <a:prstGeom prst="rect">
+            <a:avLst/>
+          </a:prstGeom>
+          <a:noFill/>
+          <a:ln/>
+        </p:spPr>
+        <p:txBody>
+          <a:bodyPr wrap="square" lIns="0" tIns="0" rIns="0" bIns="0" rtlCol="0" anchor="t"/>
+          <a:lstStyle/>
+          <a:p>
+            <a:pPr algn="ctr" indent="0" marL="0">
+              <a:buNone/>
+            </a:pPr>
+            <a:r>
+              <a:rPr lang="en-US" sz="1050" b="1" dirty="0">
+                <a:solidFill>
+                  <a:srgbClr val="FFFFFF"/>
+                </a:solidFill>
+                <a:latin typeface="Calibri" pitchFamily="34" charset="0"/>
+                <a:ea typeface="Calibri" pitchFamily="34" charset="-122"/>
+                <a:cs typeface="Calibri" pitchFamily="34" charset="-120"/>
+              </a:rPr>
+              <a:t>Live demo</a:t>
+            </a:r>
+            <a:endParaRPr lang="en-US" sz="1050" dirty="0"/>
+          </a:p>
+        </p:txBody>
+      </p:sp>
+      <p:pic>
+        <p:nvPicPr>
+          <p:cNvPr id="53" name="qr GitHub" descr="QR code: GitHub">    </p:cNvPr>
+          <p:cNvPicPr>
+            <a:picLocks noChangeAspect="1"/>
+          </p:cNvPicPr>
+          <p:nvPr/>
+        </p:nvPicPr>
+        <p:blipFill>
+          <a:blip r:embed="rId23"/>
+          <a:stretch>
+            <a:fillRect/>
+          </a:stretch>
+        </p:blipFill>
+        <p:spPr>
+          <a:xfrm>
             <a:off x="10195560" y="5029200"/>
             <a:ext cx="914400" cy="914400"/>
           </a:xfrm>
@@ -17951,7 +18749,7 @@
       </p:pic>
       <p:sp>
         <p:nvSpPr>
-          <p:cNvPr id="52" name="Text 42"/>
+          <p:cNvPr id="54" name="Text 44"/>
           <p:cNvSpPr txBox="1"/>
           <p:nvPr/>
         </p:nvSpPr>

--- a/hackathon-submission/Student_Setu_HSC.pptx
+++ b/hackathon-submission/Student_Setu_HSC.pptx
@@ -113,37 +113,37 @@
   <p:extLst>
     <p:ext uri="{521415D9-36F7-43E2-AB2F-B90AF26B5E84}">
       <p14:sectionLst xmlns:p14="http://schemas.microsoft.com/office/powerpoint/2010/main">
-        <p14:section name="Cover" id="{2f6e8c1a-bbfa-b101-4a1f-7b6d31e7ce33}">
+        <p14:section name="Cover" id="{f2fc1904-8771-79f2-d609-87402edeee93}">
           <p14:sldIdLst>
             <p14:sldId id="256"/>
           </p14:sldIdLst>
         </p14:section>
-        <p14:section name="Problem &amp; solution" id="{3c6bc832-607b-073a-a5f4-9d4cbb3e57b3}">
+        <p14:section name="Problem &amp; solution" id="{bac474fe-3d89-01a4-6330-4876ee6edb78}">
           <p14:sldIdLst>
             <p14:sldId id="257"/>
           </p14:sldIdLst>
         </p14:section>
-        <p14:section name="Technical approach" id="{9438f138-0a30-235c-42a7-b325888594f2}">
+        <p14:section name="Technical approach" id="{eeb29cd7-2c3f-5640-c233-0828d190007c}">
           <p14:sldIdLst>
             <p14:sldId id="258"/>
           </p14:sldIdLst>
         </p14:section>
-        <p14:section name="Impact" id="{aa91840a-4249-9539-9cab-be202e8cbe98}">
+        <p14:section name="Impact" id="{8489721f-437f-17d2-af00-bf40105784ce}">
           <p14:sldIdLst>
             <p14:sldId id="259"/>
           </p14:sldIdLst>
         </p14:section>
-        <p14:section name="Feasibility &amp; risk" id="{6a396ac8-960b-936f-10ca-38b0e20a7ede}">
+        <p14:section name="Feasibility &amp; risk" id="{302b8f55-b4a8-8f37-7655-679c42871575}">
           <p14:sldIdLst>
             <p14:sldId id="260"/>
           </p14:sldIdLst>
         </p14:section>
-        <p14:section name="Team" id="{00374367-d867-02b7-5b8c-a8c8bed7d469}">
+        <p14:section name="Team" id="{484b80c4-c015-defb-be0d-cd5cdc06b338}">
           <p14:sldIdLst>
             <p14:sldId id="261"/>
           </p14:sldIdLst>
         </p14:section>
-        <p14:section name="References" id="{328728f5-77d3-9614-9cb0-346d771baa39}">
+        <p14:section name="References" id="{1313c50b-4f06-7b19-c1d7-c560004d349d}">
           <p14:sldIdLst>
             <p14:sldId id="262"/>
           </p14:sldIdLst>
@@ -992,7 +992,7 @@
           <a:p>
             <a:r>
               <a:rPr lang="en-US" dirty="0"/>
-              <a:t>Replace member names and adjust roles. Challenges show the hard problems we solved. Journey: we started as a student-life app and pivoted to learning-first after re-reading the problem statement.</a:t>
+              <a:t>Team YuvaNex: Divyansh Dubey (Team Lead), Khushi Dubey (Frontend), Prakhar Porwal (AI &amp; Backend). Challenges show the hard problems we solved. Journey: we started as a student-life app and pivoted to learning-first after re-reading the problem statement.</a:t>
             </a:r>
             <a:endParaRPr lang="en-US" dirty="0"/>
           </a:p>
@@ -1204,47 +1204,8 @@
         <p:nvSpPr>
           <p:cNvPr id="3" name="Text 0"/>
           <p:cNvSpPr/>
-          <p:nvPr/>
-        </p:nvSpPr>
-        <p:spPr>
-          <a:xfrm>
-            <a:off x="4270248" y="6473952"/>
-            <a:ext cx="3657600" cy="274320"/>
-          </a:xfrm>
-          <a:prstGeom prst="rect">
-            <a:avLst/>
-          </a:prstGeom>
-          <a:noFill/>
-          <a:ln/>
-        </p:spPr>
-        <p:txBody>
-          <a:bodyPr wrap="square" lIns="0" tIns="0" rIns="0" bIns="0" rtlCol="0" anchor="ctr"/>
-          <a:lstStyle/>
-          <a:p>
-            <a:pPr algn="ctr" indent="0" marL="0">
-              <a:buNone/>
-            </a:pPr>
-            <a:r>
-              <a:rPr lang="en-US" sz="1100" dirty="0">
-                <a:solidFill>
-                  <a:srgbClr val="1F3864"/>
-                </a:solidFill>
-                <a:latin typeface="Calibri" pitchFamily="34" charset="0"/>
-                <a:ea typeface="Calibri" pitchFamily="34" charset="-122"/>
-                <a:cs typeface="Calibri" pitchFamily="34" charset="-120"/>
-              </a:rPr>
-              <a:t>@HSC submission</a:t>
-            </a:r>
-            <a:endParaRPr lang="en-US" sz="1100" dirty="0"/>
-          </a:p>
-        </p:txBody>
-      </p:sp>
-      <p:sp>
-        <p:nvSpPr>
-          <p:cNvPr id="4" name="Text 1"/>
-          <p:cNvSpPr/>
           <p:nvPr>
-            <p:ph idx="102" type="title" hasCustomPrompt="1"/>
+            <p:ph idx="101" type="title" hasCustomPrompt="1"/>
           </p:nvPr>
         </p:nvSpPr>
         <p:spPr>
@@ -2669,13 +2630,13 @@
             <a:r>
               <a:rPr lang="en-US" sz="1700" b="1" dirty="0">
                 <a:solidFill>
-                  <a:srgbClr val="F97316"/>
-                </a:solidFill>
-                <a:latin typeface="Calibri" pitchFamily="34" charset="0"/>
-                <a:ea typeface="Calibri" pitchFamily="34" charset="-122"/>
-                <a:cs typeface="Calibri" pitchFamily="34" charset="-120"/>
-              </a:rPr>
-              <a:t>‹Team Name›</a:t>
+                  <a:srgbClr val="1F2A6E"/>
+                </a:solidFill>
+                <a:latin typeface="Calibri" pitchFamily="34" charset="0"/>
+                <a:ea typeface="Calibri" pitchFamily="34" charset="-122"/>
+                <a:cs typeface="Calibri" pitchFamily="34" charset="-120"/>
+              </a:rPr>
+              <a:t>YuvaNex</a:t>
             </a:r>
             <a:endParaRPr lang="en-US" sz="1400" dirty="0"/>
           </a:p>
@@ -2796,13 +2757,13 @@
             <a:r>
               <a:rPr lang="en-US" sz="1700" b="1" dirty="0">
                 <a:solidFill>
-                  <a:srgbClr val="F97316"/>
-                </a:solidFill>
-                <a:latin typeface="Calibri" pitchFamily="34" charset="0"/>
-                <a:ea typeface="Calibri" pitchFamily="34" charset="-122"/>
-                <a:cs typeface="Calibri" pitchFamily="34" charset="-120"/>
-              </a:rPr>
-              <a:t>‹Team ID›</a:t>
+                  <a:srgbClr val="1F2A6E"/>
+                </a:solidFill>
+                <a:latin typeface="Calibri" pitchFamily="34" charset="0"/>
+                <a:ea typeface="Calibri" pitchFamily="34" charset="-122"/>
+                <a:cs typeface="Calibri" pitchFamily="34" charset="-120"/>
+              </a:rPr>
+              <a:t>HSC|MP|00172</a:t>
             </a:r>
             <a:endParaRPr lang="en-US" sz="1400" dirty="0"/>
           </a:p>
@@ -2923,13 +2884,13 @@
             <a:r>
               <a:rPr lang="en-US" sz="1700" b="1" dirty="0">
                 <a:solidFill>
-                  <a:srgbClr val="F97316"/>
-                </a:solidFill>
-                <a:latin typeface="Calibri" pitchFamily="34" charset="0"/>
-                <a:ea typeface="Calibri" pitchFamily="34" charset="-122"/>
-                <a:cs typeface="Calibri" pitchFamily="34" charset="-120"/>
-              </a:rPr>
-              <a:t>‹State / UT›</a:t>
+                  <a:srgbClr val="1F2A6E"/>
+                </a:solidFill>
+                <a:latin typeface="Calibri" pitchFamily="34" charset="0"/>
+                <a:ea typeface="Calibri" pitchFamily="34" charset="-122"/>
+                <a:cs typeface="Calibri" pitchFamily="34" charset="-120"/>
+              </a:rPr>
+              <a:t>Madhya Pradesh</a:t>
             </a:r>
             <a:endParaRPr lang="en-US" sz="1400" dirty="0"/>
           </a:p>
@@ -3027,45 +2988,6 @@
                 <a:cs typeface="Calibri" pitchFamily="34" charset="-120"/>
               </a:rPr>
               <a:t>Scan for live demo</a:t>
-            </a:r>
-            <a:endParaRPr lang="en-US" sz="1100" dirty="0"/>
-          </a:p>
-        </p:txBody>
-      </p:sp>
-      <p:sp>
-        <p:nvSpPr>
-          <p:cNvPr id="41" name="Text 30"/>
-          <p:cNvSpPr txBox="1"/>
-          <p:nvPr/>
-        </p:nvSpPr>
-        <p:spPr>
-          <a:xfrm>
-            <a:off x="6583680" y="6473952"/>
-            <a:ext cx="3657600" cy="274320"/>
-          </a:xfrm>
-          <a:prstGeom prst="rect">
-            <a:avLst/>
-          </a:prstGeom>
-          <a:noFill/>
-          <a:ln/>
-        </p:spPr>
-        <p:txBody>
-          <a:bodyPr wrap="square" lIns="0" tIns="0" rIns="0" bIns="0" rtlCol="0" anchor="t"/>
-          <a:lstStyle/>
-          <a:p>
-            <a:pPr algn="ctr" indent="0" marL="0">
-              <a:buNone/>
-            </a:pPr>
-            <a:r>
-              <a:rPr lang="en-US" sz="1100" dirty="0">
-                <a:solidFill>
-                  <a:srgbClr val="1F3864"/>
-                </a:solidFill>
-                <a:latin typeface="Calibri" pitchFamily="34" charset="0"/>
-                <a:ea typeface="Calibri" pitchFamily="34" charset="-122"/>
-                <a:cs typeface="Calibri" pitchFamily="34" charset="-120"/>
-              </a:rPr>
-              <a:t>@HSC submission</a:t>
             </a:r>
             <a:endParaRPr lang="en-US" sz="1100" dirty="0"/>
           </a:p>
@@ -3098,10 +3020,10 @@
       </p:grpSpPr>
       <p:sp>
         <p:nvSpPr>
-          <p:cNvPr id="2" name="Text 1"/>
+          <p:cNvPr id="2" name="Text 0"/>
           <p:cNvSpPr/>
           <p:nvPr>
-            <p:ph idx="102" type="title" hasCustomPrompt="1"/>
+            <p:ph idx="101" type="title" hasCustomPrompt="1"/>
           </p:nvPr>
         </p:nvSpPr>
         <p:spPr>
@@ -3202,7 +3124,7 @@
                 <a:ea typeface="Calibri" pitchFamily="34" charset="-122"/>
                 <a:cs typeface="Calibri" pitchFamily="34" charset="-120"/>
               </a:rPr>
-              <a:t>‹Team Name›</a:t>
+              <a:t>YuvaNex</a:t>
             </a:r>
             <a:endParaRPr lang="en-US" sz="1300" dirty="0"/>
           </a:p>
@@ -5576,10 +5498,10 @@
       </p:grpSpPr>
       <p:sp>
         <p:nvSpPr>
-          <p:cNvPr id="2" name="Text 1"/>
+          <p:cNvPr id="2" name="Text 0"/>
           <p:cNvSpPr/>
           <p:nvPr>
-            <p:ph idx="102" type="title" hasCustomPrompt="1"/>
+            <p:ph idx="101" type="title" hasCustomPrompt="1"/>
           </p:nvPr>
         </p:nvSpPr>
         <p:spPr>
@@ -5680,7 +5602,7 @@
                 <a:ea typeface="Calibri" pitchFamily="34" charset="-122"/>
                 <a:cs typeface="Calibri" pitchFamily="34" charset="-120"/>
               </a:rPr>
-              <a:t>‹Team Name›</a:t>
+              <a:t>YuvaNex</a:t>
             </a:r>
             <a:endParaRPr lang="en-US" sz="1300" dirty="0"/>
           </a:p>
@@ -8156,7 +8078,9 @@
       </p:sp>
       <p:sp>
         <p:nvSpPr>
-          <p:cNvPr id="81" name="Text 67"/>
+          <p:cNvPr id="81" name="Text 67">
+            <a:hlinkClick r:id="rId15" tooltip=""/>
+          </p:cNvPr>
           <p:cNvSpPr txBox="1"/>
           <p:nvPr/>
         </p:nvSpPr>
@@ -8179,15 +8103,22 @@
               <a:buNone/>
             </a:pPr>
             <a:r>
-              <a:rPr lang="en-US" sz="950" b="1" dirty="0">
-                <a:solidFill>
-                  <a:srgbClr val="F97316"/>
-                </a:solidFill>
-                <a:latin typeface="Calibri" pitchFamily="34" charset="0"/>
-                <a:ea typeface="Calibri" pitchFamily="34" charset="-122"/>
-                <a:cs typeface="Calibri" pitchFamily="34" charset="-120"/>
-              </a:rPr>
-              <a:t>‹Add demo video link›</a:t>
+              <a:rPr lang="en-US" sz="950" u="sng" dirty="0">
+                <a:solidFill>
+                  <a:srgbClr val="4F46E5"/>
+                </a:solidFill>
+                <a:latin typeface="Calibri" pitchFamily="34" charset="0"/>
+                <a:ea typeface="Calibri" pitchFamily="34" charset="-122"/>
+                <a:cs typeface="Calibri" pitchFamily="34" charset="-120"/>
+                <a:hlinkClick r:id="rId15" invalidUrl="" action="" tgtFrame="" tooltip="" history="1" highlightClick="0" endSnd="0">
+                  <a:extLst>
+                    <a:ext uri="{A12FA001-AC4F-418D-AE19-62706E023703}">
+                      <ahyp:hlinkClr xmlns:ahyp="http://schemas.microsoft.com/office/drawing/2018/hyperlinkcolor" val="tx"/>
+                    </a:ext>
+                  </a:extLst>
+                </a:hlinkClick>
+              </a:rPr>
+              <a:t>Watch the 3:45 demo ▶</a:t>
             </a:r>
             <a:endParaRPr lang="en-US" sz="950" dirty="0"/>
           </a:p>
@@ -8254,7 +8185,7 @@
           <p:nvPr/>
         </p:nvPicPr>
         <p:blipFill>
-          <a:blip r:embed="rId15"/>
+          <a:blip r:embed="rId16"/>
           <a:stretch>
             <a:fillRect/>
           </a:stretch>
@@ -8529,10 +8460,10 @@
       </p:grpSpPr>
       <p:sp>
         <p:nvSpPr>
-          <p:cNvPr id="2" name="Text 1"/>
+          <p:cNvPr id="2" name="Text 0"/>
           <p:cNvSpPr/>
           <p:nvPr>
-            <p:ph idx="102" type="title" hasCustomPrompt="1"/>
+            <p:ph idx="101" type="title" hasCustomPrompt="1"/>
           </p:nvPr>
         </p:nvSpPr>
         <p:spPr>
@@ -8633,7 +8564,7 @@
                 <a:ea typeface="Calibri" pitchFamily="34" charset="-122"/>
                 <a:cs typeface="Calibri" pitchFamily="34" charset="-120"/>
               </a:rPr>
-              <a:t>‹Team Name›</a:t>
+              <a:t>YuvaNex</a:t>
             </a:r>
             <a:endParaRPr lang="en-US" sz="1300" dirty="0"/>
           </a:p>
@@ -11211,10 +11142,10 @@
       </p:grpSpPr>
       <p:sp>
         <p:nvSpPr>
-          <p:cNvPr id="2" name="Text 1"/>
+          <p:cNvPr id="2" name="Text 0"/>
           <p:cNvSpPr/>
           <p:nvPr>
-            <p:ph idx="102" type="title" hasCustomPrompt="1"/>
+            <p:ph idx="101" type="title" hasCustomPrompt="1"/>
           </p:nvPr>
         </p:nvSpPr>
         <p:spPr>
@@ -11315,7 +11246,7 @@
                 <a:ea typeface="Calibri" pitchFamily="34" charset="-122"/>
                 <a:cs typeface="Calibri" pitchFamily="34" charset="-120"/>
               </a:rPr>
-              <a:t>‹Team Name›</a:t>
+              <a:t>YuvaNex</a:t>
             </a:r>
             <a:endParaRPr lang="en-US" sz="1300" dirty="0"/>
           </a:p>
@@ -14071,10 +14002,10 @@
       </p:grpSpPr>
       <p:sp>
         <p:nvSpPr>
-          <p:cNvPr id="2" name="Text 1"/>
+          <p:cNvPr id="2" name="Text 0"/>
           <p:cNvSpPr/>
           <p:nvPr>
-            <p:ph idx="102" type="title" hasCustomPrompt="1"/>
+            <p:ph idx="101" type="title" hasCustomPrompt="1"/>
           </p:nvPr>
         </p:nvSpPr>
         <p:spPr>
@@ -14175,7 +14106,7 @@
                 <a:ea typeface="Calibri" pitchFamily="34" charset="-122"/>
                 <a:cs typeface="Calibri" pitchFamily="34" charset="-120"/>
               </a:rPr>
-              <a:t>‹Team Name›</a:t>
+              <a:t>YuvaNex</a:t>
             </a:r>
             <a:endParaRPr lang="en-US" sz="1300" dirty="0"/>
           </a:p>
@@ -14229,11 +14160,11 @@
         <p:spPr>
           <a:xfrm>
             <a:off x="457200" y="1389888"/>
-            <a:ext cx="2697480" cy="1069848"/>
+            <a:ext cx="5486400" cy="694944"/>
           </a:xfrm>
           <a:prstGeom prst="roundRect">
             <a:avLst>
-              <a:gd name="adj" fmla="val 10256"/>
+              <a:gd name="adj" fmla="val 15789"/>
             </a:avLst>
           </a:prstGeom>
           <a:solidFill>
@@ -14262,8 +14193,8 @@
         </p:nvSpPr>
         <p:spPr>
           <a:xfrm>
-            <a:off x="585216" y="1527048"/>
-            <a:ext cx="530352" cy="530352"/>
+            <a:off x="585216" y="1508760"/>
+            <a:ext cx="457200" cy="457200"/>
           </a:xfrm>
           <a:prstGeom prst="ellipse">
             <a:avLst/>
@@ -14295,8 +14226,8 @@
         </p:blipFill>
         <p:spPr>
           <a:xfrm>
-            <a:off x="712500" y="1654332"/>
-            <a:ext cx="275783" cy="275783"/>
+            <a:off x="694944" y="1618488"/>
+            <a:ext cx="237744" cy="237744"/>
           </a:xfrm>
           <a:prstGeom prst="rect">
             <a:avLst/>
@@ -14311,129 +14242,156 @@
         </p:nvSpPr>
         <p:spPr>
           <a:xfrm>
-            <a:off x="1234440" y="1499616"/>
-            <a:ext cx="1828800" cy="274320"/>
-          </a:xfrm>
-          <a:prstGeom prst="rect">
-            <a:avLst/>
-          </a:prstGeom>
-          <a:noFill/>
-          <a:ln/>
-        </p:spPr>
-        <p:txBody>
-          <a:bodyPr wrap="square" lIns="0" tIns="0" rIns="0" bIns="0" rtlCol="0" anchor="t"/>
+            <a:off x="1207008" y="1453896"/>
+            <a:ext cx="2286000" cy="292608"/>
+          </a:xfrm>
+          <a:prstGeom prst="rect">
+            <a:avLst/>
+          </a:prstGeom>
+          <a:noFill/>
+          <a:ln/>
+        </p:spPr>
+        <p:txBody>
+          <a:bodyPr wrap="square" lIns="0" tIns="0" rIns="0" bIns="0" rtlCol="0" anchor="ctr"/>
           <a:lstStyle/>
           <a:p>
             <a:pPr indent="0" marL="0">
               <a:buNone/>
             </a:pPr>
             <a:r>
-              <a:rPr lang="en-US" sz="1300" b="1" dirty="0">
-                <a:solidFill>
-                  <a:srgbClr val="F97316"/>
-                </a:solidFill>
-                <a:latin typeface="Calibri" pitchFamily="34" charset="0"/>
-                <a:ea typeface="Calibri" pitchFamily="34" charset="-122"/>
-                <a:cs typeface="Calibri" pitchFamily="34" charset="-120"/>
-              </a:rPr>
-              <a:t>‹Member 1›</a:t>
-            </a:r>
-            <a:endParaRPr lang="en-US" sz="1300" dirty="0"/>
-          </a:p>
-        </p:txBody>
-      </p:sp>
-      <p:sp>
-        <p:nvSpPr>
-          <p:cNvPr id="10" name="Text 7"/>
-          <p:cNvSpPr txBox="1"/>
-          <p:nvPr/>
-        </p:nvSpPr>
-        <p:spPr>
-          <a:xfrm>
-            <a:off x="1234440" y="1773936"/>
-            <a:ext cx="1828800" cy="256032"/>
-          </a:xfrm>
-          <a:prstGeom prst="rect">
-            <a:avLst/>
-          </a:prstGeom>
-          <a:noFill/>
-          <a:ln/>
-        </p:spPr>
-        <p:txBody>
-          <a:bodyPr wrap="square" lIns="0" tIns="0" rIns="0" bIns="0" rtlCol="0" anchor="t"/>
-          <a:lstStyle/>
-          <a:p>
-            <a:pPr indent="0" marL="0">
-              <a:buNone/>
-            </a:pPr>
-            <a:r>
-              <a:rPr lang="en-US" sz="1100" b="1" dirty="0">
-                <a:solidFill>
-                  <a:srgbClr val="1F2A6E"/>
-                </a:solidFill>
-                <a:latin typeface="Calibri" pitchFamily="34" charset="0"/>
-                <a:ea typeface="Calibri" pitchFamily="34" charset="-122"/>
-                <a:cs typeface="Calibri" pitchFamily="34" charset="-120"/>
-              </a:rPr>
-              <a:t>Team Lead · Full-stack</a:t>
-            </a:r>
-            <a:endParaRPr lang="en-US" sz="1100" dirty="0"/>
-          </a:p>
-        </p:txBody>
-      </p:sp>
-      <p:sp>
-        <p:nvSpPr>
-          <p:cNvPr id="11" name="Text 8"/>
-          <p:cNvSpPr txBox="1"/>
-          <p:nvPr/>
-        </p:nvSpPr>
-        <p:spPr>
-          <a:xfrm>
-            <a:off x="585216" y="2103120"/>
-            <a:ext cx="2487168" cy="310896"/>
-          </a:xfrm>
-          <a:prstGeom prst="rect">
-            <a:avLst/>
-          </a:prstGeom>
-          <a:noFill/>
-          <a:ln/>
-        </p:spPr>
-        <p:txBody>
-          <a:bodyPr wrap="square" lIns="0" tIns="0" rIns="0" bIns="0" rtlCol="0" anchor="t"/>
-          <a:lstStyle/>
-          <a:p>
-            <a:pPr indent="0" marL="0">
-              <a:buNone/>
-            </a:pPr>
-            <a:r>
-              <a:rPr lang="en-US" sz="1000" dirty="0">
-                <a:solidFill>
-                  <a:srgbClr val="64748B"/>
-                </a:solidFill>
-                <a:latin typeface="Calibri" pitchFamily="34" charset="0"/>
-                <a:ea typeface="Calibri" pitchFamily="34" charset="-122"/>
-                <a:cs typeface="Calibri" pitchFamily="34" charset="-120"/>
-              </a:rPr>
-              <a:t>Architecture, serverless functions, deployment</a:t>
-            </a:r>
-            <a:endParaRPr lang="en-US" sz="1000" dirty="0"/>
-          </a:p>
-        </p:txBody>
-      </p:sp>
-      <p:sp>
-        <p:nvSpPr>
-          <p:cNvPr id="12" name="member card"/>
+              <a:rPr lang="en-US" sz="1400" b="1" dirty="0">
+                <a:solidFill>
+                  <a:srgbClr val="0F172A"/>
+                </a:solidFill>
+                <a:latin typeface="Calibri" pitchFamily="34" charset="0"/>
+                <a:ea typeface="Calibri" pitchFamily="34" charset="-122"/>
+                <a:cs typeface="Calibri" pitchFamily="34" charset="-120"/>
+              </a:rPr>
+              <a:t>Divyansh Dubey</a:t>
+            </a:r>
+            <a:endParaRPr lang="en-US" sz="1400" dirty="0"/>
+          </a:p>
+        </p:txBody>
+      </p:sp>
+      <p:sp>
+        <p:nvSpPr>
+          <p:cNvPr id="10" name="role tag"/>
           <p:cNvSpPr/>
           <p:nvPr/>
         </p:nvSpPr>
         <p:spPr>
           <a:xfrm>
-            <a:off x="3273552" y="1389888"/>
-            <a:ext cx="2697480" cy="1069848"/>
+            <a:off x="3611880" y="1481328"/>
+            <a:ext cx="2194560" cy="237744"/>
           </a:xfrm>
           <a:prstGeom prst="roundRect">
             <a:avLst>
-              <a:gd name="adj" fmla="val 10256"/>
+              <a:gd name="adj" fmla="val 50000"/>
+            </a:avLst>
+          </a:prstGeom>
+          <a:solidFill>
+            <a:srgbClr val="1F2A6E"/>
+          </a:solidFill>
+          <a:ln w="12700">
+            <a:solidFill>
+              <a:srgbClr val="1F2A6E"/>
+            </a:solidFill>
+            <a:prstDash val="solid"/>
+          </a:ln>
+        </p:spPr>
+      </p:sp>
+      <p:sp>
+        <p:nvSpPr>
+          <p:cNvPr id="11" name="Text 8"/>
+          <p:cNvSpPr txBox="1"/>
+          <p:nvPr/>
+        </p:nvSpPr>
+        <p:spPr>
+          <a:xfrm>
+            <a:off x="3611880" y="1481328"/>
+            <a:ext cx="2194560" cy="237744"/>
+          </a:xfrm>
+          <a:prstGeom prst="rect">
+            <a:avLst/>
+          </a:prstGeom>
+          <a:noFill/>
+          <a:ln/>
+        </p:spPr>
+        <p:txBody>
+          <a:bodyPr wrap="square" lIns="0" tIns="0" rIns="0" bIns="0" rtlCol="0" anchor="ctr"/>
+          <a:lstStyle/>
+          <a:p>
+            <a:pPr algn="ctr" indent="0" marL="0">
+              <a:buNone/>
+            </a:pPr>
+            <a:r>
+              <a:rPr lang="en-US" sz="1000" b="1" dirty="0">
+                <a:solidFill>
+                  <a:srgbClr val="FFFFFF"/>
+                </a:solidFill>
+                <a:latin typeface="Calibri" pitchFamily="34" charset="0"/>
+                <a:ea typeface="Calibri" pitchFamily="34" charset="-122"/>
+                <a:cs typeface="Calibri" pitchFamily="34" charset="-120"/>
+              </a:rPr>
+              <a:t>Team Lead · Architecture</a:t>
+            </a:r>
+            <a:endParaRPr lang="en-US" sz="1000" dirty="0"/>
+          </a:p>
+        </p:txBody>
+      </p:sp>
+      <p:sp>
+        <p:nvSpPr>
+          <p:cNvPr id="12" name="Text 9"/>
+          <p:cNvSpPr txBox="1"/>
+          <p:nvPr/>
+        </p:nvSpPr>
+        <p:spPr>
+          <a:xfrm>
+            <a:off x="1207008" y="1764792"/>
+            <a:ext cx="4617720" cy="274320"/>
+          </a:xfrm>
+          <a:prstGeom prst="rect">
+            <a:avLst/>
+          </a:prstGeom>
+          <a:noFill/>
+          <a:ln/>
+        </p:spPr>
+        <p:txBody>
+          <a:bodyPr wrap="square" lIns="0" tIns="0" rIns="0" bIns="0" rtlCol="0" anchor="ctr"/>
+          <a:lstStyle/>
+          <a:p>
+            <a:pPr indent="0" marL="0">
+              <a:buNone/>
+            </a:pPr>
+            <a:r>
+              <a:rPr lang="en-US" sz="1050" dirty="0">
+                <a:solidFill>
+                  <a:srgbClr val="334155"/>
+                </a:solidFill>
+                <a:latin typeface="Calibri" pitchFamily="34" charset="0"/>
+                <a:ea typeface="Calibri" pitchFamily="34" charset="-122"/>
+                <a:cs typeface="Calibri" pitchFamily="34" charset="-120"/>
+              </a:rPr>
+              <a:t>Architecture, syllabus–skill mapping, testing, build idea &amp; core concepts</a:t>
+            </a:r>
+            <a:endParaRPr lang="en-US" sz="1050" dirty="0"/>
+          </a:p>
+        </p:txBody>
+      </p:sp>
+      <p:sp>
+        <p:nvSpPr>
+          <p:cNvPr id="13" name="member card"/>
+          <p:cNvSpPr/>
+          <p:nvPr/>
+        </p:nvSpPr>
+        <p:spPr>
+          <a:xfrm>
+            <a:off x="457200" y="2157984"/>
+            <a:ext cx="5486400" cy="694944"/>
+          </a:xfrm>
+          <a:prstGeom prst="roundRect">
+            <a:avLst>
+              <a:gd name="adj" fmla="val 15789"/>
             </a:avLst>
           </a:prstGeom>
           <a:solidFill>
@@ -14456,14 +14414,14 @@
       </p:sp>
       <p:sp>
         <p:nvSpPr>
-          <p:cNvPr id="13" name="Palette circle"/>
+          <p:cNvPr id="14" name="Palette circle"/>
           <p:cNvSpPr/>
           <p:nvPr/>
         </p:nvSpPr>
         <p:spPr>
           <a:xfrm>
-            <a:off x="3401568" y="1527048"/>
-            <a:ext cx="530352" cy="530352"/>
+            <a:off x="585216" y="2276856"/>
+            <a:ext cx="457200" cy="457200"/>
           </a:xfrm>
           <a:prstGeom prst="ellipse">
             <a:avLst/>
@@ -14481,7 +14439,7 @@
       </p:sp>
       <p:pic>
         <p:nvPicPr>
-          <p:cNvPr id="14" name="Palette icon" descr="Palette icon">    </p:cNvPr>
+          <p:cNvPr id="15" name="Palette icon" descr="Palette icon">    </p:cNvPr>
           <p:cNvPicPr>
             <a:picLocks noChangeAspect="1"/>
           </p:cNvPicPr>
@@ -14495,8 +14453,8 @@
         </p:blipFill>
         <p:spPr>
           <a:xfrm>
-            <a:off x="3528852" y="1654332"/>
-            <a:ext cx="275783" cy="275783"/>
+            <a:off x="694944" y="2386584"/>
+            <a:ext cx="237744" cy="237744"/>
           </a:xfrm>
           <a:prstGeom prst="rect">
             <a:avLst/>
@@ -14505,135 +14463,162 @@
       </p:pic>
       <p:sp>
         <p:nvSpPr>
-          <p:cNvPr id="15" name="Text 11"/>
-          <p:cNvSpPr txBox="1"/>
-          <p:nvPr/>
-        </p:nvSpPr>
-        <p:spPr>
-          <a:xfrm>
-            <a:off x="4050792" y="1499616"/>
-            <a:ext cx="1828800" cy="274320"/>
-          </a:xfrm>
-          <a:prstGeom prst="rect">
-            <a:avLst/>
-          </a:prstGeom>
-          <a:noFill/>
-          <a:ln/>
-        </p:spPr>
-        <p:txBody>
-          <a:bodyPr wrap="square" lIns="0" tIns="0" rIns="0" bIns="0" rtlCol="0" anchor="t"/>
+          <p:cNvPr id="16" name="Text 12"/>
+          <p:cNvSpPr txBox="1"/>
+          <p:nvPr/>
+        </p:nvSpPr>
+        <p:spPr>
+          <a:xfrm>
+            <a:off x="1207008" y="2221992"/>
+            <a:ext cx="2286000" cy="292608"/>
+          </a:xfrm>
+          <a:prstGeom prst="rect">
+            <a:avLst/>
+          </a:prstGeom>
+          <a:noFill/>
+          <a:ln/>
+        </p:spPr>
+        <p:txBody>
+          <a:bodyPr wrap="square" lIns="0" tIns="0" rIns="0" bIns="0" rtlCol="0" anchor="ctr"/>
           <a:lstStyle/>
           <a:p>
             <a:pPr indent="0" marL="0">
               <a:buNone/>
             </a:pPr>
             <a:r>
-              <a:rPr lang="en-US" sz="1300" b="1" dirty="0">
-                <a:solidFill>
-                  <a:srgbClr val="F97316"/>
-                </a:solidFill>
-                <a:latin typeface="Calibri" pitchFamily="34" charset="0"/>
-                <a:ea typeface="Calibri" pitchFamily="34" charset="-122"/>
-                <a:cs typeface="Calibri" pitchFamily="34" charset="-120"/>
-              </a:rPr>
-              <a:t>‹Member 2›</a:t>
-            </a:r>
-            <a:endParaRPr lang="en-US" sz="1300" dirty="0"/>
-          </a:p>
-        </p:txBody>
-      </p:sp>
-      <p:sp>
-        <p:nvSpPr>
-          <p:cNvPr id="16" name="Text 12"/>
-          <p:cNvSpPr txBox="1"/>
-          <p:nvPr/>
-        </p:nvSpPr>
-        <p:spPr>
-          <a:xfrm>
-            <a:off x="4050792" y="1773936"/>
-            <a:ext cx="1828800" cy="256032"/>
-          </a:xfrm>
-          <a:prstGeom prst="rect">
-            <a:avLst/>
-          </a:prstGeom>
-          <a:noFill/>
-          <a:ln/>
-        </p:spPr>
-        <p:txBody>
-          <a:bodyPr wrap="square" lIns="0" tIns="0" rIns="0" bIns="0" rtlCol="0" anchor="t"/>
-          <a:lstStyle/>
-          <a:p>
-            <a:pPr indent="0" marL="0">
-              <a:buNone/>
-            </a:pPr>
-            <a:r>
-              <a:rPr lang="en-US" sz="1100" b="1" dirty="0">
-                <a:solidFill>
-                  <a:srgbClr val="F97316"/>
-                </a:solidFill>
-                <a:latin typeface="Calibri" pitchFamily="34" charset="0"/>
-                <a:ea typeface="Calibri" pitchFamily="34" charset="-122"/>
-                <a:cs typeface="Calibri" pitchFamily="34" charset="-120"/>
-              </a:rPr>
-              <a:t>Frontend &amp; UI/UX</a:t>
-            </a:r>
-            <a:endParaRPr lang="en-US" sz="1100" dirty="0"/>
-          </a:p>
-        </p:txBody>
-      </p:sp>
-      <p:sp>
-        <p:nvSpPr>
-          <p:cNvPr id="17" name="Text 13"/>
-          <p:cNvSpPr txBox="1"/>
-          <p:nvPr/>
-        </p:nvSpPr>
-        <p:spPr>
-          <a:xfrm>
-            <a:off x="3401568" y="2103120"/>
-            <a:ext cx="2487168" cy="310896"/>
-          </a:xfrm>
-          <a:prstGeom prst="rect">
-            <a:avLst/>
-          </a:prstGeom>
-          <a:noFill/>
-          <a:ln/>
-        </p:spPr>
-        <p:txBody>
-          <a:bodyPr wrap="square" lIns="0" tIns="0" rIns="0" bIns="0" rtlCol="0" anchor="t"/>
-          <a:lstStyle/>
-          <a:p>
-            <a:pPr indent="0" marL="0">
-              <a:buNone/>
-            </a:pPr>
-            <a:r>
-              <a:rPr lang="en-US" sz="1000" dirty="0">
-                <a:solidFill>
-                  <a:srgbClr val="64748B"/>
-                </a:solidFill>
-                <a:latin typeface="Calibri" pitchFamily="34" charset="0"/>
-                <a:ea typeface="Calibri" pitchFamily="34" charset="-122"/>
-                <a:cs typeface="Calibri" pitchFamily="34" charset="-120"/>
-              </a:rPr>
-              <a:t>React screens, Hindi UI, Lite mode, accessibility</a:t>
-            </a:r>
-            <a:endParaRPr lang="en-US" sz="1000" dirty="0"/>
-          </a:p>
-        </p:txBody>
-      </p:sp>
-      <p:sp>
-        <p:nvSpPr>
-          <p:cNvPr id="18" name="member card"/>
+              <a:rPr lang="en-US" sz="1400" b="1" dirty="0">
+                <a:solidFill>
+                  <a:srgbClr val="0F172A"/>
+                </a:solidFill>
+                <a:latin typeface="Calibri" pitchFamily="34" charset="0"/>
+                <a:ea typeface="Calibri" pitchFamily="34" charset="-122"/>
+                <a:cs typeface="Calibri" pitchFamily="34" charset="-120"/>
+              </a:rPr>
+              <a:t>Khushi Dubey</a:t>
+            </a:r>
+            <a:endParaRPr lang="en-US" sz="1400" dirty="0"/>
+          </a:p>
+        </p:txBody>
+      </p:sp>
+      <p:sp>
+        <p:nvSpPr>
+          <p:cNvPr id="17" name="role tag"/>
           <p:cNvSpPr/>
           <p:nvPr/>
         </p:nvSpPr>
         <p:spPr>
           <a:xfrm>
-            <a:off x="457200" y="2578608"/>
-            <a:ext cx="2697480" cy="1069848"/>
+            <a:off x="3611880" y="2249424"/>
+            <a:ext cx="2194560" cy="237744"/>
           </a:xfrm>
           <a:prstGeom prst="roundRect">
             <a:avLst>
-              <a:gd name="adj" fmla="val 10256"/>
+              <a:gd name="adj" fmla="val 50000"/>
+            </a:avLst>
+          </a:prstGeom>
+          <a:solidFill>
+            <a:srgbClr val="F97316"/>
+          </a:solidFill>
+          <a:ln w="12700">
+            <a:solidFill>
+              <a:srgbClr val="F97316"/>
+            </a:solidFill>
+            <a:prstDash val="solid"/>
+          </a:ln>
+        </p:spPr>
+      </p:sp>
+      <p:sp>
+        <p:nvSpPr>
+          <p:cNvPr id="18" name="Text 14"/>
+          <p:cNvSpPr txBox="1"/>
+          <p:nvPr/>
+        </p:nvSpPr>
+        <p:spPr>
+          <a:xfrm>
+            <a:off x="3611880" y="2249424"/>
+            <a:ext cx="2194560" cy="237744"/>
+          </a:xfrm>
+          <a:prstGeom prst="rect">
+            <a:avLst/>
+          </a:prstGeom>
+          <a:noFill/>
+          <a:ln/>
+        </p:spPr>
+        <p:txBody>
+          <a:bodyPr wrap="square" lIns="0" tIns="0" rIns="0" bIns="0" rtlCol="0" anchor="ctr"/>
+          <a:lstStyle/>
+          <a:p>
+            <a:pPr algn="ctr" indent="0" marL="0">
+              <a:buNone/>
+            </a:pPr>
+            <a:r>
+              <a:rPr lang="en-US" sz="1000" b="1" dirty="0">
+                <a:solidFill>
+                  <a:srgbClr val="FFFFFF"/>
+                </a:solidFill>
+                <a:latin typeface="Calibri" pitchFamily="34" charset="0"/>
+                <a:ea typeface="Calibri" pitchFamily="34" charset="-122"/>
+                <a:cs typeface="Calibri" pitchFamily="34" charset="-120"/>
+              </a:rPr>
+              <a:t>Frontend &amp; UI/UX</a:t>
+            </a:r>
+            <a:endParaRPr lang="en-US" sz="1000" dirty="0"/>
+          </a:p>
+        </p:txBody>
+      </p:sp>
+      <p:sp>
+        <p:nvSpPr>
+          <p:cNvPr id="19" name="Text 15"/>
+          <p:cNvSpPr txBox="1"/>
+          <p:nvPr/>
+        </p:nvSpPr>
+        <p:spPr>
+          <a:xfrm>
+            <a:off x="1207008" y="2532888"/>
+            <a:ext cx="4617720" cy="274320"/>
+          </a:xfrm>
+          <a:prstGeom prst="rect">
+            <a:avLst/>
+          </a:prstGeom>
+          <a:noFill/>
+          <a:ln/>
+        </p:spPr>
+        <p:txBody>
+          <a:bodyPr wrap="square" lIns="0" tIns="0" rIns="0" bIns="0" rtlCol="0" anchor="ctr"/>
+          <a:lstStyle/>
+          <a:p>
+            <a:pPr indent="0" marL="0">
+              <a:buNone/>
+            </a:pPr>
+            <a:r>
+              <a:rPr lang="en-US" sz="1050" dirty="0">
+                <a:solidFill>
+                  <a:srgbClr val="334155"/>
+                </a:solidFill>
+                <a:latin typeface="Calibri" pitchFamily="34" charset="0"/>
+                <a:ea typeface="Calibri" pitchFamily="34" charset="-122"/>
+                <a:cs typeface="Calibri" pitchFamily="34" charset="-120"/>
+              </a:rPr>
+              <a:t>React screens, Hindi UI, Lite mode &amp; accessibility · presenter &amp; speaker</a:t>
+            </a:r>
+            <a:endParaRPr lang="en-US" sz="1050" dirty="0"/>
+          </a:p>
+        </p:txBody>
+      </p:sp>
+      <p:sp>
+        <p:nvSpPr>
+          <p:cNvPr id="20" name="member card"/>
+          <p:cNvSpPr/>
+          <p:nvPr/>
+        </p:nvSpPr>
+        <p:spPr>
+          <a:xfrm>
+            <a:off x="457200" y="2926080"/>
+            <a:ext cx="5486400" cy="694944"/>
+          </a:xfrm>
+          <a:prstGeom prst="roundRect">
+            <a:avLst>
+              <a:gd name="adj" fmla="val 15789"/>
             </a:avLst>
           </a:prstGeom>
           <a:solidFill>
@@ -14656,14 +14641,14 @@
       </p:sp>
       <p:sp>
         <p:nvSpPr>
-          <p:cNvPr id="19" name="Bot circle"/>
+          <p:cNvPr id="21" name="Bot circle"/>
           <p:cNvSpPr/>
           <p:nvPr/>
         </p:nvSpPr>
         <p:spPr>
           <a:xfrm>
-            <a:off x="585216" y="2715768"/>
-            <a:ext cx="530352" cy="530352"/>
+            <a:off x="585216" y="3044952"/>
+            <a:ext cx="457200" cy="457200"/>
           </a:xfrm>
           <a:prstGeom prst="ellipse">
             <a:avLst/>
@@ -14681,7 +14666,7 @@
       </p:sp>
       <p:pic>
         <p:nvPicPr>
-          <p:cNvPr id="20" name="Bot icon" descr="Bot icon">    </p:cNvPr>
+          <p:cNvPr id="22" name="Bot icon" descr="Bot icon">    </p:cNvPr>
           <p:cNvPicPr>
             <a:picLocks noChangeAspect="1"/>
           </p:cNvPicPr>
@@ -14695,8 +14680,8 @@
         </p:blipFill>
         <p:spPr>
           <a:xfrm>
-            <a:off x="712500" y="2843052"/>
-            <a:ext cx="275783" cy="275783"/>
+            <a:off x="694944" y="3154680"/>
+            <a:ext cx="237744" cy="237744"/>
           </a:xfrm>
           <a:prstGeom prst="rect">
             <a:avLst/>
@@ -14705,324 +14690,151 @@
       </p:pic>
       <p:sp>
         <p:nvSpPr>
-          <p:cNvPr id="21" name="Text 16"/>
-          <p:cNvSpPr txBox="1"/>
-          <p:nvPr/>
-        </p:nvSpPr>
-        <p:spPr>
-          <a:xfrm>
-            <a:off x="1234440" y="2688336"/>
-            <a:ext cx="1828800" cy="274320"/>
-          </a:xfrm>
-          <a:prstGeom prst="rect">
-            <a:avLst/>
-          </a:prstGeom>
-          <a:noFill/>
-          <a:ln/>
-        </p:spPr>
-        <p:txBody>
-          <a:bodyPr wrap="square" lIns="0" tIns="0" rIns="0" bIns="0" rtlCol="0" anchor="t"/>
+          <p:cNvPr id="23" name="Text 18"/>
+          <p:cNvSpPr txBox="1"/>
+          <p:nvPr/>
+        </p:nvSpPr>
+        <p:spPr>
+          <a:xfrm>
+            <a:off x="1207008" y="2990088"/>
+            <a:ext cx="2286000" cy="292608"/>
+          </a:xfrm>
+          <a:prstGeom prst="rect">
+            <a:avLst/>
+          </a:prstGeom>
+          <a:noFill/>
+          <a:ln/>
+        </p:spPr>
+        <p:txBody>
+          <a:bodyPr wrap="square" lIns="0" tIns="0" rIns="0" bIns="0" rtlCol="0" anchor="ctr"/>
           <a:lstStyle/>
           <a:p>
             <a:pPr indent="0" marL="0">
               <a:buNone/>
             </a:pPr>
             <a:r>
-              <a:rPr lang="en-US" sz="1300" b="1" dirty="0">
-                <a:solidFill>
-                  <a:srgbClr val="F97316"/>
-                </a:solidFill>
-                <a:latin typeface="Calibri" pitchFamily="34" charset="0"/>
-                <a:ea typeface="Calibri" pitchFamily="34" charset="-122"/>
-                <a:cs typeface="Calibri" pitchFamily="34" charset="-120"/>
-              </a:rPr>
-              <a:t>‹Member 3›</a:t>
-            </a:r>
-            <a:endParaRPr lang="en-US" sz="1300" dirty="0"/>
-          </a:p>
-        </p:txBody>
-      </p:sp>
-      <p:sp>
-        <p:nvSpPr>
-          <p:cNvPr id="22" name="Text 17"/>
-          <p:cNvSpPr txBox="1"/>
-          <p:nvPr/>
-        </p:nvSpPr>
-        <p:spPr>
-          <a:xfrm>
-            <a:off x="1234440" y="2962656"/>
-            <a:ext cx="1828800" cy="256032"/>
-          </a:xfrm>
-          <a:prstGeom prst="rect">
-            <a:avLst/>
-          </a:prstGeom>
-          <a:noFill/>
-          <a:ln/>
-        </p:spPr>
-        <p:txBody>
-          <a:bodyPr wrap="square" lIns="0" tIns="0" rIns="0" bIns="0" rtlCol="0" anchor="t"/>
-          <a:lstStyle/>
-          <a:p>
-            <a:pPr indent="0" marL="0">
-              <a:buNone/>
-            </a:pPr>
-            <a:r>
-              <a:rPr lang="en-US" sz="1100" b="1" dirty="0">
-                <a:solidFill>
-                  <a:srgbClr val="4F46E5"/>
-                </a:solidFill>
-                <a:latin typeface="Calibri" pitchFamily="34" charset="0"/>
-                <a:ea typeface="Calibri" pitchFamily="34" charset="-122"/>
-                <a:cs typeface="Calibri" pitchFamily="34" charset="-120"/>
-              </a:rPr>
-              <a:t>AI &amp; Backend</a:t>
-            </a:r>
-            <a:endParaRPr lang="en-US" sz="1100" dirty="0"/>
-          </a:p>
-        </p:txBody>
-      </p:sp>
-      <p:sp>
-        <p:nvSpPr>
-          <p:cNvPr id="23" name="Text 18"/>
-          <p:cNvSpPr txBox="1"/>
-          <p:nvPr/>
-        </p:nvSpPr>
-        <p:spPr>
-          <a:xfrm>
-            <a:off x="585216" y="3291840"/>
-            <a:ext cx="2487168" cy="310896"/>
-          </a:xfrm>
-          <a:prstGeom prst="rect">
-            <a:avLst/>
-          </a:prstGeom>
-          <a:noFill/>
-          <a:ln/>
-        </p:spPr>
-        <p:txBody>
-          <a:bodyPr wrap="square" lIns="0" tIns="0" rIns="0" bIns="0" rtlCol="0" anchor="t"/>
-          <a:lstStyle/>
-          <a:p>
-            <a:pPr indent="0" marL="0">
-              <a:buNone/>
-            </a:pPr>
-            <a:r>
-              <a:rPr lang="en-US" sz="1000" dirty="0">
-                <a:solidFill>
-                  <a:srgbClr val="64748B"/>
-                </a:solidFill>
-                <a:latin typeface="Calibri" pitchFamily="34" charset="0"/>
-                <a:ea typeface="Calibri" pitchFamily="34" charset="-122"/>
-                <a:cs typeface="Calibri" pitchFamily="34" charset="-120"/>
-              </a:rPr>
-              <a:t>Gemini prompts, quiz grading, signed badges</a:t>
-            </a:r>
-            <a:endParaRPr lang="en-US" sz="1000" dirty="0"/>
-          </a:p>
-        </p:txBody>
-      </p:sp>
-      <p:sp>
-        <p:nvSpPr>
-          <p:cNvPr id="24" name="member card"/>
+              <a:rPr lang="en-US" sz="1400" b="1" dirty="0">
+                <a:solidFill>
+                  <a:srgbClr val="0F172A"/>
+                </a:solidFill>
+                <a:latin typeface="Calibri" pitchFamily="34" charset="0"/>
+                <a:ea typeface="Calibri" pitchFamily="34" charset="-122"/>
+                <a:cs typeface="Calibri" pitchFamily="34" charset="-120"/>
+              </a:rPr>
+              <a:t>Prakhar Porwal</a:t>
+            </a:r>
+            <a:endParaRPr lang="en-US" sz="1400" dirty="0"/>
+          </a:p>
+        </p:txBody>
+      </p:sp>
+      <p:sp>
+        <p:nvSpPr>
+          <p:cNvPr id="24" name="role tag"/>
           <p:cNvSpPr/>
           <p:nvPr/>
         </p:nvSpPr>
         <p:spPr>
           <a:xfrm>
-            <a:off x="3273552" y="2578608"/>
-            <a:ext cx="2697480" cy="1069848"/>
+            <a:off x="3611880" y="3017520"/>
+            <a:ext cx="2194560" cy="237744"/>
           </a:xfrm>
           <a:prstGeom prst="roundRect">
             <a:avLst>
-              <a:gd name="adj" fmla="val 10256"/>
+              <a:gd name="adj" fmla="val 50000"/>
             </a:avLst>
           </a:prstGeom>
           <a:solidFill>
-            <a:srgbClr val="FFFFFF"/>
+            <a:srgbClr val="4F46E5"/>
           </a:solidFill>
-          <a:ln w="9525">
+          <a:ln w="12700">
             <a:solidFill>
-              <a:srgbClr val="E2E8F0"/>
+              <a:srgbClr val="4F46E5"/>
             </a:solidFill>
             <a:prstDash val="solid"/>
           </a:ln>
-          <a:effectLst>
-            <a:outerShdw sx="100000" sy="100000" kx="0" ky="0" algn="bl" rotWithShape="0" blurRad="127000" dist="25400" dir="5400000">
-              <a:srgbClr val="1F2A6E">
-                <a:alpha val="14000"/>
-              </a:srgbClr>
-            </a:outerShdw>
-          </a:effectLst>
-        </p:spPr>
-      </p:sp>
-      <p:sp>
-        <p:nvSpPr>
-          <p:cNvPr id="25" name="Search circle"/>
-          <p:cNvSpPr/>
-          <p:nvPr/>
-        </p:nvSpPr>
-        <p:spPr>
-          <a:xfrm>
-            <a:off x="3401568" y="2715768"/>
-            <a:ext cx="530352" cy="530352"/>
-          </a:xfrm>
-          <a:prstGeom prst="ellipse">
-            <a:avLst/>
-          </a:prstGeom>
-          <a:solidFill>
-            <a:srgbClr val="16A34A"/>
-          </a:solidFill>
-          <a:ln w="12700">
-            <a:solidFill>
-              <a:srgbClr val="16A34A"/>
-            </a:solidFill>
-            <a:prstDash val="solid"/>
-          </a:ln>
-        </p:spPr>
-      </p:sp>
-      <p:pic>
-        <p:nvPicPr>
-          <p:cNvPr id="26" name="Search icon" descr="Search icon">    </p:cNvPr>
-          <p:cNvPicPr>
-            <a:picLocks noChangeAspect="1"/>
-          </p:cNvPicPr>
-          <p:nvPr/>
-        </p:nvPicPr>
-        <p:blipFill>
-          <a:blip r:embed="rId4"/>
-          <a:stretch>
-            <a:fillRect/>
-          </a:stretch>
-        </p:blipFill>
-        <p:spPr>
-          <a:xfrm>
-            <a:off x="3528852" y="2843052"/>
-            <a:ext cx="275783" cy="275783"/>
-          </a:xfrm>
-          <a:prstGeom prst="rect">
-            <a:avLst/>
-          </a:prstGeom>
-        </p:spPr>
-      </p:pic>
-      <p:sp>
-        <p:nvSpPr>
-          <p:cNvPr id="27" name="Text 21"/>
-          <p:cNvSpPr txBox="1"/>
-          <p:nvPr/>
-        </p:nvSpPr>
-        <p:spPr>
-          <a:xfrm>
-            <a:off x="4050792" y="2688336"/>
-            <a:ext cx="1828800" cy="274320"/>
-          </a:xfrm>
-          <a:prstGeom prst="rect">
-            <a:avLst/>
-          </a:prstGeom>
-          <a:noFill/>
-          <a:ln/>
-        </p:spPr>
-        <p:txBody>
-          <a:bodyPr wrap="square" lIns="0" tIns="0" rIns="0" bIns="0" rtlCol="0" anchor="t"/>
+        </p:spPr>
+      </p:sp>
+      <p:sp>
+        <p:nvSpPr>
+          <p:cNvPr id="25" name="Text 20"/>
+          <p:cNvSpPr txBox="1"/>
+          <p:nvPr/>
+        </p:nvSpPr>
+        <p:spPr>
+          <a:xfrm>
+            <a:off x="3611880" y="3017520"/>
+            <a:ext cx="2194560" cy="237744"/>
+          </a:xfrm>
+          <a:prstGeom prst="rect">
+            <a:avLst/>
+          </a:prstGeom>
+          <a:noFill/>
+          <a:ln/>
+        </p:spPr>
+        <p:txBody>
+          <a:bodyPr wrap="square" lIns="0" tIns="0" rIns="0" bIns="0" rtlCol="0" anchor="ctr"/>
+          <a:lstStyle/>
+          <a:p>
+            <a:pPr algn="ctr" indent="0" marL="0">
+              <a:buNone/>
+            </a:pPr>
+            <a:r>
+              <a:rPr lang="en-US" sz="1000" b="1" dirty="0">
+                <a:solidFill>
+                  <a:srgbClr val="FFFFFF"/>
+                </a:solidFill>
+                <a:latin typeface="Calibri" pitchFamily="34" charset="0"/>
+                <a:ea typeface="Calibri" pitchFamily="34" charset="-122"/>
+                <a:cs typeface="Calibri" pitchFamily="34" charset="-120"/>
+              </a:rPr>
+              <a:t>AI &amp; Backend</a:t>
+            </a:r>
+            <a:endParaRPr lang="en-US" sz="1000" dirty="0"/>
+          </a:p>
+        </p:txBody>
+      </p:sp>
+      <p:sp>
+        <p:nvSpPr>
+          <p:cNvPr id="26" name="Text 21"/>
+          <p:cNvSpPr txBox="1"/>
+          <p:nvPr/>
+        </p:nvSpPr>
+        <p:spPr>
+          <a:xfrm>
+            <a:off x="1207008" y="3300984"/>
+            <a:ext cx="4617720" cy="274320"/>
+          </a:xfrm>
+          <a:prstGeom prst="rect">
+            <a:avLst/>
+          </a:prstGeom>
+          <a:noFill/>
+          <a:ln/>
+        </p:spPr>
+        <p:txBody>
+          <a:bodyPr wrap="square" lIns="0" tIns="0" rIns="0" bIns="0" rtlCol="0" anchor="ctr"/>
           <a:lstStyle/>
           <a:p>
             <a:pPr indent="0" marL="0">
               <a:buNone/>
             </a:pPr>
             <a:r>
-              <a:rPr lang="en-US" sz="1300" b="1" dirty="0">
-                <a:solidFill>
-                  <a:srgbClr val="F97316"/>
-                </a:solidFill>
-                <a:latin typeface="Calibri" pitchFamily="34" charset="0"/>
-                <a:ea typeface="Calibri" pitchFamily="34" charset="-122"/>
-                <a:cs typeface="Calibri" pitchFamily="34" charset="-120"/>
-              </a:rPr>
-              <a:t>‹Member 4›</a:t>
-            </a:r>
-            <a:endParaRPr lang="en-US" sz="1300" dirty="0"/>
-          </a:p>
-        </p:txBody>
-      </p:sp>
-      <p:sp>
-        <p:nvSpPr>
-          <p:cNvPr id="28" name="Text 22"/>
-          <p:cNvSpPr txBox="1"/>
-          <p:nvPr/>
-        </p:nvSpPr>
-        <p:spPr>
-          <a:xfrm>
-            <a:off x="4050792" y="2962656"/>
-            <a:ext cx="1828800" cy="256032"/>
-          </a:xfrm>
-          <a:prstGeom prst="rect">
-            <a:avLst/>
-          </a:prstGeom>
-          <a:noFill/>
-          <a:ln/>
-        </p:spPr>
-        <p:txBody>
-          <a:bodyPr wrap="square" lIns="0" tIns="0" rIns="0" bIns="0" rtlCol="0" anchor="t"/>
-          <a:lstStyle/>
-          <a:p>
-            <a:pPr indent="0" marL="0">
-              <a:buNone/>
-            </a:pPr>
-            <a:r>
-              <a:rPr lang="en-US" sz="1100" b="1" dirty="0">
-                <a:solidFill>
-                  <a:srgbClr val="16A34A"/>
-                </a:solidFill>
-                <a:latin typeface="Calibri" pitchFamily="34" charset="0"/>
-                <a:ea typeface="Calibri" pitchFamily="34" charset="-122"/>
-                <a:cs typeface="Calibri" pitchFamily="34" charset="-120"/>
-              </a:rPr>
-              <a:t>Research &amp; Content</a:t>
-            </a:r>
-            <a:endParaRPr lang="en-US" sz="1100" dirty="0"/>
-          </a:p>
-        </p:txBody>
-      </p:sp>
-      <p:sp>
-        <p:nvSpPr>
-          <p:cNvPr id="29" name="Text 23"/>
-          <p:cNvSpPr txBox="1"/>
-          <p:nvPr/>
-        </p:nvSpPr>
-        <p:spPr>
-          <a:xfrm>
-            <a:off x="3401568" y="3291840"/>
-            <a:ext cx="2487168" cy="310896"/>
-          </a:xfrm>
-          <a:prstGeom prst="rect">
-            <a:avLst/>
-          </a:prstGeom>
-          <a:noFill/>
-          <a:ln/>
-        </p:spPr>
-        <p:txBody>
-          <a:bodyPr wrap="square" lIns="0" tIns="0" rIns="0" bIns="0" rtlCol="0" anchor="t"/>
-          <a:lstStyle/>
-          <a:p>
-            <a:pPr indent="0" marL="0">
-              <a:buNone/>
-            </a:pPr>
-            <a:r>
-              <a:rPr lang="en-US" sz="1000" dirty="0">
-                <a:solidFill>
-                  <a:srgbClr val="64748B"/>
-                </a:solidFill>
-                <a:latin typeface="Calibri" pitchFamily="34" charset="0"/>
-                <a:ea typeface="Calibri" pitchFamily="34" charset="-122"/>
-                <a:cs typeface="Calibri" pitchFamily="34" charset="-120"/>
-              </a:rPr>
-              <a:t>Syllabus–skill mapping, vocational modules, testing</a:t>
-            </a:r>
-            <a:endParaRPr lang="en-US" sz="1000" dirty="0"/>
-          </a:p>
-        </p:txBody>
-      </p:sp>
-      <p:sp>
-        <p:nvSpPr>
-          <p:cNvPr id="30" name="Text 24"/>
+              <a:rPr lang="en-US" sz="1050" dirty="0">
+                <a:solidFill>
+                  <a:srgbClr val="334155"/>
+                </a:solidFill>
+                <a:latin typeface="Calibri" pitchFamily="34" charset="0"/>
+                <a:ea typeface="Calibri" pitchFamily="34" charset="-122"/>
+                <a:cs typeface="Calibri" pitchFamily="34" charset="-120"/>
+              </a:rPr>
+              <a:t>Gemini prompts, quiz grading &amp; signed badges</a:t>
+            </a:r>
+            <a:endParaRPr lang="en-US" sz="1050" dirty="0"/>
+          </a:p>
+        </p:txBody>
+      </p:sp>
+      <p:sp>
+        <p:nvSpPr>
+          <p:cNvPr id="27" name="Text 22"/>
           <p:cNvSpPr txBox="1"/>
           <p:nvPr/>
         </p:nvSpPr>
@@ -15061,7 +14873,7 @@
       </p:sp>
       <p:sp>
         <p:nvSpPr>
-          <p:cNvPr id="31" name="KeyRound circle"/>
+          <p:cNvPr id="28" name="KeyRound circle"/>
           <p:cNvSpPr/>
           <p:nvPr/>
         </p:nvSpPr>
@@ -15086,14 +14898,14 @@
       </p:sp>
       <p:pic>
         <p:nvPicPr>
-          <p:cNvPr id="32" name="KeyRound icon" descr="KeyRound icon">    </p:cNvPr>
+          <p:cNvPr id="29" name="KeyRound icon" descr="KeyRound icon">    </p:cNvPr>
           <p:cNvPicPr>
             <a:picLocks noChangeAspect="1"/>
           </p:cNvPicPr>
           <p:nvPr/>
         </p:nvPicPr>
         <p:blipFill>
-          <a:blip r:embed="rId5"/>
+          <a:blip r:embed="rId4"/>
           <a:stretch>
             <a:fillRect/>
           </a:stretch>
@@ -15110,7 +14922,7 @@
       </p:pic>
       <p:sp>
         <p:nvSpPr>
-          <p:cNvPr id="33" name="Text 26"/>
+          <p:cNvPr id="30" name="Text 24"/>
           <p:cNvSpPr txBox="1"/>
           <p:nvPr/>
         </p:nvSpPr>
@@ -15166,7 +14978,7 @@
       </p:sp>
       <p:sp>
         <p:nvSpPr>
-          <p:cNvPr id="34" name="Bot circle"/>
+          <p:cNvPr id="31" name="Bot circle"/>
           <p:cNvSpPr/>
           <p:nvPr/>
         </p:nvSpPr>
@@ -15191,14 +15003,14 @@
       </p:sp>
       <p:pic>
         <p:nvPicPr>
-          <p:cNvPr id="35" name="Bot icon" descr="Bot icon">    </p:cNvPr>
+          <p:cNvPr id="32" name="Bot icon" descr="Bot icon">    </p:cNvPr>
           <p:cNvPicPr>
             <a:picLocks noChangeAspect="1"/>
           </p:cNvPicPr>
           <p:nvPr/>
         </p:nvPicPr>
         <p:blipFill>
-          <a:blip r:embed="rId6"/>
+          <a:blip r:embed="rId5"/>
           <a:stretch>
             <a:fillRect/>
           </a:stretch>
@@ -15215,7 +15027,7 @@
       </p:pic>
       <p:sp>
         <p:nvSpPr>
-          <p:cNvPr id="36" name="Text 28"/>
+          <p:cNvPr id="33" name="Text 26"/>
           <p:cNvSpPr txBox="1"/>
           <p:nvPr/>
         </p:nvSpPr>
@@ -15271,7 +15083,7 @@
       </p:sp>
       <p:sp>
         <p:nvSpPr>
-          <p:cNvPr id="37" name="LifeBuoy circle"/>
+          <p:cNvPr id="34" name="LifeBuoy circle"/>
           <p:cNvSpPr/>
           <p:nvPr/>
         </p:nvSpPr>
@@ -15296,14 +15108,14 @@
       </p:sp>
       <p:pic>
         <p:nvPicPr>
-          <p:cNvPr id="38" name="LifeBuoy icon" descr="LifeBuoy icon">    </p:cNvPr>
+          <p:cNvPr id="35" name="LifeBuoy icon" descr="LifeBuoy icon">    </p:cNvPr>
           <p:cNvPicPr>
             <a:picLocks noChangeAspect="1"/>
           </p:cNvPicPr>
           <p:nvPr/>
         </p:nvPicPr>
         <p:blipFill>
-          <a:blip r:embed="rId7"/>
+          <a:blip r:embed="rId6"/>
           <a:stretch>
             <a:fillRect/>
           </a:stretch>
@@ -15320,7 +15132,7 @@
       </p:pic>
       <p:sp>
         <p:nvSpPr>
-          <p:cNvPr id="39" name="Text 30"/>
+          <p:cNvPr id="36" name="Text 28"/>
           <p:cNvSpPr txBox="1"/>
           <p:nvPr/>
         </p:nvSpPr>
@@ -15376,7 +15188,7 @@
       </p:sp>
       <p:sp>
         <p:nvSpPr>
-          <p:cNvPr id="40" name="Route circle"/>
+          <p:cNvPr id="37" name="Route circle"/>
           <p:cNvSpPr/>
           <p:nvPr/>
         </p:nvSpPr>
@@ -15401,14 +15213,14 @@
       </p:sp>
       <p:pic>
         <p:nvPicPr>
-          <p:cNvPr id="41" name="Route icon" descr="Route icon">    </p:cNvPr>
+          <p:cNvPr id="38" name="Route icon" descr="Route icon">    </p:cNvPr>
           <p:cNvPicPr>
             <a:picLocks noChangeAspect="1"/>
           </p:cNvPicPr>
           <p:nvPr/>
         </p:nvPicPr>
         <p:blipFill>
-          <a:blip r:embed="rId8"/>
+          <a:blip r:embed="rId7"/>
           <a:stretch>
             <a:fillRect/>
           </a:stretch>
@@ -15425,7 +15237,7 @@
       </p:pic>
       <p:sp>
         <p:nvSpPr>
-          <p:cNvPr id="42" name="Text 32"/>
+          <p:cNvPr id="39" name="Text 30"/>
           <p:cNvSpPr txBox="1"/>
           <p:nvPr/>
         </p:nvSpPr>
@@ -15481,7 +15293,7 @@
       </p:sp>
       <p:sp>
         <p:nvSpPr>
-          <p:cNvPr id="43" name="UserCheck circle"/>
+          <p:cNvPr id="40" name="UserCheck circle"/>
           <p:cNvSpPr/>
           <p:nvPr/>
         </p:nvSpPr>
@@ -15506,14 +15318,14 @@
       </p:sp>
       <p:pic>
         <p:nvPicPr>
-          <p:cNvPr id="44" name="UserCheck icon" descr="UserCheck icon">    </p:cNvPr>
+          <p:cNvPr id="41" name="UserCheck icon" descr="UserCheck icon">    </p:cNvPr>
           <p:cNvPicPr>
             <a:picLocks noChangeAspect="1"/>
           </p:cNvPicPr>
           <p:nvPr/>
         </p:nvPicPr>
         <p:blipFill>
-          <a:blip r:embed="rId9"/>
+          <a:blip r:embed="rId8"/>
           <a:stretch>
             <a:fillRect/>
           </a:stretch>
@@ -15530,7 +15342,7 @@
       </p:pic>
       <p:sp>
         <p:nvSpPr>
-          <p:cNvPr id="45" name="Text 34"/>
+          <p:cNvPr id="42" name="Text 32"/>
           <p:cNvSpPr txBox="1"/>
           <p:nvPr/>
         </p:nvSpPr>
@@ -15586,7 +15398,7 @@
       </p:sp>
       <p:sp>
         <p:nvSpPr>
-          <p:cNvPr id="46" name="Text 35"/>
+          <p:cNvPr id="43" name="Text 33"/>
           <p:cNvSpPr txBox="1"/>
           <p:nvPr/>
         </p:nvSpPr>
@@ -15625,7 +15437,7 @@
       </p:sp>
       <p:sp>
         <p:nvSpPr>
-          <p:cNvPr id="47" name="timeline"/>
+          <p:cNvPr id="44" name="timeline"/>
           <p:cNvSpPr/>
           <p:nvPr/>
         </p:nvSpPr>
@@ -15648,7 +15460,7 @@
       </p:sp>
       <p:sp>
         <p:nvSpPr>
-          <p:cNvPr id="48" name="milestone"/>
+          <p:cNvPr id="45" name="milestone"/>
           <p:cNvSpPr/>
           <p:nvPr/>
         </p:nvSpPr>
@@ -15673,7 +15485,7 @@
       </p:sp>
       <p:sp>
         <p:nvSpPr>
-          <p:cNvPr id="49" name="Text 38"/>
+          <p:cNvPr id="46" name="Text 36"/>
           <p:cNvSpPr txBox="1"/>
           <p:nvPr/>
         </p:nvSpPr>
@@ -15712,7 +15524,7 @@
       </p:sp>
       <p:sp>
         <p:nvSpPr>
-          <p:cNvPr id="50" name="journey card"/>
+          <p:cNvPr id="47" name="journey card"/>
           <p:cNvSpPr/>
           <p:nvPr/>
         </p:nvSpPr>
@@ -15739,7 +15551,7 @@
       </p:sp>
       <p:sp>
         <p:nvSpPr>
-          <p:cNvPr id="51" name="Text 40"/>
+          <p:cNvPr id="48" name="Text 38"/>
           <p:cNvSpPr txBox="1"/>
           <p:nvPr/>
         </p:nvSpPr>
@@ -15778,7 +15590,7 @@
       </p:sp>
       <p:sp>
         <p:nvSpPr>
-          <p:cNvPr id="52" name="Text 41"/>
+          <p:cNvPr id="49" name="Text 39"/>
           <p:cNvSpPr txBox="1"/>
           <p:nvPr/>
         </p:nvSpPr>
@@ -15817,7 +15629,7 @@
       </p:sp>
       <p:sp>
         <p:nvSpPr>
-          <p:cNvPr id="53" name="milestone"/>
+          <p:cNvPr id="50" name="milestone"/>
           <p:cNvSpPr/>
           <p:nvPr/>
         </p:nvSpPr>
@@ -15842,7 +15654,7 @@
       </p:sp>
       <p:sp>
         <p:nvSpPr>
-          <p:cNvPr id="54" name="Text 43"/>
+          <p:cNvPr id="51" name="Text 41"/>
           <p:cNvSpPr txBox="1"/>
           <p:nvPr/>
         </p:nvSpPr>
@@ -15881,7 +15693,7 @@
       </p:sp>
       <p:sp>
         <p:nvSpPr>
-          <p:cNvPr id="55" name="journey card"/>
+          <p:cNvPr id="52" name="journey card"/>
           <p:cNvSpPr/>
           <p:nvPr/>
         </p:nvSpPr>
@@ -15908,7 +15720,7 @@
       </p:sp>
       <p:sp>
         <p:nvSpPr>
-          <p:cNvPr id="56" name="Text 45"/>
+          <p:cNvPr id="53" name="Text 43"/>
           <p:cNvSpPr txBox="1"/>
           <p:nvPr/>
         </p:nvSpPr>
@@ -15947,7 +15759,7 @@
       </p:sp>
       <p:sp>
         <p:nvSpPr>
-          <p:cNvPr id="57" name="Text 46"/>
+          <p:cNvPr id="54" name="Text 44"/>
           <p:cNvSpPr txBox="1"/>
           <p:nvPr/>
         </p:nvSpPr>
@@ -15986,7 +15798,7 @@
       </p:sp>
       <p:sp>
         <p:nvSpPr>
-          <p:cNvPr id="58" name="milestone"/>
+          <p:cNvPr id="55" name="milestone"/>
           <p:cNvSpPr/>
           <p:nvPr/>
         </p:nvSpPr>
@@ -16011,7 +15823,7 @@
       </p:sp>
       <p:sp>
         <p:nvSpPr>
-          <p:cNvPr id="59" name="Text 48"/>
+          <p:cNvPr id="56" name="Text 46"/>
           <p:cNvSpPr txBox="1"/>
           <p:nvPr/>
         </p:nvSpPr>
@@ -16050,7 +15862,7 @@
       </p:sp>
       <p:sp>
         <p:nvSpPr>
-          <p:cNvPr id="60" name="journey card"/>
+          <p:cNvPr id="57" name="journey card"/>
           <p:cNvSpPr/>
           <p:nvPr/>
         </p:nvSpPr>
@@ -16077,7 +15889,7 @@
       </p:sp>
       <p:sp>
         <p:nvSpPr>
-          <p:cNvPr id="61" name="Text 50"/>
+          <p:cNvPr id="58" name="Text 48"/>
           <p:cNvSpPr txBox="1"/>
           <p:nvPr/>
         </p:nvSpPr>
@@ -16116,7 +15928,7 @@
       </p:sp>
       <p:sp>
         <p:nvSpPr>
-          <p:cNvPr id="62" name="Text 51"/>
+          <p:cNvPr id="59" name="Text 49"/>
           <p:cNvSpPr txBox="1"/>
           <p:nvPr/>
         </p:nvSpPr>
@@ -16155,7 +15967,7 @@
       </p:sp>
       <p:sp>
         <p:nvSpPr>
-          <p:cNvPr id="63" name="milestone"/>
+          <p:cNvPr id="60" name="milestone"/>
           <p:cNvSpPr/>
           <p:nvPr/>
         </p:nvSpPr>
@@ -16180,7 +15992,7 @@
       </p:sp>
       <p:sp>
         <p:nvSpPr>
-          <p:cNvPr id="64" name="Text 53"/>
+          <p:cNvPr id="61" name="Text 51"/>
           <p:cNvSpPr txBox="1"/>
           <p:nvPr/>
         </p:nvSpPr>
@@ -16219,7 +16031,7 @@
       </p:sp>
       <p:sp>
         <p:nvSpPr>
-          <p:cNvPr id="65" name="journey card"/>
+          <p:cNvPr id="62" name="journey card"/>
           <p:cNvSpPr/>
           <p:nvPr/>
         </p:nvSpPr>
@@ -16246,7 +16058,7 @@
       </p:sp>
       <p:sp>
         <p:nvSpPr>
-          <p:cNvPr id="66" name="Text 55"/>
+          <p:cNvPr id="63" name="Text 53"/>
           <p:cNvSpPr txBox="1"/>
           <p:nvPr/>
         </p:nvSpPr>
@@ -16285,7 +16097,7 @@
       </p:sp>
       <p:sp>
         <p:nvSpPr>
-          <p:cNvPr id="67" name="Text 56"/>
+          <p:cNvPr id="64" name="Text 54"/>
           <p:cNvSpPr txBox="1"/>
           <p:nvPr/>
         </p:nvSpPr>
@@ -16324,7 +16136,7 @@
       </p:sp>
       <p:sp>
         <p:nvSpPr>
-          <p:cNvPr id="68" name="milestone"/>
+          <p:cNvPr id="65" name="milestone"/>
           <p:cNvSpPr/>
           <p:nvPr/>
         </p:nvSpPr>
@@ -16349,7 +16161,7 @@
       </p:sp>
       <p:sp>
         <p:nvSpPr>
-          <p:cNvPr id="69" name="Text 58"/>
+          <p:cNvPr id="66" name="Text 56"/>
           <p:cNvSpPr txBox="1"/>
           <p:nvPr/>
         </p:nvSpPr>
@@ -16388,7 +16200,7 @@
       </p:sp>
       <p:sp>
         <p:nvSpPr>
-          <p:cNvPr id="70" name="journey card"/>
+          <p:cNvPr id="67" name="journey card"/>
           <p:cNvSpPr/>
           <p:nvPr/>
         </p:nvSpPr>
@@ -16415,7 +16227,7 @@
       </p:sp>
       <p:sp>
         <p:nvSpPr>
-          <p:cNvPr id="71" name="Text 60"/>
+          <p:cNvPr id="68" name="Text 58"/>
           <p:cNvSpPr txBox="1"/>
           <p:nvPr/>
         </p:nvSpPr>
@@ -16454,7 +16266,7 @@
       </p:sp>
       <p:sp>
         <p:nvSpPr>
-          <p:cNvPr id="72" name="Text 61"/>
+          <p:cNvPr id="69" name="Text 59"/>
           <p:cNvSpPr txBox="1"/>
           <p:nvPr/>
         </p:nvSpPr>
@@ -16493,7 +16305,7 @@
       </p:sp>
       <p:sp>
         <p:nvSpPr>
-          <p:cNvPr id="73" name="milestone"/>
+          <p:cNvPr id="70" name="milestone"/>
           <p:cNvSpPr/>
           <p:nvPr/>
         </p:nvSpPr>
@@ -16518,7 +16330,7 @@
       </p:sp>
       <p:sp>
         <p:nvSpPr>
-          <p:cNvPr id="74" name="Text 63"/>
+          <p:cNvPr id="71" name="Text 61"/>
           <p:cNvSpPr txBox="1"/>
           <p:nvPr/>
         </p:nvSpPr>
@@ -16557,7 +16369,7 @@
       </p:sp>
       <p:sp>
         <p:nvSpPr>
-          <p:cNvPr id="75" name="journey card"/>
+          <p:cNvPr id="72" name="journey card"/>
           <p:cNvSpPr/>
           <p:nvPr/>
         </p:nvSpPr>
@@ -16584,7 +16396,7 @@
       </p:sp>
       <p:sp>
         <p:nvSpPr>
-          <p:cNvPr id="76" name="Text 65"/>
+          <p:cNvPr id="73" name="Text 63"/>
           <p:cNvSpPr txBox="1"/>
           <p:nvPr/>
         </p:nvSpPr>
@@ -16623,7 +16435,7 @@
       </p:sp>
       <p:sp>
         <p:nvSpPr>
-          <p:cNvPr id="77" name="Text 66"/>
+          <p:cNvPr id="74" name="Text 64"/>
           <p:cNvSpPr txBox="1"/>
           <p:nvPr/>
         </p:nvSpPr>
@@ -16735,10 +16547,10 @@
       </p:grpSpPr>
       <p:sp>
         <p:nvSpPr>
-          <p:cNvPr id="2" name="Text 1"/>
+          <p:cNvPr id="2" name="Text 0"/>
           <p:cNvSpPr/>
           <p:nvPr>
-            <p:ph idx="102" type="title" hasCustomPrompt="1"/>
+            <p:ph idx="101" type="title" hasCustomPrompt="1"/>
           </p:nvPr>
         </p:nvSpPr>
         <p:spPr>
@@ -16839,7 +16651,7 @@
                 <a:ea typeface="Calibri" pitchFamily="34" charset="-122"/>
                 <a:cs typeface="Calibri" pitchFamily="34" charset="-120"/>
               </a:rPr>
-              <a:t>‹Team Name›</a:t>
+              <a:t>YuvaNex</a:t>
             </a:r>
             <a:endParaRPr lang="en-US" sz="1300" dirty="0"/>
           </a:p>
@@ -18448,7 +18260,7 @@
         <p:spPr>
           <a:xfrm>
             <a:off x="1024128" y="5468112"/>
-            <a:ext cx="6858000" cy="246888"/>
+            <a:ext cx="6126480" cy="246888"/>
           </a:xfrm>
           <a:prstGeom prst="rect">
             <a:avLst/>
@@ -18532,7 +18344,7 @@
         <p:spPr>
           <a:xfrm>
             <a:off x="1024128" y="5733288"/>
-            <a:ext cx="6858000" cy="246888"/>
+            <a:ext cx="6126480" cy="246888"/>
           </a:xfrm>
           <a:prstGeom prst="rect">
             <a:avLst/>
@@ -18616,7 +18428,7 @@
         <p:spPr>
           <a:xfrm>
             <a:off x="1024128" y="5998464"/>
-            <a:ext cx="6858000" cy="246888"/>
+            <a:ext cx="6126480" cy="246888"/>
           </a:xfrm>
           <a:prstGeom prst="rect">
             <a:avLst/>
@@ -18646,15 +18458,22 @@
               <a:buNone/>
             </a:pPr>
             <a:r>
-              <a:rPr lang="en-US" sz="1150" dirty="0">
+              <a:rPr lang="en-US" sz="1150" u="sng" dirty="0">
                 <a:solidFill>
                   <a:srgbClr val="FFFFFF"/>
                 </a:solidFill>
                 <a:latin typeface="Calibri" pitchFamily="34" charset="0"/>
                 <a:ea typeface="Calibri" pitchFamily="34" charset="-122"/>
                 <a:cs typeface="Calibri" pitchFamily="34" charset="-120"/>
-              </a:rPr>
-              <a:t>‹Add demo video link›</a:t>
+                <a:hlinkClick r:id="rId22" invalidUrl="" action="" tgtFrame="" tooltip="" history="1" highlightClick="0" endSnd="0">
+                  <a:extLst>
+                    <a:ext uri="{A12FA001-AC4F-418D-AE19-62706E023703}">
+                      <ahyp:hlinkClr xmlns:ahyp="http://schemas.microsoft.com/office/drawing/2018/hyperlinkcolor" val="tx"/>
+                    </a:ext>
+                  </a:extLst>
+                </a:hlinkClick>
+              </a:rPr>
+              <a:t>Student_Setu_Demo_Video.mp4 (GitHub)</a:t>
             </a:r>
             <a:endParaRPr lang="en-US" sz="1150" dirty="0"/>
           </a:p>
@@ -18662,70 +18481,7 @@
       </p:sp>
       <p:pic>
         <p:nvPicPr>
-          <p:cNvPr id="51" name="qr Live demo" descr="QR code: Live demo">    </p:cNvPr>
-          <p:cNvPicPr>
-            <a:picLocks noChangeAspect="1"/>
-          </p:cNvPicPr>
-          <p:nvPr/>
-        </p:nvPicPr>
-        <p:blipFill>
-          <a:blip r:embed="rId22"/>
-          <a:stretch>
-            <a:fillRect/>
-          </a:stretch>
-        </p:blipFill>
-        <p:spPr>
-          <a:xfrm>
-            <a:off x="8778240" y="5029200"/>
-            <a:ext cx="914400" cy="914400"/>
-          </a:xfrm>
-          <a:prstGeom prst="rect">
-            <a:avLst/>
-          </a:prstGeom>
-        </p:spPr>
-      </p:pic>
-      <p:sp>
-        <p:nvSpPr>
-          <p:cNvPr id="52" name="Text 43"/>
-          <p:cNvSpPr txBox="1"/>
-          <p:nvPr/>
-        </p:nvSpPr>
-        <p:spPr>
-          <a:xfrm>
-            <a:off x="8595360" y="5971032"/>
-            <a:ext cx="1280160" cy="228600"/>
-          </a:xfrm>
-          <a:prstGeom prst="rect">
-            <a:avLst/>
-          </a:prstGeom>
-          <a:noFill/>
-          <a:ln/>
-        </p:spPr>
-        <p:txBody>
-          <a:bodyPr wrap="square" lIns="0" tIns="0" rIns="0" bIns="0" rtlCol="0" anchor="t"/>
-          <a:lstStyle/>
-          <a:p>
-            <a:pPr algn="ctr" indent="0" marL="0">
-              <a:buNone/>
-            </a:pPr>
-            <a:r>
-              <a:rPr lang="en-US" sz="1050" b="1" dirty="0">
-                <a:solidFill>
-                  <a:srgbClr val="FFFFFF"/>
-                </a:solidFill>
-                <a:latin typeface="Calibri" pitchFamily="34" charset="0"/>
-                <a:ea typeface="Calibri" pitchFamily="34" charset="-122"/>
-                <a:cs typeface="Calibri" pitchFamily="34" charset="-120"/>
-              </a:rPr>
-              <a:t>Live demo</a:t>
-            </a:r>
-            <a:endParaRPr lang="en-US" sz="1050" dirty="0"/>
-          </a:p>
-        </p:txBody>
-      </p:sp>
-      <p:pic>
-        <p:nvPicPr>
-          <p:cNvPr id="53" name="qr GitHub" descr="QR code: GitHub">    </p:cNvPr>
+          <p:cNvPr id="51" name="qr Demo video" descr="QR code: Demo video">    </p:cNvPr>
           <p:cNvPicPr>
             <a:picLocks noChangeAspect="1"/>
           </p:cNvPicPr>
@@ -18739,6 +18495,132 @@
         </p:blipFill>
         <p:spPr>
           <a:xfrm>
+            <a:off x="7360920" y="5029200"/>
+            <a:ext cx="914400" cy="914400"/>
+          </a:xfrm>
+          <a:prstGeom prst="rect">
+            <a:avLst/>
+          </a:prstGeom>
+        </p:spPr>
+      </p:pic>
+      <p:sp>
+        <p:nvSpPr>
+          <p:cNvPr id="52" name="Text 43"/>
+          <p:cNvSpPr txBox="1"/>
+          <p:nvPr/>
+        </p:nvSpPr>
+        <p:spPr>
+          <a:xfrm>
+            <a:off x="7178040" y="5971032"/>
+            <a:ext cx="1280160" cy="228600"/>
+          </a:xfrm>
+          <a:prstGeom prst="rect">
+            <a:avLst/>
+          </a:prstGeom>
+          <a:noFill/>
+          <a:ln/>
+        </p:spPr>
+        <p:txBody>
+          <a:bodyPr wrap="square" lIns="0" tIns="0" rIns="0" bIns="0" rtlCol="0" anchor="t"/>
+          <a:lstStyle/>
+          <a:p>
+            <a:pPr algn="ctr" indent="0" marL="0">
+              <a:buNone/>
+            </a:pPr>
+            <a:r>
+              <a:rPr lang="en-US" sz="1050" b="1" dirty="0">
+                <a:solidFill>
+                  <a:srgbClr val="FFFFFF"/>
+                </a:solidFill>
+                <a:latin typeface="Calibri" pitchFamily="34" charset="0"/>
+                <a:ea typeface="Calibri" pitchFamily="34" charset="-122"/>
+                <a:cs typeface="Calibri" pitchFamily="34" charset="-120"/>
+              </a:rPr>
+              <a:t>Demo video</a:t>
+            </a:r>
+            <a:endParaRPr lang="en-US" sz="1050" dirty="0"/>
+          </a:p>
+        </p:txBody>
+      </p:sp>
+      <p:pic>
+        <p:nvPicPr>
+          <p:cNvPr id="53" name="qr Live demo" descr="QR code: Live demo">    </p:cNvPr>
+          <p:cNvPicPr>
+            <a:picLocks noChangeAspect="1"/>
+          </p:cNvPicPr>
+          <p:nvPr/>
+        </p:nvPicPr>
+        <p:blipFill>
+          <a:blip r:embed="rId24"/>
+          <a:stretch>
+            <a:fillRect/>
+          </a:stretch>
+        </p:blipFill>
+        <p:spPr>
+          <a:xfrm>
+            <a:off x="8778240" y="5029200"/>
+            <a:ext cx="914400" cy="914400"/>
+          </a:xfrm>
+          <a:prstGeom prst="rect">
+            <a:avLst/>
+          </a:prstGeom>
+        </p:spPr>
+      </p:pic>
+      <p:sp>
+        <p:nvSpPr>
+          <p:cNvPr id="54" name="Text 44"/>
+          <p:cNvSpPr txBox="1"/>
+          <p:nvPr/>
+        </p:nvSpPr>
+        <p:spPr>
+          <a:xfrm>
+            <a:off x="8595360" y="5971032"/>
+            <a:ext cx="1280160" cy="228600"/>
+          </a:xfrm>
+          <a:prstGeom prst="rect">
+            <a:avLst/>
+          </a:prstGeom>
+          <a:noFill/>
+          <a:ln/>
+        </p:spPr>
+        <p:txBody>
+          <a:bodyPr wrap="square" lIns="0" tIns="0" rIns="0" bIns="0" rtlCol="0" anchor="t"/>
+          <a:lstStyle/>
+          <a:p>
+            <a:pPr algn="ctr" indent="0" marL="0">
+              <a:buNone/>
+            </a:pPr>
+            <a:r>
+              <a:rPr lang="en-US" sz="1050" b="1" dirty="0">
+                <a:solidFill>
+                  <a:srgbClr val="FFFFFF"/>
+                </a:solidFill>
+                <a:latin typeface="Calibri" pitchFamily="34" charset="0"/>
+                <a:ea typeface="Calibri" pitchFamily="34" charset="-122"/>
+                <a:cs typeface="Calibri" pitchFamily="34" charset="-120"/>
+              </a:rPr>
+              <a:t>Live demo</a:t>
+            </a:r>
+            <a:endParaRPr lang="en-US" sz="1050" dirty="0"/>
+          </a:p>
+        </p:txBody>
+      </p:sp>
+      <p:pic>
+        <p:nvPicPr>
+          <p:cNvPr id="55" name="qr GitHub" descr="QR code: GitHub">    </p:cNvPr>
+          <p:cNvPicPr>
+            <a:picLocks noChangeAspect="1"/>
+          </p:cNvPicPr>
+          <p:nvPr/>
+        </p:nvPicPr>
+        <p:blipFill>
+          <a:blip r:embed="rId25"/>
+          <a:stretch>
+            <a:fillRect/>
+          </a:stretch>
+        </p:blipFill>
+        <p:spPr>
+          <a:xfrm>
             <a:off x="10195560" y="5029200"/>
             <a:ext cx="914400" cy="914400"/>
           </a:xfrm>
@@ -18749,7 +18631,7 @@
       </p:pic>
       <p:sp>
         <p:nvSpPr>
-          <p:cNvPr id="54" name="Text 44"/>
+          <p:cNvPr id="56" name="Text 45"/>
           <p:cNvSpPr txBox="1"/>
           <p:nvPr/>
         </p:nvSpPr>
